--- a/lectures/03/Виды отношений между классами.pptx
+++ b/lectures/03/Виды отношений между классами.pptx
@@ -5,7 +5,7 @@
     <p:sldMasterId id="2147483673" r:id="rId1"/>
   </p:sldMasterIdLst>
   <p:notesMasterIdLst>
-    <p:notesMasterId r:id="rId31"/>
+    <p:notesMasterId r:id="rId32"/>
   </p:notesMasterIdLst>
   <p:sldIdLst>
     <p:sldId id="377" r:id="rId2"/>
@@ -14,34 +14,35 @@
     <p:sldId id="380" r:id="rId5"/>
     <p:sldId id="381" r:id="rId6"/>
     <p:sldId id="382" r:id="rId7"/>
-    <p:sldId id="355" r:id="rId8"/>
-    <p:sldId id="354" r:id="rId9"/>
-    <p:sldId id="356" r:id="rId10"/>
-    <p:sldId id="357" r:id="rId11"/>
-    <p:sldId id="358" r:id="rId12"/>
-    <p:sldId id="359" r:id="rId13"/>
-    <p:sldId id="360" r:id="rId14"/>
-    <p:sldId id="361" r:id="rId15"/>
-    <p:sldId id="362" r:id="rId16"/>
-    <p:sldId id="364" r:id="rId17"/>
-    <p:sldId id="379" r:id="rId18"/>
-    <p:sldId id="365" r:id="rId19"/>
-    <p:sldId id="366" r:id="rId20"/>
-    <p:sldId id="367" r:id="rId21"/>
-    <p:sldId id="368" r:id="rId22"/>
-    <p:sldId id="369" r:id="rId23"/>
-    <p:sldId id="370" r:id="rId24"/>
-    <p:sldId id="371" r:id="rId25"/>
-    <p:sldId id="372" r:id="rId26"/>
-    <p:sldId id="373" r:id="rId27"/>
-    <p:sldId id="383" r:id="rId28"/>
-    <p:sldId id="374" r:id="rId29"/>
-    <p:sldId id="375" r:id="rId30"/>
+    <p:sldId id="384" r:id="rId8"/>
+    <p:sldId id="355" r:id="rId9"/>
+    <p:sldId id="354" r:id="rId10"/>
+    <p:sldId id="356" r:id="rId11"/>
+    <p:sldId id="357" r:id="rId12"/>
+    <p:sldId id="358" r:id="rId13"/>
+    <p:sldId id="359" r:id="rId14"/>
+    <p:sldId id="360" r:id="rId15"/>
+    <p:sldId id="361" r:id="rId16"/>
+    <p:sldId id="362" r:id="rId17"/>
+    <p:sldId id="364" r:id="rId18"/>
+    <p:sldId id="379" r:id="rId19"/>
+    <p:sldId id="365" r:id="rId20"/>
+    <p:sldId id="366" r:id="rId21"/>
+    <p:sldId id="367" r:id="rId22"/>
+    <p:sldId id="368" r:id="rId23"/>
+    <p:sldId id="369" r:id="rId24"/>
+    <p:sldId id="370" r:id="rId25"/>
+    <p:sldId id="371" r:id="rId26"/>
+    <p:sldId id="372" r:id="rId27"/>
+    <p:sldId id="373" r:id="rId28"/>
+    <p:sldId id="383" r:id="rId29"/>
+    <p:sldId id="374" r:id="rId30"/>
+    <p:sldId id="375" r:id="rId31"/>
   </p:sldIdLst>
   <p:sldSz cx="12192000" cy="6858000"/>
   <p:notesSz cx="6858000" cy="9144000"/>
   <p:custDataLst>
-    <p:tags r:id="rId32"/>
+    <p:tags r:id="rId33"/>
   </p:custDataLst>
   <p:defaultTextStyle>
     <a:defPPr>
@@ -240,7 +241,7 @@
             <a:fld id="{1A782170-78E6-47DA-9E37-7AC29E4CF366}" type="datetimeFigureOut">
               <a:rPr lang="ru-RU" smtClean="0"/>
               <a:pPr/>
-              <a:t>18.04.2025</a:t>
+              <a:t>02.04.2026</a:t>
             </a:fld>
             <a:endParaRPr lang="ru-RU"/>
           </a:p>
@@ -650,16 +651,39 @@
           <a:lstStyle/>
           <a:p>
             <a:r>
-              <a:rPr lang="ru-RU" b="0" i="0" dirty="0">
-                <a:solidFill>
-                  <a:srgbClr val="37352F"/>
-                </a:solidFill>
-                <a:effectLst/>
-                <a:latin typeface="-apple-system"/>
-              </a:rPr>
-              <a:t>Агрегация — тоже пример отношений часть-целое, и реализуется она, подобно композиции, с использованием структур или классов. Различия между композицией и агрегацией в основном семантические.</a:t>
-            </a:r>
-            <a:endParaRPr lang="ru-RU" dirty="0"/>
+              <a:rPr lang="ru-RU" dirty="0"/>
+              <a:t>На диаграмме классов композиция обозначается соединительной линией с закрашенным ромбом, исходящим от составного объекта. Со стороны включаемого объекта наконечника может и не быть.</a:t>
+            </a:r>
+          </a:p>
+          <a:p>
+            <a:r>
+              <a:rPr lang="ru-RU" dirty="0"/>
+              <a:t>Ограничений на количество включений простого объекта в состав более сложного нет. В приведённом примере </a:t>
+            </a:r>
+            <a:r>
+              <a:rPr lang="ru-RU" dirty="0" err="1"/>
+              <a:t>Circle</a:t>
+            </a:r>
+            <a:r>
+              <a:rPr lang="ru-RU" dirty="0"/>
+              <a:t> содержит один экземпляр </a:t>
+            </a:r>
+            <a:r>
+              <a:rPr lang="ru-RU" dirty="0" err="1"/>
+              <a:t>Point</a:t>
+            </a:r>
+            <a:r>
+              <a:rPr lang="ru-RU" dirty="0"/>
+              <a:t>, а </a:t>
+            </a:r>
+            <a:r>
+              <a:rPr lang="ru-RU" dirty="0" err="1"/>
+              <a:t>Triangle</a:t>
+            </a:r>
+            <a:r>
+              <a:rPr lang="ru-RU" dirty="0"/>
+              <a:t> — три. Чтобы подчеркнуть множественный характер связи, на конце стрелочки может указываться количество экземпляров.</a:t>
+            </a:r>
           </a:p>
         </p:txBody>
       </p:sp>
@@ -681,7 +705,7 @@
             <a:fld id="{7AD27560-579B-482E-BED7-036450DE1808}" type="slidenum">
               <a:rPr lang="ru-RU" smtClean="0"/>
               <a:pPr/>
-              <a:t>13</a:t>
+              <a:t>12</a:t>
             </a:fld>
             <a:endParaRPr lang="ru-RU"/>
           </a:p>
@@ -690,7 +714,7 @@
     </p:spTree>
     <p:extLst>
       <p:ext uri="{BB962C8B-B14F-4D97-AF65-F5344CB8AC3E}">
-        <p14:creationId xmlns:p14="http://schemas.microsoft.com/office/powerpoint/2010/main" val="471827487"/>
+        <p14:creationId xmlns:p14="http://schemas.microsoft.com/office/powerpoint/2010/main" val="914357788"/>
       </p:ext>
     </p:extLst>
   </p:cSld>
@@ -746,89 +770,173 @@
         </p:nvSpPr>
         <p:spPr/>
         <p:txBody>
-          <a:bodyPr>
-            <a:normAutofit fontScale="92500" lnSpcReduction="10000"/>
-          </a:bodyPr>
+          <a:bodyPr/>
           <a:lstStyle/>
           <a:p>
             <a:r>
               <a:rPr lang="ru-RU" dirty="0"/>
-              <a:t>Агрегация — тоже пример отношений часть-целое, и реализуется она, подобно композиции, с использованием структур или классов. Различия между композицией и агрегацией в основном семантические.</a:t>
-            </a:r>
-          </a:p>
-          <a:p>
-            <a:r>
-              <a:rPr lang="ru-RU" dirty="0"/>
-              <a:t>Особенности агрегации:</a:t>
-            </a:r>
-          </a:p>
-          <a:p>
-            <a:pPr>
+              <a:t>Композиция даёт нам важное преимущество — </a:t>
+            </a:r>
+            <a:r>
+              <a:rPr lang="ru-RU" b="1" dirty="0"/>
+              <a:t>сокрытие реализации</a:t>
+            </a:r>
+            <a:r>
+              <a:rPr lang="ru-RU" dirty="0"/>
+              <a:t>.</a:t>
+            </a:r>
+          </a:p>
+          <a:p>
+            <a:r>
+              <a:rPr lang="ru-RU" dirty="0"/>
+              <a:t>Класс-владелец управляет своими частями и </a:t>
+            </a:r>
+            <a:r>
+              <a:rPr lang="ru-RU" b="1" dirty="0"/>
+              <a:t>не обязан раскрывать их наружу</a:t>
+            </a:r>
+            <a:r>
+              <a:rPr lang="ru-RU" dirty="0"/>
+              <a:t>.</a:t>
+            </a:r>
+            <a:br>
+              <a:rPr lang="ru-RU" dirty="0"/>
+            </a:br>
+            <a:r>
+              <a:rPr lang="ru-RU" dirty="0"/>
+              <a:t>Во внешнем интерфейсе может вообще не быть упоминаний внутренних типов.</a:t>
+            </a:r>
+          </a:p>
+          <a:p>
+            <a:r>
+              <a:rPr lang="ru-RU" dirty="0"/>
+              <a:t>Например, </a:t>
+            </a:r>
+            <a:r>
+              <a:rPr lang="ru-RU" sz="1200" kern="1200" dirty="0" err="1">
+                <a:solidFill>
+                  <a:schemeClr val="tx1"/>
+                </a:solidFill>
+                <a:latin typeface="+mn-lt"/>
+                <a:ea typeface="+mn-ea"/>
+                <a:cs typeface="+mn-cs"/>
+              </a:rPr>
+              <a:t>AlarmClock</a:t>
+            </a:r>
+            <a:r>
+              <a:rPr lang="ru-RU" dirty="0"/>
+              <a:t> использует </a:t>
+            </a:r>
+            <a:r>
+              <a:rPr lang="ru-RU" sz="1200" kern="1200" dirty="0" err="1">
+                <a:solidFill>
+                  <a:schemeClr val="tx1"/>
+                </a:solidFill>
+                <a:latin typeface="+mn-lt"/>
+                <a:ea typeface="+mn-ea"/>
+                <a:cs typeface="+mn-cs"/>
+              </a:rPr>
+              <a:t>Clock</a:t>
+            </a:r>
+            <a:r>
+              <a:rPr lang="ru-RU" dirty="0"/>
+              <a:t> и </a:t>
+            </a:r>
+            <a:r>
+              <a:rPr lang="ru-RU" sz="1200" kern="1200" dirty="0" err="1">
+                <a:solidFill>
+                  <a:schemeClr val="tx1"/>
+                </a:solidFill>
+                <a:latin typeface="+mn-lt"/>
+                <a:ea typeface="+mn-ea"/>
+                <a:cs typeface="+mn-cs"/>
+              </a:rPr>
+              <a:t>Beeper</a:t>
+            </a:r>
+            <a:r>
+              <a:rPr lang="ru-RU" dirty="0"/>
+              <a:t>,</a:t>
+            </a:r>
+            <a:br>
+              <a:rPr lang="ru-RU" dirty="0"/>
+            </a:br>
+            <a:r>
+              <a:rPr lang="ru-RU" dirty="0"/>
+              <a:t>но пользователь будильника работает только с самим будильником.</a:t>
+            </a:r>
+          </a:p>
+          <a:p>
+            <a:r>
+              <a:rPr lang="ru-RU" dirty="0"/>
+              <a:t>Это позволяет:</a:t>
+            </a:r>
+          </a:p>
+          <a:p>
+            <a:pPr marL="171450" indent="-171450">
               <a:buFont typeface="Arial" panose="020B0604020202020204" pitchFamily="34" charset="0"/>
               <a:buChar char="•"/>
             </a:pPr>
             <a:r>
               <a:rPr lang="ru-RU" dirty="0"/>
-              <a:t>Часть является частью Целого.</a:t>
-            </a:r>
-          </a:p>
-          <a:p>
-            <a:pPr>
+              <a:t>упростить интерфейс </a:t>
+            </a:r>
+          </a:p>
+          <a:p>
+            <a:pPr marL="171450" indent="-171450">
               <a:buFont typeface="Arial" panose="020B0604020202020204" pitchFamily="34" charset="0"/>
               <a:buChar char="•"/>
             </a:pPr>
             <a:r>
               <a:rPr lang="ru-RU" dirty="0"/>
-              <a:t>Часть в один и тот же момент времени может принадлежать более чем одному Целому.</a:t>
-            </a:r>
-          </a:p>
-          <a:p>
-            <a:pPr>
+              <a:t>защитить внутреннее состояние </a:t>
+            </a:r>
+          </a:p>
+          <a:p>
+            <a:pPr marL="171450" indent="-171450">
               <a:buFont typeface="Arial" panose="020B0604020202020204" pitchFamily="34" charset="0"/>
               <a:buChar char="•"/>
             </a:pPr>
             <a:r>
               <a:rPr lang="ru-RU" dirty="0"/>
-              <a:t>Целое не управляет своими частями. При удалении Целого Часть продолжает существовать.</a:t>
-            </a:r>
-          </a:p>
-          <a:p>
-            <a:pPr>
-              <a:buFont typeface="Arial" panose="020B0604020202020204" pitchFamily="34" charset="0"/>
-              <a:buChar char="•"/>
-            </a:pPr>
-            <a:r>
-              <a:rPr lang="ru-RU" dirty="0"/>
-              <a:t>Часть не знает о существовании Целого.</a:t>
-            </a:r>
-          </a:p>
-          <a:p>
-            <a:pPr>
-              <a:buFont typeface="Arial" panose="020B0604020202020204" pitchFamily="34" charset="0"/>
-              <a:buChar char="•"/>
-            </a:pPr>
-            <a:r>
-              <a:rPr lang="ru-RU" dirty="0"/>
-              <a:t>Транзитивность — связи между агрегируемыми объектами не имеют циклов, то есть ни один из объектов не является прямой или косвенной частью самого себя.</a:t>
-            </a:r>
-          </a:p>
-          <a:p>
-            <a:endParaRPr lang="ru-RU" dirty="0"/>
-          </a:p>
-          <a:p>
-            <a:r>
-              <a:rPr lang="ru-RU" dirty="0"/>
-              <a:t>При композиции мы добавляем части к целому, используя обычные переменные-члены. А когда класс использует динамическое выделение памяти, применяем указатели. При этом часть не может существовать без целого. В качестве примера композиции классов, использующих динамическое выделение памяти, можно привести классы Осьминог и Односвязный список. При разрушении Осьминога происходит удаление его Щупалец, а при разрушении односвязного списка удаляются его узлы.</a:t>
-            </a:r>
-          </a:p>
-          <a:p>
-            <a:r>
-              <a:rPr lang="ru-RU" dirty="0"/>
-              <a:t>При агрегации мы также используем переменные-члены класса, только в этом случае они будут ссылками или указателями на объекты, созданные и существующие за пределами класса. Адреса объектов передаются классу-агрегату снаружи через параметры конструктора либо через параметры методов. При этом Часть может существовать отдельно от Целого.</a:t>
-            </a:r>
-          </a:p>
-          <a:p>
-            <a:endParaRPr lang="ru-RU" dirty="0"/>
+              <a:t>свободно менять реализацию </a:t>
+            </a:r>
+          </a:p>
+          <a:p>
+            <a:r>
+              <a:rPr lang="ru-RU" dirty="0"/>
+              <a:t>При этом сами компоненты остаются универсальными:</a:t>
+            </a:r>
+            <a:br>
+              <a:rPr lang="ru-RU" dirty="0"/>
+            </a:br>
+            <a:r>
+              <a:rPr lang="ru-RU" sz="1200" kern="1200" dirty="0" err="1">
+                <a:solidFill>
+                  <a:schemeClr val="tx1"/>
+                </a:solidFill>
+                <a:latin typeface="+mn-lt"/>
+                <a:ea typeface="+mn-ea"/>
+                <a:cs typeface="+mn-cs"/>
+              </a:rPr>
+              <a:t>Beeper</a:t>
+            </a:r>
+            <a:r>
+              <a:rPr lang="ru-RU" dirty="0"/>
+              <a:t> можно использовать и в других классах, не только в будильнике.</a:t>
+            </a:r>
+          </a:p>
+          <a:p>
+            <a:r>
+              <a:rPr lang="ru-RU" dirty="0"/>
+              <a:t>И, как и в любой композиции, при удалении объекта</a:t>
+            </a:r>
+            <a:br>
+              <a:rPr lang="ru-RU" dirty="0"/>
+            </a:br>
+            <a:r>
+              <a:rPr lang="ru-RU" dirty="0"/>
+              <a:t>все его части удаляются вместе с ним.</a:t>
+            </a:r>
           </a:p>
         </p:txBody>
       </p:sp>
@@ -850,7 +958,7 @@
             <a:fld id="{7AD27560-579B-482E-BED7-036450DE1808}" type="slidenum">
               <a:rPr lang="ru-RU" smtClean="0"/>
               <a:pPr/>
-              <a:t>14</a:t>
+              <a:t>13</a:t>
             </a:fld>
             <a:endParaRPr lang="ru-RU"/>
           </a:p>
@@ -859,7 +967,7 @@
     </p:spTree>
     <p:extLst>
       <p:ext uri="{BB962C8B-B14F-4D97-AF65-F5344CB8AC3E}">
-        <p14:creationId xmlns:p14="http://schemas.microsoft.com/office/powerpoint/2010/main" val="2730809305"/>
+        <p14:creationId xmlns:p14="http://schemas.microsoft.com/office/powerpoint/2010/main" val="3688023569"/>
       </p:ext>
     </p:extLst>
   </p:cSld>
@@ -918,28 +1026,6 @@
           <a:bodyPr/>
           <a:lstStyle/>
           <a:p>
-            <a:r>
-              <a:rPr lang="ru-RU" dirty="0"/>
-              <a:t>Примером агрегации можно назвать отношение итератора и узла односвязного списка. Итератор хранит указатель на узел односвязного списка, которым владеет другой объект, а именно односвязный список. Разрушение итератора не влияет на узел. Узел ничего не знает о существовании итератора. Агрегацией в односвязном списке также будет связь текущего узла списка со следующим за ним</a:t>
-            </a:r>
-            <a:r>
-              <a:rPr lang="en-US" dirty="0"/>
-              <a:t>.</a:t>
-            </a:r>
-          </a:p>
-          <a:p>
-            <a:r>
-              <a:rPr lang="ru-RU" dirty="0"/>
-              <a:t>Объект-агрегат обычно скрывает свои части от доступа извне. Например, итератор не имеет публичных методов для доступа к узлам списка, хотя в своём операторе разыменования возвращает ссылку на значение узла списка. Так внешний код не может получить доступ к служебным полям узла списка в обход итератора.</a:t>
-            </a:r>
-          </a:p>
-          <a:p>
-            <a:r>
-              <a:rPr lang="ru-RU" dirty="0"/>
-              <a:t>Так как Агрегат не единственный владелец своих частей, он должен быть готов к тому, что к его частям могут иметь доступ и другие объекты.</a:t>
-            </a:r>
-          </a:p>
-          <a:p>
             <a:endParaRPr lang="ru-RU" dirty="0"/>
           </a:p>
         </p:txBody>
@@ -962,7 +1048,7 @@
             <a:fld id="{7AD27560-579B-482E-BED7-036450DE1808}" type="slidenum">
               <a:rPr lang="ru-RU" smtClean="0"/>
               <a:pPr/>
-              <a:t>15</a:t>
+              <a:t>14</a:t>
             </a:fld>
             <a:endParaRPr lang="ru-RU"/>
           </a:p>
@@ -971,7 +1057,7 @@
     </p:spTree>
     <p:extLst>
       <p:ext uri="{BB962C8B-B14F-4D97-AF65-F5344CB8AC3E}">
-        <p14:creationId xmlns:p14="http://schemas.microsoft.com/office/powerpoint/2010/main" val="610084316"/>
+        <p14:creationId xmlns:p14="http://schemas.microsoft.com/office/powerpoint/2010/main" val="471827487"/>
       </p:ext>
     </p:extLst>
   </p:cSld>
@@ -1027,32 +1113,44 @@
         </p:nvSpPr>
         <p:spPr/>
         <p:txBody>
-          <a:bodyPr/>
+          <a:bodyPr>
+            <a:normAutofit/>
+          </a:bodyPr>
           <a:lstStyle/>
           <a:p>
             <a:r>
               <a:rPr lang="ru-RU" dirty="0"/>
-              <a:t>Агрегация позволяет одному объекту делегировать часть работы другому, переданному извне, объекту. Например, </a:t>
-            </a:r>
-            <a:r>
-              <a:rPr lang="en-US" dirty="0" err="1"/>
-              <a:t>RemoteControl</a:t>
-            </a:r>
-            <a:r>
-              <a:rPr lang="en-US" dirty="0"/>
-              <a:t> </a:t>
-            </a:r>
-            <a:r>
-              <a:rPr lang="ru-RU" dirty="0"/>
-              <a:t>делегирует выполнение операций классу </a:t>
-            </a:r>
-            <a:r>
-              <a:rPr lang="en-US" dirty="0"/>
-              <a:t>TV</a:t>
-            </a:r>
-            <a:r>
-              <a:rPr lang="ru-RU" dirty="0"/>
-              <a:t>, а сам лишь обрабатывает команды пользователя</a:t>
+              <a:t>Агрегация — это промежуточный вариант между ассоциацией и композицией.</a:t>
+            </a:r>
+          </a:p>
+          <a:p>
+            <a:r>
+              <a:rPr lang="ru-RU" dirty="0"/>
+              <a:t>Как и в композиции, здесь есть отношение «часть–целое», но без полного владения.</a:t>
+            </a:r>
+          </a:p>
+          <a:p>
+            <a:r>
+              <a:rPr lang="ru-RU" dirty="0"/>
+              <a:t>Целое использует части, но не управляет их временем жизни. Если удалить целый объект, его части продолжают существовать.</a:t>
+            </a:r>
+          </a:p>
+          <a:p>
+            <a:r>
+              <a:rPr lang="ru-RU" dirty="0"/>
+              <a:t>Ключевое отличие от композиции: часть может принадлежать сразу нескольким объектам и существовать отдельно.</a:t>
+            </a:r>
+          </a:p>
+          <a:p>
+            <a:r>
+              <a:rPr lang="ru-RU" dirty="0"/>
+              <a:t>В C++ это обычно реализуется через указатели или ссылки на объекты, созданные снаружи.</a:t>
+            </a:r>
+          </a:p>
+          <a:p>
+            <a:r>
+              <a:rPr lang="ru-RU" dirty="0"/>
+              <a:t>Таким образом, агрегация — это «ослабленная композиция»: связь есть, но владение неполное.</a:t>
             </a:r>
           </a:p>
         </p:txBody>
@@ -1075,7 +1173,7 @@
             <a:fld id="{7AD27560-579B-482E-BED7-036450DE1808}" type="slidenum">
               <a:rPr lang="ru-RU" smtClean="0"/>
               <a:pPr/>
-              <a:t>16</a:t>
+              <a:t>15</a:t>
             </a:fld>
             <a:endParaRPr lang="ru-RU"/>
           </a:p>
@@ -1084,7 +1182,7 @@
     </p:spTree>
     <p:extLst>
       <p:ext uri="{BB962C8B-B14F-4D97-AF65-F5344CB8AC3E}">
-        <p14:creationId xmlns:p14="http://schemas.microsoft.com/office/powerpoint/2010/main" val="2000940002"/>
+        <p14:creationId xmlns:p14="http://schemas.microsoft.com/office/powerpoint/2010/main" val="2730809305"/>
       </p:ext>
     </p:extLst>
   </p:cSld>
@@ -1145,17 +1243,84 @@
           <a:p>
             <a:r>
               <a:rPr lang="ru-RU" dirty="0"/>
-              <a:t>При композиции и агрегации Целое оказывается связанным с Частью в течение длительного времени — поля Целого хранят Часть по значению, ссылке или указателю.</a:t>
-            </a:r>
-          </a:p>
-          <a:p>
-            <a:r>
-              <a:rPr lang="ru-RU" dirty="0"/>
-              <a:t>В жизни потребность в каком-либо объекте нам часто нужна лишь для выполнения некоторой задачи: мы вызываем такси, чтобы доехать до нужного места, берём нож, чтобы сделать бутерброд, прибегаем к услугам парикмахера, чтобы подстричься. После выполнения задачи потребность в объекте исчезает до следующего раза. И правда, незачем держать при себе парикмахера до конца своей жизни.</a:t>
-            </a:r>
-          </a:p>
-          <a:p>
-            <a:endParaRPr lang="ru-RU" dirty="0"/>
+              <a:t>Здесь показан пример агрегации.</a:t>
+            </a:r>
+          </a:p>
+          <a:p>
+            <a:r>
+              <a:rPr lang="ru-RU" dirty="0"/>
+              <a:t>Класс </a:t>
+            </a:r>
+            <a:r>
+              <a:rPr lang="ru-RU" sz="1200" kern="1200" dirty="0" err="1">
+                <a:solidFill>
+                  <a:schemeClr val="tx1"/>
+                </a:solidFill>
+                <a:latin typeface="+mn-lt"/>
+                <a:ea typeface="+mn-ea"/>
+                <a:cs typeface="+mn-cs"/>
+              </a:rPr>
+              <a:t>RemoteControl</a:t>
+            </a:r>
+            <a:r>
+              <a:rPr lang="ru-RU" dirty="0"/>
+              <a:t> использует объект </a:t>
+            </a:r>
+            <a:r>
+              <a:rPr lang="ru-RU" sz="1200" kern="1200" dirty="0">
+                <a:solidFill>
+                  <a:schemeClr val="tx1"/>
+                </a:solidFill>
+                <a:latin typeface="+mn-lt"/>
+                <a:ea typeface="+mn-ea"/>
+                <a:cs typeface="+mn-cs"/>
+              </a:rPr>
+              <a:t>TV</a:t>
+            </a:r>
+            <a:r>
+              <a:rPr lang="ru-RU" dirty="0"/>
+              <a:t>, но не создаёт его и не управляет его временем жизни. Телевизор передаётся извне и сохраняется по ссылке.</a:t>
+            </a:r>
+          </a:p>
+          <a:p>
+            <a:r>
+              <a:rPr lang="ru-RU" dirty="0"/>
+              <a:t>Да, в этой реализации пульт не может работать без телевизора — он обязан получить его в конструкторе. Но это ограничение интерфейса, а не владения.</a:t>
+            </a:r>
+          </a:p>
+          <a:p>
+            <a:r>
+              <a:rPr lang="ru-RU" dirty="0"/>
+              <a:t>Ключевой момент в другом: пульт </a:t>
+            </a:r>
+            <a:r>
+              <a:rPr lang="ru-RU" b="1" dirty="0"/>
+              <a:t>не владеет телевизором</a:t>
+            </a:r>
+            <a:r>
+              <a:rPr lang="ru-RU" dirty="0"/>
+              <a:t>. Он его не создаёт и не удаляет.</a:t>
+            </a:r>
+          </a:p>
+          <a:p>
+            <a:r>
+              <a:rPr lang="ru-RU" dirty="0"/>
+              <a:t>Телевизор может существовать отдельно от пульта и использоваться другими объектами.</a:t>
+            </a:r>
+          </a:p>
+          <a:p>
+            <a:r>
+              <a:rPr lang="ru-RU" dirty="0"/>
+              <a:t>Именно это и отличает агрегацию от композиции: зависимость может быть, но </a:t>
+            </a:r>
+            <a:r>
+              <a:rPr lang="ru-RU" b="1" dirty="0"/>
+              <a:t>владение отсутствует</a:t>
+            </a:r>
+            <a:r>
+              <a:rPr lang="ru-RU" dirty="0"/>
+              <a:t>.</a:t>
+            </a:r>
           </a:p>
         </p:txBody>
       </p:sp>
@@ -1177,7 +1342,7 @@
             <a:fld id="{7AD27560-579B-482E-BED7-036450DE1808}" type="slidenum">
               <a:rPr lang="ru-RU" smtClean="0"/>
               <a:pPr/>
-              <a:t>18</a:t>
+              <a:t>16</a:t>
             </a:fld>
             <a:endParaRPr lang="ru-RU"/>
           </a:p>
@@ -1186,7 +1351,7 @@
     </p:spTree>
     <p:extLst>
       <p:ext uri="{BB962C8B-B14F-4D97-AF65-F5344CB8AC3E}">
-        <p14:creationId xmlns:p14="http://schemas.microsoft.com/office/powerpoint/2010/main" val="2207217243"/>
+        <p14:creationId xmlns:p14="http://schemas.microsoft.com/office/powerpoint/2010/main" val="610084316"/>
       </p:ext>
     </p:extLst>
   </p:cSld>
@@ -1247,47 +1412,117 @@
           <a:p>
             <a:r>
               <a:rPr lang="ru-RU" dirty="0"/>
-              <a:t>Такого рода отношение называется зависимостью, или отношением «‎Клиент-Поставщик». У Клиента возникает зависимость от Поставщика при решении некоторой задачи. Зависимость возникает в любом из следующих случаев:</a:t>
-            </a:r>
-          </a:p>
-          <a:p>
-            <a:pPr>
-              <a:buFont typeface="Arial" panose="020B0604020202020204" pitchFamily="34" charset="0"/>
-              <a:buChar char="•"/>
-            </a:pPr>
-            <a:r>
-              <a:rPr lang="ru-RU" dirty="0"/>
-              <a:t>Поставщик создаётся внутри метода Клиента.</a:t>
-            </a:r>
-          </a:p>
-          <a:p>
-            <a:pPr>
-              <a:buFont typeface="Arial" panose="020B0604020202020204" pitchFamily="34" charset="0"/>
-              <a:buChar char="•"/>
-            </a:pPr>
-            <a:r>
-              <a:rPr lang="ru-RU" dirty="0"/>
-              <a:t>Поставщик передаётся в метод Клиента по значению, ссылке или указателю.</a:t>
-            </a:r>
-          </a:p>
-          <a:p>
-            <a:pPr>
-              <a:buFont typeface="Arial" panose="020B0604020202020204" pitchFamily="34" charset="0"/>
-              <a:buChar char="•"/>
-            </a:pPr>
-            <a:r>
-              <a:rPr lang="ru-RU" dirty="0"/>
-              <a:t>Метод клиента возвращает Поставщика.</a:t>
-            </a:r>
-          </a:p>
-          <a:p>
-            <a:r>
-              <a:rPr lang="ru-RU" dirty="0"/>
-              <a:t>Во всех упомянутых ситуациях зависимость от Поставщика существует лишь на протяжении вызова метода Клиента — в локальных переменных, параметрах функций и временных объектах.</a:t>
-            </a:r>
-          </a:p>
-          <a:p>
-            <a:endParaRPr lang="ru-RU" dirty="0"/>
+              <a:t>Агрегация часто используется для </a:t>
+            </a:r>
+            <a:r>
+              <a:rPr lang="ru-RU" b="1" dirty="0"/>
+              <a:t>делегирования работы</a:t>
+            </a:r>
+            <a:r>
+              <a:rPr lang="ru-RU" dirty="0"/>
+              <a:t>.</a:t>
+            </a:r>
+          </a:p>
+          <a:p>
+            <a:r>
+              <a:rPr lang="ru-RU" dirty="0"/>
+              <a:t>Один объект не реализует всю логику сам, а передаёт её другому объекту, который получил извне.</a:t>
+            </a:r>
+          </a:p>
+          <a:p>
+            <a:r>
+              <a:rPr lang="ru-RU" dirty="0"/>
+              <a:t>В нашем примере </a:t>
+            </a:r>
+            <a:r>
+              <a:rPr lang="ru-RU" sz="1200" kern="1200" dirty="0" err="1">
+                <a:solidFill>
+                  <a:schemeClr val="tx1"/>
+                </a:solidFill>
+                <a:latin typeface="+mn-lt"/>
+                <a:ea typeface="+mn-ea"/>
+                <a:cs typeface="+mn-cs"/>
+              </a:rPr>
+              <a:t>RemoteControl</a:t>
+            </a:r>
+            <a:r>
+              <a:rPr lang="ru-RU" dirty="0"/>
+              <a:t> не управляет телевизором напрямую — он просто принимает команды пользователя и </a:t>
+            </a:r>
+            <a:r>
+              <a:rPr lang="ru-RU" b="1" dirty="0"/>
+              <a:t>делегирует выполнение</a:t>
+            </a:r>
+            <a:r>
+              <a:rPr lang="ru-RU" dirty="0"/>
+              <a:t> объекту </a:t>
+            </a:r>
+            <a:r>
+              <a:rPr lang="ru-RU" sz="1200" kern="1200" dirty="0">
+                <a:solidFill>
+                  <a:schemeClr val="tx1"/>
+                </a:solidFill>
+                <a:latin typeface="+mn-lt"/>
+                <a:ea typeface="+mn-ea"/>
+                <a:cs typeface="+mn-cs"/>
+              </a:rPr>
+              <a:t>TV</a:t>
+            </a:r>
+            <a:r>
+              <a:rPr lang="ru-RU" dirty="0"/>
+              <a:t>.</a:t>
+            </a:r>
+          </a:p>
+          <a:p>
+            <a:r>
+              <a:rPr lang="ru-RU" dirty="0"/>
+              <a:t>Например, при включении пульт вызывает </a:t>
+            </a:r>
+            <a:r>
+              <a:rPr lang="ru-RU" sz="1200" kern="1200" dirty="0" err="1">
+                <a:solidFill>
+                  <a:schemeClr val="tx1"/>
+                </a:solidFill>
+                <a:latin typeface="+mn-lt"/>
+                <a:ea typeface="+mn-ea"/>
+                <a:cs typeface="+mn-cs"/>
+              </a:rPr>
+              <a:t>m_tv.TurnOn</a:t>
+            </a:r>
+            <a:r>
+              <a:rPr lang="ru-RU" sz="1200" kern="1200" dirty="0">
+                <a:solidFill>
+                  <a:schemeClr val="tx1"/>
+                </a:solidFill>
+                <a:latin typeface="+mn-lt"/>
+                <a:ea typeface="+mn-ea"/>
+                <a:cs typeface="+mn-cs"/>
+              </a:rPr>
+              <a:t>()</a:t>
+            </a:r>
+            <a:r>
+              <a:rPr lang="ru-RU" dirty="0"/>
+              <a:t> и не знает, как именно телевизор это делает.</a:t>
+            </a:r>
+          </a:p>
+          <a:p>
+            <a:r>
+              <a:rPr lang="ru-RU" dirty="0"/>
+              <a:t>Так мы разделяем ответственность:</a:t>
+            </a:r>
+            <a:br>
+              <a:rPr lang="ru-RU" dirty="0"/>
+            </a:br>
+            <a:r>
+              <a:rPr lang="ru-RU" dirty="0"/>
+              <a:t>пульт отвечает за взаимодействие с пользователем, а телевизор — за свою внутреннюю логику.</a:t>
+            </a:r>
+          </a:p>
+          <a:p>
+            <a:r>
+              <a:rPr lang="ru-RU" dirty="0"/>
+              <a:t>Это делает систему более гибкой: мы можем заменить телевизор на другой, не меняя код пульта.</a:t>
+            </a:r>
           </a:p>
         </p:txBody>
       </p:sp>
@@ -1309,7 +1544,7 @@
             <a:fld id="{7AD27560-579B-482E-BED7-036450DE1808}" type="slidenum">
               <a:rPr lang="ru-RU" smtClean="0"/>
               <a:pPr/>
-              <a:t>19</a:t>
+              <a:t>17</a:t>
             </a:fld>
             <a:endParaRPr lang="ru-RU"/>
           </a:p>
@@ -1318,7 +1553,7 @@
     </p:spTree>
     <p:extLst>
       <p:ext uri="{BB962C8B-B14F-4D97-AF65-F5344CB8AC3E}">
-        <p14:creationId xmlns:p14="http://schemas.microsoft.com/office/powerpoint/2010/main" val="3269271602"/>
+        <p14:creationId xmlns:p14="http://schemas.microsoft.com/office/powerpoint/2010/main" val="2000940002"/>
       </p:ext>
     </p:extLst>
   </p:cSld>
@@ -1347,7 +1582,7 @@
       </p:grpSpPr>
       <p:sp>
         <p:nvSpPr>
-          <p:cNvPr id="2" name="Образ слайда 1"/>
+          <p:cNvPr id="2" name="Slide Image Placeholder 1"/>
           <p:cNvSpPr>
             <a:spLocks noGrp="1" noRot="1" noChangeAspect="1"/>
           </p:cNvSpPr>
@@ -1355,16 +1590,11 @@
             <p:ph type="sldImg"/>
           </p:nvPr>
         </p:nvSpPr>
-        <p:spPr>
-          <a:xfrm>
-            <a:off x="381000" y="685800"/>
-            <a:ext cx="6096000" cy="3429000"/>
-          </a:xfrm>
-        </p:spPr>
+        <p:spPr/>
       </p:sp>
       <p:sp>
         <p:nvSpPr>
-          <p:cNvPr id="3" name="Заметки 2"/>
+          <p:cNvPr id="3" name="Notes Placeholder 2"/>
           <p:cNvSpPr>
             <a:spLocks noGrp="1"/>
           </p:cNvSpPr>
@@ -1379,100 +1609,144 @@
           <a:p>
             <a:r>
               <a:rPr lang="ru-RU" dirty="0"/>
-              <a:t>Ещё один пример — загрузка и сохранение объектов в потоки ввода и вывода</a:t>
-            </a:r>
-            <a:r>
-              <a:rPr lang="en-US" dirty="0"/>
-              <a:t>.</a:t>
-            </a:r>
-          </a:p>
-          <a:p>
-            <a:pPr marL="0" marR="0" lvl="0" indent="0" algn="l" defTabSz="914400" rtl="0" eaLnBrk="1" fontAlgn="auto" latinLnBrk="0" hangingPunct="1">
-              <a:lnSpc>
-                <a:spcPct val="100000"/>
-              </a:lnSpc>
-              <a:spcBef>
-                <a:spcPts val="0"/>
-              </a:spcBef>
-              <a:spcAft>
-                <a:spcPts val="0"/>
-              </a:spcAft>
-              <a:buClrTx/>
-              <a:buSzTx/>
-              <a:buFontTx/>
-              <a:buNone/>
-              <a:tabLst/>
-              <a:defRPr/>
-            </a:pPr>
-            <a:r>
-              <a:rPr lang="ru-RU" dirty="0"/>
-              <a:t>Класс </a:t>
-            </a:r>
-            <a:r>
-              <a:rPr lang="ru-RU" dirty="0" err="1"/>
-              <a:t>Document</a:t>
-            </a:r>
-            <a:r>
-              <a:rPr lang="ru-RU" dirty="0"/>
-              <a:t> зависит от классов </a:t>
-            </a:r>
-            <a:r>
-              <a:rPr lang="ru-RU" dirty="0" err="1"/>
-              <a:t>ostream</a:t>
+              <a:t>Здесь показан более реалистичный пример агрегации.</a:t>
+            </a:r>
+          </a:p>
+          <a:p>
+            <a:r>
+              <a:rPr lang="ru-RU" dirty="0"/>
+              <a:t>Классы </a:t>
+            </a:r>
+            <a:r>
+              <a:rPr lang="ru-RU" sz="1200" kern="1200" dirty="0" err="1">
+                <a:solidFill>
+                  <a:schemeClr val="tx1"/>
+                </a:solidFill>
+                <a:latin typeface="+mn-lt"/>
+                <a:ea typeface="+mn-ea"/>
+                <a:cs typeface="+mn-cs"/>
+              </a:rPr>
+              <a:t>ImageView</a:t>
             </a:r>
             <a:r>
               <a:rPr lang="ru-RU" dirty="0"/>
               <a:t> и </a:t>
             </a:r>
             <a:r>
-              <a:rPr lang="ru-RU" dirty="0" err="1"/>
-              <a:t>istream</a:t>
-            </a:r>
-            <a:r>
-              <a:rPr lang="ru-RU" dirty="0"/>
-              <a:t> только во время вызова методов </a:t>
-            </a:r>
-            <a:r>
-              <a:rPr lang="ru-RU" dirty="0" err="1"/>
-              <a:t>SaveToStream</a:t>
-            </a:r>
-            <a:r>
-              <a:rPr lang="ru-RU" dirty="0"/>
-              <a:t> и </a:t>
-            </a:r>
-            <a:r>
-              <a:rPr lang="ru-RU" dirty="0" err="1"/>
-              <a:t>LoadFromStream</a:t>
-            </a:r>
-            <a:r>
-              <a:rPr lang="ru-RU" dirty="0"/>
-              <a:t>. Это значит, что на протяжении жизни Документа его можно сохранять в разные потоки вывода или загружать из разных потоков ввода. Точь-в-точь как для печати одного и того же документа вы используете разные листы бумаги. Обратной зависимости </a:t>
-            </a:r>
-            <a:r>
-              <a:rPr lang="ru-RU" dirty="0" err="1"/>
-              <a:t>ostream</a:t>
-            </a:r>
-            <a:r>
-              <a:rPr lang="ru-RU" dirty="0"/>
-              <a:t> и </a:t>
-            </a:r>
-            <a:r>
-              <a:rPr lang="ru-RU" dirty="0" err="1"/>
-              <a:t>istream</a:t>
-            </a:r>
-            <a:r>
-              <a:rPr lang="ru-RU" dirty="0"/>
-              <a:t> от документа нет.</a:t>
-            </a:r>
-          </a:p>
-          <a:p>
-            <a:endParaRPr lang="ru-RU" dirty="0"/>
+              <a:rPr lang="ru-RU" sz="1200" kern="1200" dirty="0" err="1">
+                <a:solidFill>
+                  <a:schemeClr val="tx1"/>
+                </a:solidFill>
+                <a:latin typeface="+mn-lt"/>
+                <a:ea typeface="+mn-ea"/>
+                <a:cs typeface="+mn-cs"/>
+              </a:rPr>
+              <a:t>UsersAPIGateway</a:t>
+            </a:r>
+            <a:r>
+              <a:rPr lang="ru-RU" dirty="0"/>
+              <a:t> используют </a:t>
+            </a:r>
+            <a:r>
+              <a:rPr lang="ru-RU" sz="1200" kern="1200" dirty="0" err="1">
+                <a:solidFill>
+                  <a:schemeClr val="tx1"/>
+                </a:solidFill>
+                <a:latin typeface="+mn-lt"/>
+                <a:ea typeface="+mn-ea"/>
+                <a:cs typeface="+mn-cs"/>
+              </a:rPr>
+              <a:t>HTTPClient</a:t>
+            </a:r>
+            <a:r>
+              <a:rPr lang="ru-RU" dirty="0"/>
+              <a:t> для отправки запросов. При этом </a:t>
+            </a:r>
+            <a:r>
+              <a:rPr lang="ru-RU" sz="1200" kern="1200" dirty="0" err="1">
+                <a:solidFill>
+                  <a:schemeClr val="tx1"/>
+                </a:solidFill>
+                <a:latin typeface="+mn-lt"/>
+                <a:ea typeface="+mn-ea"/>
+                <a:cs typeface="+mn-cs"/>
+              </a:rPr>
+              <a:t>HTTPClient</a:t>
+            </a:r>
+            <a:r>
+              <a:rPr lang="ru-RU" dirty="0"/>
+              <a:t> передаётся им извне и хранится по ссылке.</a:t>
+            </a:r>
+          </a:p>
+          <a:p>
+            <a:r>
+              <a:rPr lang="ru-RU" dirty="0"/>
+              <a:t>Важно, что ни один из этих классов не владеет клиентом. Они просто используют его как сервис.</a:t>
+            </a:r>
+          </a:p>
+          <a:p>
+            <a:r>
+              <a:rPr lang="ru-RU" dirty="0"/>
+              <a:t>При этом вовсе не обязательно, что они используют один и тот же экземпляр </a:t>
+            </a:r>
+            <a:r>
+              <a:rPr lang="ru-RU" sz="1200" kern="1200" dirty="0" err="1">
+                <a:solidFill>
+                  <a:schemeClr val="tx1"/>
+                </a:solidFill>
+                <a:latin typeface="+mn-lt"/>
+                <a:ea typeface="+mn-ea"/>
+                <a:cs typeface="+mn-cs"/>
+              </a:rPr>
+              <a:t>HTTPClient</a:t>
+            </a:r>
+            <a:r>
+              <a:rPr lang="ru-RU" dirty="0"/>
+              <a:t>. Но такая возможность есть — и это удобно.</a:t>
+            </a:r>
+          </a:p>
+          <a:p>
+            <a:r>
+              <a:rPr lang="ru-RU" dirty="0"/>
+              <a:t>Фактически, </a:t>
+            </a:r>
+            <a:r>
+              <a:rPr lang="ru-RU" sz="1200" kern="1200" dirty="0" err="1">
+                <a:solidFill>
+                  <a:schemeClr val="tx1"/>
+                </a:solidFill>
+                <a:latin typeface="+mn-lt"/>
+                <a:ea typeface="+mn-ea"/>
+                <a:cs typeface="+mn-cs"/>
+              </a:rPr>
+              <a:t>HTTPClient</a:t>
+            </a:r>
+            <a:r>
+              <a:rPr lang="ru-RU" dirty="0"/>
+              <a:t> выступает как переиспользуемый компонент. Мы можем подключать его к разным частям системы, не дублируя код.</a:t>
+            </a:r>
+          </a:p>
+          <a:p>
+            <a:r>
+              <a:rPr lang="ru-RU" dirty="0"/>
+              <a:t>И это ключевое преимущество агрегации:</a:t>
+            </a:r>
+            <a:br>
+              <a:rPr lang="ru-RU" dirty="0"/>
+            </a:br>
+            <a:r>
+              <a:rPr lang="ru-RU" dirty="0"/>
+              <a:t>мы можем делиться объектами между классами, не накладывая жёстких ограничений на владение и жизненный цикл.</a:t>
+            </a:r>
+          </a:p>
+          <a:p>
+            <a:endParaRPr lang="en-US" dirty="0"/>
           </a:p>
         </p:txBody>
       </p:sp>
       <p:sp>
         <p:nvSpPr>
-          <p:cNvPr id="4" name="Номер слайда 3"/>
+          <p:cNvPr id="4" name="Slide Number Placeholder 3"/>
           <p:cNvSpPr>
             <a:spLocks noGrp="1"/>
           </p:cNvSpPr>
@@ -1488,7 +1762,7 @@
             <a:fld id="{7AD27560-579B-482E-BED7-036450DE1808}" type="slidenum">
               <a:rPr lang="ru-RU" smtClean="0"/>
               <a:pPr/>
-              <a:t>21</a:t>
+              <a:t>18</a:t>
             </a:fld>
             <a:endParaRPr lang="ru-RU"/>
           </a:p>
@@ -1497,7 +1771,7 @@
     </p:spTree>
     <p:extLst>
       <p:ext uri="{BB962C8B-B14F-4D97-AF65-F5344CB8AC3E}">
-        <p14:creationId xmlns:p14="http://schemas.microsoft.com/office/powerpoint/2010/main" val="2014209181"/>
+        <p14:creationId xmlns:p14="http://schemas.microsoft.com/office/powerpoint/2010/main" val="3686046528"/>
       </p:ext>
     </p:extLst>
   </p:cSld>
@@ -1558,106 +1832,17 @@
           <a:p>
             <a:r>
               <a:rPr lang="ru-RU" dirty="0"/>
-              <a:t>На схемах зависимость изображается пунктирной стрелкой, идущей от Клиента к Поставщику. Чтобы конкретизировать, какой вид зависимости используется, на стрелке дополнительно может указываться одно из следующих слов:</a:t>
-            </a:r>
-          </a:p>
-          <a:p>
-            <a:pPr>
-              <a:buFont typeface="Arial" panose="020B0604020202020204" pitchFamily="34" charset="0"/>
-              <a:buChar char="•"/>
-            </a:pPr>
-            <a:r>
-              <a:rPr lang="ru-RU" dirty="0" err="1"/>
-              <a:t>create</a:t>
-            </a:r>
-            <a:r>
-              <a:rPr lang="ru-RU" dirty="0"/>
-              <a:t>. Метод Клиента создаёт экземпляр Поставщика и использует его, не передавая наружу.</a:t>
-            </a:r>
-          </a:p>
-          <a:p>
-            <a:pPr>
-              <a:buFont typeface="Arial" panose="020B0604020202020204" pitchFamily="34" charset="0"/>
-              <a:buChar char="•"/>
-            </a:pPr>
-            <a:r>
-              <a:rPr lang="ru-RU" dirty="0" err="1"/>
-              <a:t>return</a:t>
-            </a:r>
-            <a:r>
-              <a:rPr lang="ru-RU" dirty="0"/>
-              <a:t>. Клиент возвращает экземпляр Поставщика. При этом клиент может создавать Поставщика самостоятельно или делегировать создание другому объекту. </a:t>
-            </a:r>
-            <a:endParaRPr lang="en-US" dirty="0"/>
-          </a:p>
-          <a:p>
-            <a:pPr>
-              <a:buFont typeface="Arial" panose="020B0604020202020204" pitchFamily="34" charset="0"/>
-              <a:buChar char="•"/>
-            </a:pPr>
-            <a:r>
-              <a:rPr lang="ru-RU" dirty="0" err="1"/>
-              <a:t>use</a:t>
-            </a:r>
-            <a:r>
-              <a:rPr lang="ru-RU" dirty="0"/>
-              <a:t>. Клиент использует зависимость, переданную ему через параметр метода. Для этого он вызывает методы переданных ему параметров или передаёт их дальше в качестве параметров.</a:t>
-            </a:r>
-          </a:p>
-          <a:p>
-            <a:pPr marL="0" marR="0" lvl="0" indent="0" algn="l" defTabSz="914400" rtl="0" eaLnBrk="1" fontAlgn="auto" latinLnBrk="0" hangingPunct="1">
-              <a:lnSpc>
-                <a:spcPct val="100000"/>
-              </a:lnSpc>
-              <a:spcBef>
-                <a:spcPts val="0"/>
-              </a:spcBef>
-              <a:spcAft>
-                <a:spcPts val="0"/>
-              </a:spcAft>
-              <a:buClrTx/>
-              <a:buSzTx/>
-              <a:buFontTx/>
-              <a:buNone/>
-              <a:tabLst/>
-              <a:defRPr/>
-            </a:pPr>
-            <a:r>
-              <a:rPr lang="ru-RU" dirty="0"/>
-              <a:t>Класс Прямоугольник использует переданный ему Холст (</a:t>
-            </a:r>
-            <a:r>
-              <a:rPr lang="ru-RU" dirty="0" err="1"/>
-              <a:t>Canvas</a:t>
-            </a:r>
-            <a:r>
-              <a:rPr lang="ru-RU" dirty="0"/>
-              <a:t>), чтобы нарисовать на нём своё изображение, вызывая методы </a:t>
-            </a:r>
-            <a:r>
-              <a:rPr lang="ru-RU" dirty="0" err="1"/>
-              <a:t>MoveTo</a:t>
-            </a:r>
-            <a:r>
-              <a:rPr lang="ru-RU" dirty="0"/>
-              <a:t> и </a:t>
-            </a:r>
-            <a:r>
-              <a:rPr lang="ru-RU" dirty="0" err="1"/>
-              <a:t>LineTo</a:t>
-            </a:r>
-            <a:r>
-              <a:rPr lang="ru-RU" dirty="0"/>
-              <a:t>. Так можно многократно с разными параметрами вызывать метод </a:t>
-            </a:r>
-            <a:r>
-              <a:rPr lang="ru-RU" dirty="0" err="1"/>
-              <a:t>Draw</a:t>
-            </a:r>
-            <a:r>
-              <a:rPr lang="ru-RU" dirty="0"/>
-              <a:t> у одного и того же прямоугольника, получая изображение прямоугольника на разных холстах.</a:t>
-            </a:r>
+              <a:t>При композиции и агрегации Целое оказывается связанным с Частью в течение длительного времени — поля Целого хранят Часть по значению, ссылке или указателю.</a:t>
+            </a:r>
+          </a:p>
+          <a:p>
+            <a:r>
+              <a:rPr lang="ru-RU" dirty="0"/>
+              <a:t>В жизни потребность в каком-либо объекте нам часто нужна лишь для выполнения некоторой задачи: мы вызываем такси, чтобы доехать до нужного места, берём нож, чтобы сделать бутерброд, прибегаем к услугам парикмахера, чтобы подстричься. После выполнения задачи потребность в объекте исчезает до следующего раза. И правда, незачем держать при себе парикмахера до конца своей жизни.</a:t>
+            </a:r>
+          </a:p>
+          <a:p>
+            <a:endParaRPr lang="ru-RU" dirty="0"/>
           </a:p>
         </p:txBody>
       </p:sp>
@@ -1679,7 +1864,7 @@
             <a:fld id="{7AD27560-579B-482E-BED7-036450DE1808}" type="slidenum">
               <a:rPr lang="ru-RU" smtClean="0"/>
               <a:pPr/>
-              <a:t>22</a:t>
+              <a:t>19</a:t>
             </a:fld>
             <a:endParaRPr lang="ru-RU"/>
           </a:p>
@@ -1688,7 +1873,7 @@
     </p:spTree>
     <p:extLst>
       <p:ext uri="{BB962C8B-B14F-4D97-AF65-F5344CB8AC3E}">
-        <p14:creationId xmlns:p14="http://schemas.microsoft.com/office/powerpoint/2010/main" val="2564408467"/>
+        <p14:creationId xmlns:p14="http://schemas.microsoft.com/office/powerpoint/2010/main" val="2207217243"/>
       </p:ext>
     </p:extLst>
   </p:cSld>
@@ -1749,69 +1934,38 @@
           <a:p>
             <a:r>
               <a:rPr lang="ru-RU" dirty="0"/>
-              <a:t>Зависимость — наиболее слабая связь между классами среди рассмотренных отношений. Эта слабость даёт наибольшую гибкость — каждый вызов метода Клиента может иметь дело с новым Поставщиком. За эту гибкость приходится платить — зависимость транзитивна. Она распространяется на всех пользователей Клиента — они должны уметь создать Поставщика перед тем как передать его Клиенту в качестве параметра и знать, что делать с Поставщиком, которого им вернул Клиент. При композиции и агрегации зависимость не распространяется, так как Целое скрывает свои Части в приватной области.</a:t>
-            </a:r>
-          </a:p>
-          <a:p>
-            <a:r>
-              <a:rPr lang="ru-RU" dirty="0"/>
-              <a:t>На схеме показан класс </a:t>
-            </a:r>
-            <a:r>
-              <a:rPr lang="en-US" dirty="0"/>
-              <a:t>Foo</a:t>
-            </a:r>
-            <a:r>
-              <a:rPr lang="ru-RU" dirty="0"/>
-              <a:t>, один из методов которого возвращает экземпляры </a:t>
-            </a:r>
-            <a:r>
-              <a:rPr lang="en-US" dirty="0"/>
-              <a:t>Bar</a:t>
-            </a:r>
-            <a:r>
-              <a:rPr lang="ru-RU" dirty="0"/>
-              <a:t>. Метод класса </a:t>
-            </a:r>
-            <a:r>
-              <a:rPr lang="en-US" dirty="0"/>
-              <a:t>Bar</a:t>
-            </a:r>
-            <a:r>
-              <a:rPr lang="ru-RU" dirty="0"/>
-              <a:t>, в свою очередь принимает экземпляры класса </a:t>
-            </a:r>
-            <a:r>
-              <a:rPr lang="en-US" dirty="0"/>
-              <a:t>Baz.</a:t>
-            </a:r>
-          </a:p>
-          <a:p>
-            <a:r>
-              <a:rPr lang="ru-RU" dirty="0"/>
-              <a:t>Поэтому на клиентов класса </a:t>
-            </a:r>
-            <a:r>
-              <a:rPr lang="en-US" dirty="0"/>
-              <a:t>Foo </a:t>
-            </a:r>
-            <a:r>
-              <a:rPr lang="ru-RU" dirty="0"/>
-              <a:t>распространяется знание не только о классе </a:t>
-            </a:r>
-            <a:r>
-              <a:rPr lang="en-US" dirty="0"/>
-              <a:t>Bar</a:t>
-            </a:r>
-            <a:r>
-              <a:rPr lang="ru-RU" dirty="0"/>
-              <a:t>, но и о классе </a:t>
-            </a:r>
-            <a:r>
-              <a:rPr lang="en-US" dirty="0"/>
-              <a:t>Baz</a:t>
-            </a:r>
-            <a:endParaRPr lang="ru-RU" dirty="0"/>
+              <a:t>Зависимость — это самый слабый тип связи между классами.</a:t>
+            </a:r>
+          </a:p>
+          <a:p>
+            <a:r>
+              <a:rPr lang="ru-RU" dirty="0"/>
+              <a:t>Здесь объект не хранит другой объект, а лишь временно его использует, например, внутри метода.</a:t>
+            </a:r>
+          </a:p>
+          <a:p>
+            <a:r>
+              <a:rPr lang="ru-RU" dirty="0"/>
+              <a:t>Связь возникает на короткое время: при передаче параметра, создании объекта или возврате значения.</a:t>
+            </a:r>
+          </a:p>
+          <a:p>
+            <a:r>
+              <a:rPr lang="ru-RU" dirty="0"/>
+              <a:t>Ключевое отличие от ассоциации в том, что нет хранения — значит, нет постоянной связи между объектами.</a:t>
+            </a:r>
+          </a:p>
+          <a:p>
+            <a:r>
+              <a:rPr lang="ru-RU" dirty="0"/>
+              <a:t>При этом клиент зависит от поставщика: если интерфейс поставщика изменится, клиент тоже придётся менять.</a:t>
+            </a:r>
+          </a:p>
+          <a:p>
+            <a:r>
+              <a:rPr lang="ru-RU" dirty="0"/>
+              <a:t>Поэтому зависимость — это минимальная, но всё же важная связь между классами.</a:t>
+            </a:r>
           </a:p>
         </p:txBody>
       </p:sp>
@@ -1833,7 +1987,7 @@
             <a:fld id="{7AD27560-579B-482E-BED7-036450DE1808}" type="slidenum">
               <a:rPr lang="ru-RU" smtClean="0"/>
               <a:pPr/>
-              <a:t>23</a:t>
+              <a:t>20</a:t>
             </a:fld>
             <a:endParaRPr lang="ru-RU"/>
           </a:p>
@@ -1842,7 +1996,7 @@
     </p:spTree>
     <p:extLst>
       <p:ext uri="{BB962C8B-B14F-4D97-AF65-F5344CB8AC3E}">
-        <p14:creationId xmlns:p14="http://schemas.microsoft.com/office/powerpoint/2010/main" val="2644860739"/>
+        <p14:creationId xmlns:p14="http://schemas.microsoft.com/office/powerpoint/2010/main" val="3269271602"/>
       </p:ext>
     </p:extLst>
   </p:cSld>
@@ -1871,7 +2025,7 @@
       </p:grpSpPr>
       <p:sp>
         <p:nvSpPr>
-          <p:cNvPr id="2" name="Образ слайда 1"/>
+          <p:cNvPr id="2" name="Slide Image Placeholder 1"/>
           <p:cNvSpPr>
             <a:spLocks noGrp="1" noRot="1" noChangeAspect="1"/>
           </p:cNvSpPr>
@@ -1879,16 +2033,11 @@
             <p:ph type="sldImg"/>
           </p:nvPr>
         </p:nvSpPr>
-        <p:spPr>
-          <a:xfrm>
-            <a:off x="381000" y="685800"/>
-            <a:ext cx="6096000" cy="3429000"/>
-          </a:xfrm>
-        </p:spPr>
+        <p:spPr/>
       </p:sp>
       <p:sp>
         <p:nvSpPr>
-          <p:cNvPr id="3" name="Заметки 2"/>
+          <p:cNvPr id="3" name="Notes Placeholder 2"/>
           <p:cNvSpPr>
             <a:spLocks noGrp="1"/>
           </p:cNvSpPr>
@@ -1903,14 +2052,137 @@
           <a:p>
             <a:r>
               <a:rPr lang="ru-RU" dirty="0"/>
-              <a:t>Треугольник содержит точки и единолично ими владеет.</a:t>
-            </a:r>
+              <a:t>Здесь показаны разные варианты зависимости.</a:t>
+            </a:r>
+          </a:p>
+          <a:p>
+            <a:r>
+              <a:rPr lang="ru-RU" dirty="0"/>
+              <a:t>В методе </a:t>
+            </a:r>
+            <a:r>
+              <a:rPr lang="ru-RU" sz="1200" kern="1200" dirty="0">
+                <a:solidFill>
+                  <a:schemeClr val="tx1"/>
+                </a:solidFill>
+                <a:latin typeface="+mn-lt"/>
+                <a:ea typeface="+mn-ea"/>
+                <a:cs typeface="+mn-cs"/>
+              </a:rPr>
+              <a:t>DependentMethod1</a:t>
+            </a:r>
+            <a:r>
+              <a:rPr lang="ru-RU" dirty="0"/>
+              <a:t> объект </a:t>
+            </a:r>
+            <a:r>
+              <a:rPr lang="ru-RU" sz="1200" kern="1200" dirty="0" err="1">
+                <a:solidFill>
+                  <a:schemeClr val="tx1"/>
+                </a:solidFill>
+                <a:latin typeface="+mn-lt"/>
+                <a:ea typeface="+mn-ea"/>
+                <a:cs typeface="+mn-cs"/>
+              </a:rPr>
+              <a:t>Supplier</a:t>
+            </a:r>
+            <a:r>
+              <a:rPr lang="ru-RU" dirty="0"/>
+              <a:t> передаётся в качестве параметра, и клиент просто вызывает его метод.</a:t>
+            </a:r>
+          </a:p>
+          <a:p>
+            <a:r>
+              <a:rPr lang="ru-RU" dirty="0"/>
+              <a:t>В </a:t>
+            </a:r>
+            <a:r>
+              <a:rPr lang="ru-RU" sz="1200" kern="1200" dirty="0">
+                <a:solidFill>
+                  <a:schemeClr val="tx1"/>
+                </a:solidFill>
+                <a:latin typeface="+mn-lt"/>
+                <a:ea typeface="+mn-ea"/>
+                <a:cs typeface="+mn-cs"/>
+              </a:rPr>
+              <a:t>DependentMethod2</a:t>
+            </a:r>
+            <a:r>
+              <a:rPr lang="ru-RU" dirty="0"/>
+              <a:t> объект создаётся прямо внутри метода и используется локально.</a:t>
+            </a:r>
+          </a:p>
+          <a:p>
+            <a:r>
+              <a:rPr lang="ru-RU" dirty="0"/>
+              <a:t>В </a:t>
+            </a:r>
+            <a:r>
+              <a:rPr lang="ru-RU" sz="1200" kern="1200" dirty="0">
+                <a:solidFill>
+                  <a:schemeClr val="tx1"/>
+                </a:solidFill>
+                <a:latin typeface="+mn-lt"/>
+                <a:ea typeface="+mn-ea"/>
+                <a:cs typeface="+mn-cs"/>
+              </a:rPr>
+              <a:t>DependentMethod3</a:t>
+            </a:r>
+            <a:r>
+              <a:rPr lang="ru-RU" dirty="0"/>
+              <a:t> объект возвращается из метода.</a:t>
+            </a:r>
+          </a:p>
+          <a:p>
+            <a:r>
+              <a:rPr lang="ru-RU" dirty="0"/>
+              <a:t>Во всех этих случаях </a:t>
+            </a:r>
+            <a:r>
+              <a:rPr lang="ru-RU" sz="1200" kern="1200" dirty="0">
+                <a:solidFill>
+                  <a:schemeClr val="tx1"/>
+                </a:solidFill>
+                <a:latin typeface="+mn-lt"/>
+                <a:ea typeface="+mn-ea"/>
+                <a:cs typeface="+mn-cs"/>
+              </a:rPr>
+              <a:t>Client</a:t>
+            </a:r>
+            <a:r>
+              <a:rPr lang="ru-RU" dirty="0"/>
+              <a:t> не хранит </a:t>
+            </a:r>
+            <a:r>
+              <a:rPr lang="ru-RU" sz="1200" kern="1200" dirty="0" err="1">
+                <a:solidFill>
+                  <a:schemeClr val="tx1"/>
+                </a:solidFill>
+                <a:latin typeface="+mn-lt"/>
+                <a:ea typeface="+mn-ea"/>
+                <a:cs typeface="+mn-cs"/>
+              </a:rPr>
+              <a:t>Supplier</a:t>
+            </a:r>
+            <a:r>
+              <a:rPr lang="ru-RU" dirty="0"/>
+              <a:t> как поле, а использует его только временно — в рамках вызова метода.</a:t>
+            </a:r>
+          </a:p>
+          <a:p>
+            <a:r>
+              <a:rPr lang="ru-RU" dirty="0"/>
+              <a:t>Именно это и есть зависимость: кратковременное использование объекта без установления постоянной связи.</a:t>
+            </a:r>
+          </a:p>
+          <a:p>
+            <a:endParaRPr lang="en-US" dirty="0"/>
           </a:p>
         </p:txBody>
       </p:sp>
       <p:sp>
         <p:nvSpPr>
-          <p:cNvPr id="4" name="Номер слайда 3"/>
+          <p:cNvPr id="4" name="Slide Number Placeholder 3"/>
           <p:cNvSpPr>
             <a:spLocks noGrp="1"/>
           </p:cNvSpPr>
@@ -1926,7 +2198,7 @@
             <a:fld id="{7AD27560-579B-482E-BED7-036450DE1808}" type="slidenum">
               <a:rPr lang="ru-RU" smtClean="0"/>
               <a:pPr/>
-              <a:t>25</a:t>
+              <a:t>21</a:t>
             </a:fld>
             <a:endParaRPr lang="ru-RU"/>
           </a:p>
@@ -1935,7 +2207,7 @@
     </p:spTree>
     <p:extLst>
       <p:ext uri="{BB962C8B-B14F-4D97-AF65-F5344CB8AC3E}">
-        <p14:creationId xmlns:p14="http://schemas.microsoft.com/office/powerpoint/2010/main" val="747000592"/>
+        <p14:creationId xmlns:p14="http://schemas.microsoft.com/office/powerpoint/2010/main" val="1708218315"/>
       </p:ext>
     </p:extLst>
   </p:cSld>
@@ -1993,18 +2265,30 @@
               <a:rPr lang="ru-RU" dirty="0"/>
               <a:t>Подобно тому, как функции и методы состоят из определённого набора инструкций, решающих нужную задачу, классы программы создаются и взаимодействуют по определённым правилам.</a:t>
             </a:r>
+            <a:endParaRPr lang="en-US" dirty="0"/>
+          </a:p>
+          <a:p>
+            <a:endParaRPr lang="ru-RU" dirty="0"/>
           </a:p>
           <a:p>
             <a:r>
               <a:rPr lang="ru-RU" dirty="0"/>
               <a:t>Понимание этих правил позволяет создавать программы не методом проб и ошибок, а проектировать и анализировать архитектуру программы ещё до того, как вы напишете первую строчку кода. В результате вы будете иметь представление о том, из каких классов должна состоять ваша программа и о связях между ними. Также вы можете обсудить структуру программы с коллегами и распределить работу над ней.</a:t>
             </a:r>
+            <a:endParaRPr lang="en-US" dirty="0"/>
+          </a:p>
+          <a:p>
+            <a:endParaRPr lang="ru-RU" dirty="0"/>
           </a:p>
           <a:p>
             <a:r>
               <a:rPr lang="ru-RU" dirty="0"/>
               <a:t>Обнаруженную на этапе проектирования ошибку легко исправить — ведь вам не нужно переписывать ненаписанный код. Аналогия из реального мира: пока дом существует лишь на бумаге, вносить в него изменения легче, чем когда дом уже построен.</a:t>
             </a:r>
+            <a:endParaRPr lang="en-US" dirty="0"/>
+          </a:p>
+          <a:p>
+            <a:endParaRPr lang="ru-RU" dirty="0"/>
           </a:p>
           <a:p>
             <a:r>
@@ -2110,12 +2394,89 @@
           <a:lstStyle/>
           <a:p>
             <a:r>
-              <a:rPr lang="ru-RU" dirty="0" err="1"/>
-              <a:t>Graphics</a:t>
-            </a:r>
-            <a:r>
-              <a:rPr lang="ru-RU" dirty="0"/>
-              <a:t> хранит ссылку на растровое изображение, на котором рисует графические примитивы</a:t>
+              <a:rPr lang="ru-RU" dirty="0"/>
+              <a:t>Здесь показан практический пример зависимости.</a:t>
+            </a:r>
+          </a:p>
+          <a:p>
+            <a:r>
+              <a:rPr lang="ru-RU" dirty="0"/>
+              <a:t>Класс </a:t>
+            </a:r>
+            <a:r>
+              <a:rPr lang="ru-RU" sz="1200" kern="1200" dirty="0">
+                <a:solidFill>
+                  <a:schemeClr val="tx1"/>
+                </a:solidFill>
+                <a:latin typeface="+mn-lt"/>
+                <a:ea typeface="+mn-ea"/>
+                <a:cs typeface="+mn-cs"/>
+              </a:rPr>
+              <a:t>Document</a:t>
+            </a:r>
+            <a:r>
+              <a:rPr lang="ru-RU" dirty="0"/>
+              <a:t> использует </a:t>
+            </a:r>
+            <a:r>
+              <a:rPr lang="ru-RU" sz="1200" kern="1200" dirty="0" err="1">
+                <a:solidFill>
+                  <a:schemeClr val="tx1"/>
+                </a:solidFill>
+                <a:latin typeface="+mn-lt"/>
+                <a:ea typeface="+mn-ea"/>
+                <a:cs typeface="+mn-cs"/>
+              </a:rPr>
+              <a:t>istream</a:t>
+            </a:r>
+            <a:r>
+              <a:rPr lang="ru-RU" dirty="0"/>
+              <a:t> и </a:t>
+            </a:r>
+            <a:r>
+              <a:rPr lang="ru-RU" sz="1200" kern="1200" dirty="0" err="1">
+                <a:solidFill>
+                  <a:schemeClr val="tx1"/>
+                </a:solidFill>
+                <a:latin typeface="+mn-lt"/>
+                <a:ea typeface="+mn-ea"/>
+                <a:cs typeface="+mn-cs"/>
+              </a:rPr>
+              <a:t>ostream</a:t>
+            </a:r>
+            <a:r>
+              <a:rPr lang="ru-RU" dirty="0"/>
+              <a:t>, но только внутри методов загрузки и сохранения.</a:t>
+            </a:r>
+          </a:p>
+          <a:p>
+            <a:r>
+              <a:rPr lang="ru-RU" dirty="0"/>
+              <a:t>Он не хранит потоки как поля, а принимает их как параметры, то есть использует временно.</a:t>
+            </a:r>
+          </a:p>
+          <a:p>
+            <a:r>
+              <a:rPr lang="ru-RU" dirty="0"/>
+              <a:t>Это значит, что один и тот же документ можно читать из разных источников и записывать в разные места.</a:t>
+            </a:r>
+          </a:p>
+          <a:p>
+            <a:r>
+              <a:rPr lang="ru-RU" dirty="0"/>
+              <a:t>Например, сегодня — в файл, завтра — в строку или сетевое соединение.</a:t>
+            </a:r>
+          </a:p>
+          <a:p>
+            <a:r>
+              <a:rPr lang="ru-RU" dirty="0"/>
+              <a:t>При этом сами потоки ничего не знают о документе.</a:t>
+            </a:r>
+          </a:p>
+          <a:p>
+            <a:r>
+              <a:rPr lang="ru-RU" dirty="0"/>
+              <a:t>Это и есть зависимость: объект использует другой объект только в момент выполнения операции, не устанавливая с ним постоянной связи.</a:t>
             </a:r>
           </a:p>
         </p:txBody>
@@ -2138,7 +2499,7 @@
             <a:fld id="{7AD27560-579B-482E-BED7-036450DE1808}" type="slidenum">
               <a:rPr lang="ru-RU" smtClean="0"/>
               <a:pPr/>
-              <a:t>26</a:t>
+              <a:t>22</a:t>
             </a:fld>
             <a:endParaRPr lang="ru-RU"/>
           </a:p>
@@ -2147,7 +2508,7 @@
     </p:spTree>
     <p:extLst>
       <p:ext uri="{BB962C8B-B14F-4D97-AF65-F5344CB8AC3E}">
-        <p14:creationId xmlns:p14="http://schemas.microsoft.com/office/powerpoint/2010/main" val="227594354"/>
+        <p14:creationId xmlns:p14="http://schemas.microsoft.com/office/powerpoint/2010/main" val="2014209181"/>
       </p:ext>
     </p:extLst>
   </p:cSld>
@@ -2208,23 +2569,99 @@
           <a:p>
             <a:r>
               <a:rPr lang="ru-RU" dirty="0"/>
-              <a:t>Треугольник использует </a:t>
-            </a:r>
-            <a:r>
-              <a:rPr lang="ru-RU" dirty="0" err="1"/>
-              <a:t>Graphics</a:t>
-            </a:r>
-            <a:r>
-              <a:rPr lang="ru-RU" dirty="0"/>
-              <a:t> в методе </a:t>
-            </a:r>
-            <a:r>
-              <a:rPr lang="ru-RU" dirty="0" err="1"/>
-              <a:t>Draw</a:t>
-            </a:r>
-            <a:r>
-              <a:rPr lang="ru-RU" dirty="0"/>
-              <a:t>, чтобы нарисовать на нём своё изображение.</a:t>
+              <a:t>На диаграммах зависимость изображается пунктирной стрелкой от клиента к поставщику.</a:t>
+            </a:r>
+          </a:p>
+          <a:p>
+            <a:r>
+              <a:rPr lang="ru-RU" dirty="0"/>
+              <a:t>Иногда на стрелке уточняют тип зависимости:</a:t>
+            </a:r>
+          </a:p>
+          <a:p>
+            <a:r>
+              <a:rPr lang="ru-RU" b="1" dirty="0" err="1"/>
+              <a:t>create</a:t>
+            </a:r>
+            <a:r>
+              <a:rPr lang="ru-RU" dirty="0"/>
+              <a:t> — объект создаётся внутри метода </a:t>
+            </a:r>
+          </a:p>
+          <a:p>
+            <a:r>
+              <a:rPr lang="ru-RU" b="1" dirty="0" err="1"/>
+              <a:t>use</a:t>
+            </a:r>
+            <a:r>
+              <a:rPr lang="ru-RU" dirty="0"/>
+              <a:t> — объект передаётся и используется </a:t>
+            </a:r>
+          </a:p>
+          <a:p>
+            <a:r>
+              <a:rPr lang="ru-RU" b="1" dirty="0" err="1"/>
+              <a:t>return</a:t>
+            </a:r>
+            <a:r>
+              <a:rPr lang="ru-RU" dirty="0"/>
+              <a:t> — объект возвращается </a:t>
+            </a:r>
+          </a:p>
+          <a:p>
+            <a:r>
+              <a:rPr lang="ru-RU" dirty="0"/>
+              <a:t>В примере </a:t>
+            </a:r>
+            <a:r>
+              <a:rPr lang="ru-RU" sz="1200" kern="1200" dirty="0" err="1">
+                <a:solidFill>
+                  <a:schemeClr val="tx1"/>
+                </a:solidFill>
+                <a:latin typeface="+mn-lt"/>
+                <a:ea typeface="+mn-ea"/>
+                <a:cs typeface="+mn-cs"/>
+              </a:rPr>
+              <a:t>Rectangle</a:t>
+            </a:r>
+            <a:r>
+              <a:rPr lang="ru-RU" dirty="0"/>
+              <a:t> использует </a:t>
+            </a:r>
+            <a:r>
+              <a:rPr lang="ru-RU" sz="1200" kern="1200" dirty="0" err="1">
+                <a:solidFill>
+                  <a:schemeClr val="tx1"/>
+                </a:solidFill>
+                <a:latin typeface="+mn-lt"/>
+                <a:ea typeface="+mn-ea"/>
+                <a:cs typeface="+mn-cs"/>
+              </a:rPr>
+              <a:t>Canvas</a:t>
+            </a:r>
+            <a:r>
+              <a:rPr lang="ru-RU" dirty="0"/>
+              <a:t>: он получает его в методе и вызывает его методы для рисования.</a:t>
+            </a:r>
+          </a:p>
+          <a:p>
+            <a:r>
+              <a:rPr lang="ru-RU" dirty="0"/>
+              <a:t>При этом один и тот же прямоугольник можно рисовать на разных холстах.</a:t>
+            </a:r>
+          </a:p>
+          <a:p>
+            <a:r>
+              <a:rPr lang="ru-RU" dirty="0"/>
+              <a:t>Это типичный пример зависимости типа </a:t>
+            </a:r>
+            <a:r>
+              <a:rPr lang="ru-RU" b="1" dirty="0" err="1"/>
+              <a:t>use</a:t>
+            </a:r>
+            <a:r>
+              <a:rPr lang="ru-RU" dirty="0"/>
+              <a:t>.</a:t>
             </a:r>
           </a:p>
         </p:txBody>
@@ -2247,7 +2684,7 @@
             <a:fld id="{7AD27560-579B-482E-BED7-036450DE1808}" type="slidenum">
               <a:rPr lang="ru-RU" smtClean="0"/>
               <a:pPr/>
-              <a:t>28</a:t>
+              <a:t>23</a:t>
             </a:fld>
             <a:endParaRPr lang="ru-RU"/>
           </a:p>
@@ -2256,7 +2693,7 @@
     </p:spTree>
     <p:extLst>
       <p:ext uri="{BB962C8B-B14F-4D97-AF65-F5344CB8AC3E}">
-        <p14:creationId xmlns:p14="http://schemas.microsoft.com/office/powerpoint/2010/main" val="1892740549"/>
+        <p14:creationId xmlns:p14="http://schemas.microsoft.com/office/powerpoint/2010/main" val="2564408467"/>
       </p:ext>
     </p:extLst>
   </p:cSld>
@@ -2317,91 +2754,140 @@
           <a:p>
             <a:r>
               <a:rPr lang="ru-RU" dirty="0"/>
-              <a:t>Вам представлены несколько диаграмм, выражающих отношения между классами </a:t>
-            </a:r>
-            <a:r>
-              <a:rPr lang="en-US" dirty="0">
-                <a:solidFill>
-                  <a:srgbClr val="EB5757"/>
-                </a:solidFill>
-                <a:effectLst/>
-                <a:latin typeface="SFMono-Regular"/>
-              </a:rPr>
-              <a:t>House</a:t>
-            </a:r>
-            <a:r>
-              <a:rPr lang="en-US" dirty="0"/>
-              <a:t>, </a:t>
-            </a:r>
-            <a:r>
-              <a:rPr lang="en-US" dirty="0">
-                <a:solidFill>
-                  <a:srgbClr val="EB5757"/>
-                </a:solidFill>
-                <a:effectLst/>
-                <a:latin typeface="SFMono-Regular"/>
-              </a:rPr>
-              <a:t>Wall</a:t>
-            </a:r>
-            <a:r>
-              <a:rPr lang="en-US" dirty="0"/>
-              <a:t>, </a:t>
-            </a:r>
-            <a:r>
-              <a:rPr lang="en-US" dirty="0">
-                <a:solidFill>
-                  <a:srgbClr val="EB5757"/>
-                </a:solidFill>
-                <a:effectLst/>
-                <a:latin typeface="SFMono-Regular"/>
-              </a:rPr>
-              <a:t>Base</a:t>
-            </a:r>
-            <a:r>
-              <a:rPr lang="en-US" dirty="0"/>
-              <a:t>, </a:t>
-            </a:r>
-            <a:r>
-              <a:rPr lang="en-US" dirty="0">
-                <a:solidFill>
-                  <a:srgbClr val="EB5757"/>
-                </a:solidFill>
-                <a:effectLst/>
-                <a:latin typeface="SFMono-Regular"/>
-              </a:rPr>
-              <a:t>Roof</a:t>
-            </a:r>
-            <a:r>
-              <a:rPr lang="ru-RU" dirty="0">
-                <a:solidFill>
-                  <a:srgbClr val="EB5757"/>
-                </a:solidFill>
-                <a:effectLst/>
-                <a:latin typeface="SFMono-Regular"/>
-              </a:rPr>
-              <a:t> </a:t>
-            </a:r>
-            <a:r>
-              <a:rPr lang="ru-RU" dirty="0"/>
-              <a:t>и </a:t>
-            </a:r>
-            <a:r>
-              <a:rPr lang="en-US" dirty="0">
-                <a:solidFill>
-                  <a:srgbClr val="EB5757"/>
-                </a:solidFill>
-                <a:effectLst/>
-                <a:latin typeface="SFMono-Regular"/>
-              </a:rPr>
-              <a:t>Window</a:t>
-            </a:r>
-            <a:r>
-              <a:rPr lang="en-US" dirty="0"/>
-              <a:t>. </a:t>
-            </a:r>
-            <a:r>
-              <a:rPr lang="ru-RU" dirty="0"/>
-              <a:t>Выберите среди них одну правильную.</a:t>
+              <a:t>Зависимость — самая слабая связь, но именно поэтому самая гибкая: каждый вызов может работать с разными объектами.</a:t>
+            </a:r>
+            <a:endParaRPr lang="en-US" dirty="0"/>
+          </a:p>
+          <a:p>
+            <a:endParaRPr lang="ru-RU" dirty="0"/>
+          </a:p>
+          <a:p>
+            <a:r>
+              <a:rPr lang="ru-RU" dirty="0"/>
+              <a:t>Однако у этой гибкости есть цена — зависимость транзитивна.</a:t>
+            </a:r>
+          </a:p>
+          <a:p>
+            <a:r>
+              <a:rPr lang="ru-RU" dirty="0"/>
+              <a:t>Если класс зависит от другого, а тот — от третьего, то клиенту приходится знать обо всех.</a:t>
+            </a:r>
+          </a:p>
+          <a:p>
+            <a:r>
+              <a:rPr lang="ru-RU" dirty="0"/>
+              <a:t>В примере: </a:t>
+            </a:r>
+            <a:r>
+              <a:rPr lang="ru-RU" sz="1200" kern="1200" dirty="0" err="1">
+                <a:solidFill>
+                  <a:schemeClr val="tx1"/>
+                </a:solidFill>
+                <a:latin typeface="+mn-lt"/>
+                <a:ea typeface="+mn-ea"/>
+                <a:cs typeface="+mn-cs"/>
+              </a:rPr>
+              <a:t>Foo</a:t>
+            </a:r>
+            <a:r>
+              <a:rPr lang="ru-RU" dirty="0"/>
+              <a:t> возвращает </a:t>
+            </a:r>
+            <a:r>
+              <a:rPr lang="ru-RU" sz="1200" kern="1200" dirty="0" err="1">
+                <a:solidFill>
+                  <a:schemeClr val="tx1"/>
+                </a:solidFill>
+                <a:latin typeface="+mn-lt"/>
+                <a:ea typeface="+mn-ea"/>
+                <a:cs typeface="+mn-cs"/>
+              </a:rPr>
+              <a:t>Bar</a:t>
+            </a:r>
+            <a:r>
+              <a:rPr lang="ru-RU" dirty="0"/>
+              <a:t>, а </a:t>
+            </a:r>
+            <a:r>
+              <a:rPr lang="ru-RU" sz="1200" kern="1200" dirty="0" err="1">
+                <a:solidFill>
+                  <a:schemeClr val="tx1"/>
+                </a:solidFill>
+                <a:latin typeface="+mn-lt"/>
+                <a:ea typeface="+mn-ea"/>
+                <a:cs typeface="+mn-cs"/>
+              </a:rPr>
+              <a:t>Bar</a:t>
+            </a:r>
+            <a:r>
+              <a:rPr lang="ru-RU" dirty="0"/>
+              <a:t> использует </a:t>
+            </a:r>
+            <a:r>
+              <a:rPr lang="ru-RU" sz="1200" kern="1200" dirty="0" err="1">
+                <a:solidFill>
+                  <a:schemeClr val="tx1"/>
+                </a:solidFill>
+                <a:latin typeface="+mn-lt"/>
+                <a:ea typeface="+mn-ea"/>
+                <a:cs typeface="+mn-cs"/>
+              </a:rPr>
+              <a:t>Baz</a:t>
+            </a:r>
+            <a:r>
+              <a:rPr lang="ru-RU" dirty="0"/>
+              <a:t>. В итоге клиент </a:t>
+            </a:r>
+            <a:r>
+              <a:rPr lang="ru-RU" sz="1200" kern="1200" dirty="0" err="1">
+                <a:solidFill>
+                  <a:schemeClr val="tx1"/>
+                </a:solidFill>
+                <a:latin typeface="+mn-lt"/>
+                <a:ea typeface="+mn-ea"/>
+                <a:cs typeface="+mn-cs"/>
+              </a:rPr>
+              <a:t>Foo</a:t>
+            </a:r>
+            <a:r>
+              <a:rPr lang="ru-RU" dirty="0"/>
+              <a:t> вынужден знать и про </a:t>
+            </a:r>
+            <a:r>
+              <a:rPr lang="ru-RU" sz="1200" kern="1200" dirty="0" err="1">
+                <a:solidFill>
+                  <a:schemeClr val="tx1"/>
+                </a:solidFill>
+                <a:latin typeface="+mn-lt"/>
+                <a:ea typeface="+mn-ea"/>
+                <a:cs typeface="+mn-cs"/>
+              </a:rPr>
+              <a:t>Bar</a:t>
+            </a:r>
+            <a:r>
+              <a:rPr lang="ru-RU" dirty="0"/>
+              <a:t>, и про </a:t>
+            </a:r>
+            <a:r>
+              <a:rPr lang="ru-RU" sz="1200" kern="1200" dirty="0" err="1">
+                <a:solidFill>
+                  <a:schemeClr val="tx1"/>
+                </a:solidFill>
+                <a:latin typeface="+mn-lt"/>
+                <a:ea typeface="+mn-ea"/>
+                <a:cs typeface="+mn-cs"/>
+              </a:rPr>
+              <a:t>Baz</a:t>
+            </a:r>
+            <a:r>
+              <a:rPr lang="ru-RU" dirty="0"/>
+              <a:t>.</a:t>
+            </a:r>
+          </a:p>
+          <a:p>
+            <a:r>
+              <a:rPr lang="ru-RU" dirty="0"/>
+              <a:t>В отличие от этого, при композиции и агрегации внутренние детали скрыты и не «протекают» наружу.</a:t>
             </a:r>
           </a:p>
         </p:txBody>
@@ -2424,7 +2910,483 @@
             <a:fld id="{7AD27560-579B-482E-BED7-036450DE1808}" type="slidenum">
               <a:rPr lang="ru-RU" smtClean="0"/>
               <a:pPr/>
+              <a:t>24</a:t>
+            </a:fld>
+            <a:endParaRPr lang="ru-RU"/>
+          </a:p>
+        </p:txBody>
+      </p:sp>
+    </p:spTree>
+    <p:extLst>
+      <p:ext uri="{BB962C8B-B14F-4D97-AF65-F5344CB8AC3E}">
+        <p14:creationId xmlns:p14="http://schemas.microsoft.com/office/powerpoint/2010/main" val="2644860739"/>
+      </p:ext>
+    </p:extLst>
+  </p:cSld>
+  <p:clrMapOvr>
+    <a:masterClrMapping/>
+  </p:clrMapOvr>
+</p:notes>
+</file>
+
+<file path=ppt/notesSlides/notesSlide23.xml><?xml version="1.0" encoding="utf-8"?>
+<p:notes xmlns:a="http://schemas.openxmlformats.org/drawingml/2006/main" xmlns:r="http://schemas.openxmlformats.org/officeDocument/2006/relationships" xmlns:p="http://schemas.openxmlformats.org/presentationml/2006/main">
+  <p:cSld>
+    <p:spTree>
+      <p:nvGrpSpPr>
+        <p:cNvPr id="1" name=""/>
+        <p:cNvGrpSpPr/>
+        <p:nvPr/>
+      </p:nvGrpSpPr>
+      <p:grpSpPr>
+        <a:xfrm>
+          <a:off x="0" y="0"/>
+          <a:ext cx="0" cy="0"/>
+          <a:chOff x="0" y="0"/>
+          <a:chExt cx="0" cy="0"/>
+        </a:xfrm>
+      </p:grpSpPr>
+      <p:sp>
+        <p:nvSpPr>
+          <p:cNvPr id="2" name="Образ слайда 1"/>
+          <p:cNvSpPr>
+            <a:spLocks noGrp="1" noRot="1" noChangeAspect="1"/>
+          </p:cNvSpPr>
+          <p:nvPr>
+            <p:ph type="sldImg"/>
+          </p:nvPr>
+        </p:nvSpPr>
+        <p:spPr>
+          <a:xfrm>
+            <a:off x="381000" y="685800"/>
+            <a:ext cx="6096000" cy="3429000"/>
+          </a:xfrm>
+        </p:spPr>
+      </p:sp>
+      <p:sp>
+        <p:nvSpPr>
+          <p:cNvPr id="3" name="Заметки 2"/>
+          <p:cNvSpPr>
+            <a:spLocks noGrp="1"/>
+          </p:cNvSpPr>
+          <p:nvPr>
+            <p:ph type="body" idx="1"/>
+          </p:nvPr>
+        </p:nvSpPr>
+        <p:spPr/>
+        <p:txBody>
+          <a:bodyPr/>
+          <a:lstStyle/>
+          <a:p>
+            <a:r>
+              <a:rPr lang="ru-RU" dirty="0"/>
+              <a:t>Треугольник содержит точки и единолично ими владеет.</a:t>
+            </a:r>
+          </a:p>
+        </p:txBody>
+      </p:sp>
+      <p:sp>
+        <p:nvSpPr>
+          <p:cNvPr id="4" name="Номер слайда 3"/>
+          <p:cNvSpPr>
+            <a:spLocks noGrp="1"/>
+          </p:cNvSpPr>
+          <p:nvPr>
+            <p:ph type="sldNum" sz="quarter" idx="5"/>
+          </p:nvPr>
+        </p:nvSpPr>
+        <p:spPr/>
+        <p:txBody>
+          <a:bodyPr/>
+          <a:lstStyle/>
+          <a:p>
+            <a:fld id="{7AD27560-579B-482E-BED7-036450DE1808}" type="slidenum">
+              <a:rPr lang="ru-RU" smtClean="0"/>
+              <a:pPr/>
+              <a:t>26</a:t>
+            </a:fld>
+            <a:endParaRPr lang="ru-RU"/>
+          </a:p>
+        </p:txBody>
+      </p:sp>
+    </p:spTree>
+    <p:extLst>
+      <p:ext uri="{BB962C8B-B14F-4D97-AF65-F5344CB8AC3E}">
+        <p14:creationId xmlns:p14="http://schemas.microsoft.com/office/powerpoint/2010/main" val="747000592"/>
+      </p:ext>
+    </p:extLst>
+  </p:cSld>
+  <p:clrMapOvr>
+    <a:masterClrMapping/>
+  </p:clrMapOvr>
+</p:notes>
+</file>
+
+<file path=ppt/notesSlides/notesSlide24.xml><?xml version="1.0" encoding="utf-8"?>
+<p:notes xmlns:a="http://schemas.openxmlformats.org/drawingml/2006/main" xmlns:r="http://schemas.openxmlformats.org/officeDocument/2006/relationships" xmlns:p="http://schemas.openxmlformats.org/presentationml/2006/main">
+  <p:cSld>
+    <p:spTree>
+      <p:nvGrpSpPr>
+        <p:cNvPr id="1" name=""/>
+        <p:cNvGrpSpPr/>
+        <p:nvPr/>
+      </p:nvGrpSpPr>
+      <p:grpSpPr>
+        <a:xfrm>
+          <a:off x="0" y="0"/>
+          <a:ext cx="0" cy="0"/>
+          <a:chOff x="0" y="0"/>
+          <a:chExt cx="0" cy="0"/>
+        </a:xfrm>
+      </p:grpSpPr>
+      <p:sp>
+        <p:nvSpPr>
+          <p:cNvPr id="2" name="Образ слайда 1"/>
+          <p:cNvSpPr>
+            <a:spLocks noGrp="1" noRot="1" noChangeAspect="1"/>
+          </p:cNvSpPr>
+          <p:nvPr>
+            <p:ph type="sldImg"/>
+          </p:nvPr>
+        </p:nvSpPr>
+        <p:spPr>
+          <a:xfrm>
+            <a:off x="381000" y="685800"/>
+            <a:ext cx="6096000" cy="3429000"/>
+          </a:xfrm>
+        </p:spPr>
+      </p:sp>
+      <p:sp>
+        <p:nvSpPr>
+          <p:cNvPr id="3" name="Заметки 2"/>
+          <p:cNvSpPr>
+            <a:spLocks noGrp="1"/>
+          </p:cNvSpPr>
+          <p:nvPr>
+            <p:ph type="body" idx="1"/>
+          </p:nvPr>
+        </p:nvSpPr>
+        <p:spPr/>
+        <p:txBody>
+          <a:bodyPr/>
+          <a:lstStyle/>
+          <a:p>
+            <a:r>
+              <a:rPr lang="ru-RU" dirty="0" err="1"/>
+              <a:t>Graphics</a:t>
+            </a:r>
+            <a:r>
+              <a:rPr lang="ru-RU" dirty="0"/>
+              <a:t> хранит ссылку на растровое изображение, на котором рисует графические примитивы</a:t>
+            </a:r>
+          </a:p>
+        </p:txBody>
+      </p:sp>
+      <p:sp>
+        <p:nvSpPr>
+          <p:cNvPr id="4" name="Номер слайда 3"/>
+          <p:cNvSpPr>
+            <a:spLocks noGrp="1"/>
+          </p:cNvSpPr>
+          <p:nvPr>
+            <p:ph type="sldNum" sz="quarter" idx="5"/>
+          </p:nvPr>
+        </p:nvSpPr>
+        <p:spPr/>
+        <p:txBody>
+          <a:bodyPr/>
+          <a:lstStyle/>
+          <a:p>
+            <a:fld id="{7AD27560-579B-482E-BED7-036450DE1808}" type="slidenum">
+              <a:rPr lang="ru-RU" smtClean="0"/>
+              <a:pPr/>
+              <a:t>27</a:t>
+            </a:fld>
+            <a:endParaRPr lang="ru-RU"/>
+          </a:p>
+        </p:txBody>
+      </p:sp>
+    </p:spTree>
+    <p:extLst>
+      <p:ext uri="{BB962C8B-B14F-4D97-AF65-F5344CB8AC3E}">
+        <p14:creationId xmlns:p14="http://schemas.microsoft.com/office/powerpoint/2010/main" val="227594354"/>
+      </p:ext>
+    </p:extLst>
+  </p:cSld>
+  <p:clrMapOvr>
+    <a:masterClrMapping/>
+  </p:clrMapOvr>
+</p:notes>
+</file>
+
+<file path=ppt/notesSlides/notesSlide25.xml><?xml version="1.0" encoding="utf-8"?>
+<p:notes xmlns:a="http://schemas.openxmlformats.org/drawingml/2006/main" xmlns:r="http://schemas.openxmlformats.org/officeDocument/2006/relationships" xmlns:p="http://schemas.openxmlformats.org/presentationml/2006/main">
+  <p:cSld>
+    <p:spTree>
+      <p:nvGrpSpPr>
+        <p:cNvPr id="1" name=""/>
+        <p:cNvGrpSpPr/>
+        <p:nvPr/>
+      </p:nvGrpSpPr>
+      <p:grpSpPr>
+        <a:xfrm>
+          <a:off x="0" y="0"/>
+          <a:ext cx="0" cy="0"/>
+          <a:chOff x="0" y="0"/>
+          <a:chExt cx="0" cy="0"/>
+        </a:xfrm>
+      </p:grpSpPr>
+      <p:sp>
+        <p:nvSpPr>
+          <p:cNvPr id="2" name="Образ слайда 1"/>
+          <p:cNvSpPr>
+            <a:spLocks noGrp="1" noRot="1" noChangeAspect="1"/>
+          </p:cNvSpPr>
+          <p:nvPr>
+            <p:ph type="sldImg"/>
+          </p:nvPr>
+        </p:nvSpPr>
+        <p:spPr>
+          <a:xfrm>
+            <a:off x="381000" y="685800"/>
+            <a:ext cx="6096000" cy="3429000"/>
+          </a:xfrm>
+        </p:spPr>
+      </p:sp>
+      <p:sp>
+        <p:nvSpPr>
+          <p:cNvPr id="3" name="Заметки 2"/>
+          <p:cNvSpPr>
+            <a:spLocks noGrp="1"/>
+          </p:cNvSpPr>
+          <p:nvPr>
+            <p:ph type="body" idx="1"/>
+          </p:nvPr>
+        </p:nvSpPr>
+        <p:spPr/>
+        <p:txBody>
+          <a:bodyPr/>
+          <a:lstStyle/>
+          <a:p>
+            <a:r>
+              <a:rPr lang="ru-RU" dirty="0"/>
+              <a:t>Треугольник использует </a:t>
+            </a:r>
+            <a:r>
+              <a:rPr lang="ru-RU" dirty="0" err="1"/>
+              <a:t>Graphics</a:t>
+            </a:r>
+            <a:r>
+              <a:rPr lang="ru-RU" dirty="0"/>
+              <a:t> в методе </a:t>
+            </a:r>
+            <a:r>
+              <a:rPr lang="ru-RU" dirty="0" err="1"/>
+              <a:t>Draw</a:t>
+            </a:r>
+            <a:r>
+              <a:rPr lang="ru-RU" dirty="0"/>
+              <a:t>, чтобы нарисовать на нём своё изображение.</a:t>
+            </a:r>
+          </a:p>
+        </p:txBody>
+      </p:sp>
+      <p:sp>
+        <p:nvSpPr>
+          <p:cNvPr id="4" name="Номер слайда 3"/>
+          <p:cNvSpPr>
+            <a:spLocks noGrp="1"/>
+          </p:cNvSpPr>
+          <p:nvPr>
+            <p:ph type="sldNum" sz="quarter" idx="5"/>
+          </p:nvPr>
+        </p:nvSpPr>
+        <p:spPr/>
+        <p:txBody>
+          <a:bodyPr/>
+          <a:lstStyle/>
+          <a:p>
+            <a:fld id="{7AD27560-579B-482E-BED7-036450DE1808}" type="slidenum">
+              <a:rPr lang="ru-RU" smtClean="0"/>
+              <a:pPr/>
               <a:t>29</a:t>
+            </a:fld>
+            <a:endParaRPr lang="ru-RU"/>
+          </a:p>
+        </p:txBody>
+      </p:sp>
+    </p:spTree>
+    <p:extLst>
+      <p:ext uri="{BB962C8B-B14F-4D97-AF65-F5344CB8AC3E}">
+        <p14:creationId xmlns:p14="http://schemas.microsoft.com/office/powerpoint/2010/main" val="1892740549"/>
+      </p:ext>
+    </p:extLst>
+  </p:cSld>
+  <p:clrMapOvr>
+    <a:masterClrMapping/>
+  </p:clrMapOvr>
+</p:notes>
+</file>
+
+<file path=ppt/notesSlides/notesSlide26.xml><?xml version="1.0" encoding="utf-8"?>
+<p:notes xmlns:a="http://schemas.openxmlformats.org/drawingml/2006/main" xmlns:r="http://schemas.openxmlformats.org/officeDocument/2006/relationships" xmlns:p="http://schemas.openxmlformats.org/presentationml/2006/main">
+  <p:cSld>
+    <p:spTree>
+      <p:nvGrpSpPr>
+        <p:cNvPr id="1" name=""/>
+        <p:cNvGrpSpPr/>
+        <p:nvPr/>
+      </p:nvGrpSpPr>
+      <p:grpSpPr>
+        <a:xfrm>
+          <a:off x="0" y="0"/>
+          <a:ext cx="0" cy="0"/>
+          <a:chOff x="0" y="0"/>
+          <a:chExt cx="0" cy="0"/>
+        </a:xfrm>
+      </p:grpSpPr>
+      <p:sp>
+        <p:nvSpPr>
+          <p:cNvPr id="2" name="Образ слайда 1"/>
+          <p:cNvSpPr>
+            <a:spLocks noGrp="1" noRot="1" noChangeAspect="1"/>
+          </p:cNvSpPr>
+          <p:nvPr>
+            <p:ph type="sldImg"/>
+          </p:nvPr>
+        </p:nvSpPr>
+        <p:spPr>
+          <a:xfrm>
+            <a:off x="381000" y="685800"/>
+            <a:ext cx="6096000" cy="3429000"/>
+          </a:xfrm>
+        </p:spPr>
+      </p:sp>
+      <p:sp>
+        <p:nvSpPr>
+          <p:cNvPr id="3" name="Заметки 2"/>
+          <p:cNvSpPr>
+            <a:spLocks noGrp="1"/>
+          </p:cNvSpPr>
+          <p:nvPr>
+            <p:ph type="body" idx="1"/>
+          </p:nvPr>
+        </p:nvSpPr>
+        <p:spPr/>
+        <p:txBody>
+          <a:bodyPr/>
+          <a:lstStyle/>
+          <a:p>
+            <a:r>
+              <a:rPr lang="ru-RU" dirty="0"/>
+              <a:t>Вам представлены несколько диаграмм, выражающих отношения между классами </a:t>
+            </a:r>
+            <a:r>
+              <a:rPr lang="en-US" dirty="0">
+                <a:solidFill>
+                  <a:srgbClr val="EB5757"/>
+                </a:solidFill>
+                <a:effectLst/>
+                <a:latin typeface="SFMono-Regular"/>
+              </a:rPr>
+              <a:t>House</a:t>
+            </a:r>
+            <a:r>
+              <a:rPr lang="en-US" dirty="0"/>
+              <a:t>, </a:t>
+            </a:r>
+            <a:r>
+              <a:rPr lang="en-US" dirty="0">
+                <a:solidFill>
+                  <a:srgbClr val="EB5757"/>
+                </a:solidFill>
+                <a:effectLst/>
+                <a:latin typeface="SFMono-Regular"/>
+              </a:rPr>
+              <a:t>Wall</a:t>
+            </a:r>
+            <a:r>
+              <a:rPr lang="en-US" dirty="0"/>
+              <a:t>, </a:t>
+            </a:r>
+            <a:r>
+              <a:rPr lang="en-US" dirty="0">
+                <a:solidFill>
+                  <a:srgbClr val="EB5757"/>
+                </a:solidFill>
+                <a:effectLst/>
+                <a:latin typeface="SFMono-Regular"/>
+              </a:rPr>
+              <a:t>Base</a:t>
+            </a:r>
+            <a:r>
+              <a:rPr lang="en-US" dirty="0"/>
+              <a:t>, </a:t>
+            </a:r>
+            <a:r>
+              <a:rPr lang="en-US" dirty="0">
+                <a:solidFill>
+                  <a:srgbClr val="EB5757"/>
+                </a:solidFill>
+                <a:effectLst/>
+                <a:latin typeface="SFMono-Regular"/>
+              </a:rPr>
+              <a:t>Roof</a:t>
+            </a:r>
+            <a:r>
+              <a:rPr lang="ru-RU" dirty="0">
+                <a:solidFill>
+                  <a:srgbClr val="EB5757"/>
+                </a:solidFill>
+                <a:effectLst/>
+                <a:latin typeface="SFMono-Regular"/>
+              </a:rPr>
+              <a:t> </a:t>
+            </a:r>
+            <a:r>
+              <a:rPr lang="ru-RU" dirty="0"/>
+              <a:t>и </a:t>
+            </a:r>
+            <a:r>
+              <a:rPr lang="en-US" dirty="0">
+                <a:solidFill>
+                  <a:srgbClr val="EB5757"/>
+                </a:solidFill>
+                <a:effectLst/>
+                <a:latin typeface="SFMono-Regular"/>
+              </a:rPr>
+              <a:t>Window</a:t>
+            </a:r>
+            <a:r>
+              <a:rPr lang="en-US" dirty="0"/>
+              <a:t>. </a:t>
+            </a:r>
+            <a:r>
+              <a:rPr lang="ru-RU" dirty="0"/>
+              <a:t>Выберите среди них одну правильную.</a:t>
+            </a:r>
+          </a:p>
+        </p:txBody>
+      </p:sp>
+      <p:sp>
+        <p:nvSpPr>
+          <p:cNvPr id="4" name="Номер слайда 3"/>
+          <p:cNvSpPr>
+            <a:spLocks noGrp="1"/>
+          </p:cNvSpPr>
+          <p:nvPr>
+            <p:ph type="sldNum" sz="quarter" idx="5"/>
+          </p:nvPr>
+        </p:nvSpPr>
+        <p:spPr/>
+        <p:txBody>
+          <a:bodyPr/>
+          <a:lstStyle/>
+          <a:p>
+            <a:fld id="{7AD27560-579B-482E-BED7-036450DE1808}" type="slidenum">
+              <a:rPr lang="ru-RU" smtClean="0"/>
+              <a:pPr/>
+              <a:t>30</a:t>
             </a:fld>
             <a:endParaRPr lang="ru-RU"/>
           </a:p>
@@ -2504,6 +3466,10 @@
               <a:rPr lang="ru-RU" dirty="0"/>
               <a:t>.</a:t>
             </a:r>
+            <a:endParaRPr lang="en-US" dirty="0"/>
+          </a:p>
+          <a:p>
+            <a:endParaRPr lang="ru-RU" dirty="0"/>
           </a:p>
           <a:p>
             <a:r>
@@ -2625,7 +3591,7 @@
       </p:grpSpPr>
       <p:sp>
         <p:nvSpPr>
-          <p:cNvPr id="2" name="Образ слайда 1"/>
+          <p:cNvPr id="2" name="Slide Image Placeholder 1"/>
           <p:cNvSpPr>
             <a:spLocks noGrp="1" noRot="1" noChangeAspect="1"/>
           </p:cNvSpPr>
@@ -2633,16 +3599,11 @@
             <p:ph type="sldImg"/>
           </p:nvPr>
         </p:nvSpPr>
-        <p:spPr>
-          <a:xfrm>
-            <a:off x="381000" y="685800"/>
-            <a:ext cx="6096000" cy="3429000"/>
-          </a:xfrm>
-        </p:spPr>
+        <p:spPr/>
       </p:sp>
       <p:sp>
         <p:nvSpPr>
-          <p:cNvPr id="3" name="Заметки 2"/>
+          <p:cNvPr id="3" name="Notes Placeholder 2"/>
           <p:cNvSpPr>
             <a:spLocks noGrp="1"/>
           </p:cNvSpPr>
@@ -2652,39 +3613,235 @@
         </p:nvSpPr>
         <p:spPr/>
         <p:txBody>
-          <a:bodyPr/>
+          <a:bodyPr>
+            <a:normAutofit fontScale="92500" lnSpcReduction="20000"/>
+          </a:bodyPr>
           <a:lstStyle/>
           <a:p>
-            <a:pPr marL="0" marR="0" lvl="0" indent="0" algn="l" defTabSz="914400" rtl="0" eaLnBrk="1" fontAlgn="auto" latinLnBrk="0" hangingPunct="1">
-              <a:lnSpc>
-                <a:spcPct val="100000"/>
-              </a:lnSpc>
-              <a:spcBef>
-                <a:spcPts val="0"/>
-              </a:spcBef>
-              <a:spcAft>
-                <a:spcPts val="0"/>
-              </a:spcAft>
-              <a:buClrTx/>
-              <a:buSzTx/>
-              <a:buFontTx/>
+            <a:r>
+              <a:rPr lang="ru-RU" dirty="0"/>
+              <a:t>Ассоциация — это </a:t>
+            </a:r>
+            <a:r>
+              <a:rPr lang="ru-RU" b="1" dirty="0"/>
+              <a:t>общее понятие связи между классами</a:t>
+            </a:r>
+            <a:r>
+              <a:rPr lang="ru-RU" dirty="0"/>
+              <a:t>.</a:t>
+            </a:r>
+            <a:endParaRPr lang="en-US" dirty="0"/>
+          </a:p>
+          <a:p>
+            <a:br>
+              <a:rPr lang="ru-RU" dirty="0"/>
+            </a:br>
+            <a:r>
+              <a:rPr lang="ru-RU" dirty="0"/>
+              <a:t>То есть, когда мы говорим, что два класса как-то связаны — чаще всего речь идёт именно об ассоциации.</a:t>
+            </a:r>
+            <a:endParaRPr lang="en-US" dirty="0"/>
+          </a:p>
+          <a:p>
+            <a:endParaRPr lang="ru-RU" dirty="0"/>
+          </a:p>
+          <a:p>
+            <a:pPr marL="0" indent="0">
+              <a:buFont typeface="Arial" panose="020B0604020202020204" pitchFamily="34" charset="0"/>
               <a:buNone/>
-              <a:tabLst/>
-              <a:defRPr/>
             </a:pPr>
             <a:r>
               <a:rPr lang="ru-RU" dirty="0"/>
-              <a:t>Композиция — один из самых простых способов создать новый тип данных, используя функционал уже имеющихся. При композиции мы получаем новый, более сложный тип, состоящий из одного или нескольких более простых объектов.</a:t>
-            </a:r>
-          </a:p>
-          <a:p>
+              <a:t>Но внутри этого общего понятия есть более частные случаи:</a:t>
+            </a:r>
+          </a:p>
+          <a:p>
+            <a:pPr marL="171450" indent="-171450">
+              <a:buFont typeface="Arial" panose="020B0604020202020204" pitchFamily="34" charset="0"/>
+              <a:buChar char="•"/>
+            </a:pPr>
+            <a:r>
+              <a:rPr lang="ru-RU" dirty="0"/>
+              <a:t>агрегация </a:t>
+            </a:r>
+          </a:p>
+          <a:p>
+            <a:pPr marL="171450" indent="-171450">
+              <a:buFont typeface="Arial" panose="020B0604020202020204" pitchFamily="34" charset="0"/>
+              <a:buChar char="•"/>
+            </a:pPr>
+            <a:r>
+              <a:rPr lang="ru-RU" dirty="0"/>
+              <a:t>композиция </a:t>
+            </a:r>
+            <a:endParaRPr lang="en-US" dirty="0"/>
+          </a:p>
+          <a:p>
+            <a:pPr marL="0" indent="0">
+              <a:buFont typeface="Arial" panose="020B0604020202020204" pitchFamily="34" charset="0"/>
+              <a:buNone/>
+            </a:pPr>
             <a:endParaRPr lang="ru-RU" dirty="0"/>
+          </a:p>
+          <a:p>
+            <a:r>
+              <a:rPr lang="ru-RU" dirty="0"/>
+              <a:t>Они отличаются тем, насколько сильная связь между объектами и есть ли между ними владение.</a:t>
+            </a:r>
+            <a:endParaRPr lang="en-US" dirty="0"/>
+          </a:p>
+          <a:p>
+            <a:endParaRPr lang="ru-RU" dirty="0"/>
+          </a:p>
+          <a:p>
+            <a:r>
+              <a:rPr lang="ru-RU" dirty="0"/>
+              <a:t>Если связи почти нет — просто «объекты знают друг о друге» — это </a:t>
+            </a:r>
+            <a:r>
+              <a:rPr lang="ru-RU" b="1" dirty="0"/>
+              <a:t>простая ассоциация</a:t>
+            </a:r>
+            <a:r>
+              <a:rPr lang="ru-RU" dirty="0"/>
+              <a:t>.</a:t>
+            </a:r>
+          </a:p>
+          <a:p>
+            <a:r>
+              <a:rPr lang="ru-RU" dirty="0"/>
+              <a:t>Если появляется </a:t>
+            </a:r>
+            <a:r>
+              <a:rPr lang="ru-RU" b="1" dirty="0"/>
+              <a:t>слабое владение</a:t>
+            </a:r>
+            <a:r>
+              <a:rPr lang="ru-RU" dirty="0"/>
+              <a:t> — это уже агрегация.</a:t>
+            </a:r>
+          </a:p>
+          <a:p>
+            <a:r>
+              <a:rPr lang="ru-RU" dirty="0"/>
+              <a:t>Если же один объект полностью управляет жизненным циклом другого — это композиция.</a:t>
+            </a:r>
+          </a:p>
+          <a:p>
+            <a:r>
+              <a:rPr lang="ru-RU" dirty="0"/>
+              <a:t>Важно понимать:</a:t>
+            </a:r>
+            <a:br>
+              <a:rPr lang="ru-RU" dirty="0"/>
+            </a:br>
+            <a:r>
+              <a:rPr lang="ru-RU" b="1" dirty="0"/>
+              <a:t>агрегация и композиция — это частные случаи ассоциации</a:t>
+            </a:r>
+            <a:r>
+              <a:rPr lang="ru-RU" dirty="0"/>
+              <a:t>.</a:t>
+            </a:r>
+          </a:p>
+          <a:p>
+            <a:r>
+              <a:rPr lang="ru-RU" dirty="0"/>
+              <a:t>Теперь вернёмся к базовой ассоциации.</a:t>
+            </a:r>
+          </a:p>
+          <a:p>
+            <a:r>
+              <a:rPr lang="ru-RU" dirty="0"/>
+              <a:t>Здесь:</a:t>
+            </a:r>
+          </a:p>
+          <a:p>
+            <a:pPr marL="171450" indent="-171450">
+              <a:buFont typeface="Arial" panose="020B0604020202020204" pitchFamily="34" charset="0"/>
+              <a:buChar char="•"/>
+            </a:pPr>
+            <a:r>
+              <a:rPr lang="ru-RU" dirty="0"/>
+              <a:t>объекты </a:t>
+            </a:r>
+            <a:r>
+              <a:rPr lang="ru-RU" b="1" dirty="0"/>
+              <a:t>не владеют друг другом</a:t>
+            </a:r>
+            <a:r>
+              <a:rPr lang="ru-RU" dirty="0"/>
+              <a:t> </a:t>
+            </a:r>
+          </a:p>
+          <a:p>
+            <a:pPr marL="171450" indent="-171450">
+              <a:buFont typeface="Arial" panose="020B0604020202020204" pitchFamily="34" charset="0"/>
+              <a:buChar char="•"/>
+            </a:pPr>
+            <a:r>
+              <a:rPr lang="ru-RU" dirty="0"/>
+              <a:t>их жизненные циклы </a:t>
+            </a:r>
+            <a:r>
+              <a:rPr lang="ru-RU" b="1" dirty="0"/>
+              <a:t>не связаны</a:t>
+            </a:r>
+            <a:r>
+              <a:rPr lang="ru-RU" dirty="0"/>
+              <a:t> </a:t>
+            </a:r>
+          </a:p>
+          <a:p>
+            <a:pPr marL="171450" indent="-171450">
+              <a:buFont typeface="Arial" panose="020B0604020202020204" pitchFamily="34" charset="0"/>
+              <a:buChar char="•"/>
+            </a:pPr>
+            <a:r>
+              <a:rPr lang="ru-RU" dirty="0"/>
+              <a:t>каждый может существовать отдельно </a:t>
+            </a:r>
+          </a:p>
+          <a:p>
+            <a:r>
+              <a:rPr lang="ru-RU" dirty="0"/>
+              <a:t>Например, учитель и ученик.</a:t>
+            </a:r>
+            <a:br>
+              <a:rPr lang="ru-RU" dirty="0"/>
+            </a:br>
+            <a:r>
+              <a:rPr lang="ru-RU" dirty="0"/>
+              <a:t>Они могут ссылаться друг на друга, но один не управляет жизнью другого.</a:t>
+            </a:r>
+          </a:p>
+          <a:p>
+            <a:r>
+              <a:rPr lang="ru-RU" dirty="0"/>
+              <a:t>В C++ такая связь обычно реализуется через указатели или ссылки.</a:t>
+            </a:r>
+            <a:br>
+              <a:rPr lang="ru-RU" dirty="0"/>
+            </a:br>
+            <a:r>
+              <a:rPr lang="ru-RU" dirty="0"/>
+              <a:t>При этом мы не отвечаем за создание или удаление связанного объекта — мы просто его используем.</a:t>
+            </a:r>
+          </a:p>
+          <a:p>
+            <a:r>
+              <a:rPr lang="ru-RU" dirty="0"/>
+              <a:t>И это делает ассоциацию самым общим и самым гибким видом отношений между классами.</a:t>
+            </a:r>
+          </a:p>
+          <a:p>
+            <a:endParaRPr lang="en-US" dirty="0"/>
           </a:p>
         </p:txBody>
       </p:sp>
       <p:sp>
         <p:nvSpPr>
-          <p:cNvPr id="4" name="Номер слайда 3"/>
+          <p:cNvPr id="4" name="Slide Number Placeholder 3"/>
           <p:cNvSpPr>
             <a:spLocks noGrp="1"/>
           </p:cNvSpPr>
@@ -2700,7 +3857,7 @@
             <a:fld id="{7AD27560-579B-482E-BED7-036450DE1808}" type="slidenum">
               <a:rPr lang="ru-RU" smtClean="0"/>
               <a:pPr/>
-              <a:t>7</a:t>
+              <a:t>5</a:t>
             </a:fld>
             <a:endParaRPr lang="ru-RU"/>
           </a:p>
@@ -2709,7 +3866,7 @@
     </p:spTree>
     <p:extLst>
       <p:ext uri="{BB962C8B-B14F-4D97-AF65-F5344CB8AC3E}">
-        <p14:creationId xmlns:p14="http://schemas.microsoft.com/office/powerpoint/2010/main" val="2406096540"/>
+        <p14:creationId xmlns:p14="http://schemas.microsoft.com/office/powerpoint/2010/main" val="2785068685"/>
       </p:ext>
     </p:extLst>
   </p:cSld>
@@ -2738,7 +3895,7 @@
       </p:grpSpPr>
       <p:sp>
         <p:nvSpPr>
-          <p:cNvPr id="2" name="Образ слайда 1"/>
+          <p:cNvPr id="2" name="Slide Image Placeholder 1"/>
           <p:cNvSpPr>
             <a:spLocks noGrp="1" noRot="1" noChangeAspect="1"/>
           </p:cNvSpPr>
@@ -2746,16 +3903,11 @@
             <p:ph type="sldImg"/>
           </p:nvPr>
         </p:nvSpPr>
-        <p:spPr>
-          <a:xfrm>
-            <a:off x="381000" y="685800"/>
-            <a:ext cx="6096000" cy="3429000"/>
-          </a:xfrm>
-        </p:spPr>
+        <p:spPr/>
       </p:sp>
       <p:sp>
         <p:nvSpPr>
-          <p:cNvPr id="3" name="Заметки 2"/>
+          <p:cNvPr id="3" name="Notes Placeholder 2"/>
           <p:cNvSpPr>
             <a:spLocks noGrp="1"/>
           </p:cNvSpPr>
@@ -2770,63 +3922,167 @@
           <a:p>
             <a:r>
               <a:rPr lang="ru-RU" dirty="0"/>
-              <a:t>Особенности:</a:t>
-            </a:r>
-          </a:p>
-          <a:p>
-            <a:pPr>
+              <a:t>Рассмотрим простой пример.</a:t>
+            </a:r>
+          </a:p>
+          <a:p>
+            <a:r>
+              <a:rPr lang="ru-RU" dirty="0"/>
+              <a:t>У нас есть два класса: </a:t>
+            </a:r>
+            <a:r>
+              <a:rPr lang="ru-RU" sz="1200" kern="1200" dirty="0" err="1">
+                <a:solidFill>
+                  <a:schemeClr val="tx1"/>
+                </a:solidFill>
+                <a:latin typeface="+mn-lt"/>
+                <a:ea typeface="+mn-ea"/>
+                <a:cs typeface="+mn-cs"/>
+              </a:rPr>
+              <a:t>Student</a:t>
+            </a:r>
+            <a:r>
+              <a:rPr lang="ru-RU" dirty="0"/>
+              <a:t> и </a:t>
+            </a:r>
+            <a:r>
+              <a:rPr lang="ru-RU" sz="1200" kern="1200" dirty="0" err="1">
+                <a:solidFill>
+                  <a:schemeClr val="tx1"/>
+                </a:solidFill>
+                <a:latin typeface="+mn-lt"/>
+                <a:ea typeface="+mn-ea"/>
+                <a:cs typeface="+mn-cs"/>
+              </a:rPr>
+              <a:t>Teacher</a:t>
+            </a:r>
+            <a:r>
+              <a:rPr lang="ru-RU" dirty="0"/>
+              <a:t>.</a:t>
+            </a:r>
+            <a:br>
+              <a:rPr lang="ru-RU" dirty="0"/>
+            </a:br>
+            <a:r>
+              <a:rPr lang="ru-RU" dirty="0"/>
+              <a:t>Студент хранит указатель на учителя — то есть он «знает» о нём.</a:t>
+            </a:r>
+          </a:p>
+          <a:p>
+            <a:r>
+              <a:rPr lang="ru-RU" dirty="0"/>
+              <a:t>Обратите внимание:</a:t>
+            </a:r>
+            <a:r>
+              <a:rPr lang="en-US" dirty="0"/>
+              <a:t> </a:t>
+            </a:r>
+            <a:r>
+              <a:rPr lang="ru-RU" dirty="0"/>
+              <a:t>мы передаём адрес уже существующего объекта.</a:t>
+            </a:r>
+          </a:p>
+          <a:p>
+            <a:r>
+              <a:rPr lang="ru-RU" dirty="0"/>
+              <a:t>Студент:</a:t>
+            </a:r>
+            <a:endParaRPr lang="en-US" dirty="0"/>
+          </a:p>
+          <a:p>
+            <a:pPr marL="171450" indent="-171450">
               <a:buFont typeface="Arial" panose="020B0604020202020204" pitchFamily="34" charset="0"/>
               <a:buChar char="•"/>
             </a:pPr>
             <a:r>
               <a:rPr lang="ru-RU" dirty="0"/>
-              <a:t>Один объект является Частью другого, составного объекта.</a:t>
-            </a:r>
-          </a:p>
-          <a:p>
-            <a:pPr>
+              <a:t>не создаёт учителя </a:t>
+            </a:r>
+          </a:p>
+          <a:p>
+            <a:pPr marL="171450" indent="-171450">
               <a:buFont typeface="Arial" panose="020B0604020202020204" pitchFamily="34" charset="0"/>
               <a:buChar char="•"/>
             </a:pPr>
             <a:r>
               <a:rPr lang="ru-RU" dirty="0"/>
-              <a:t>Часть в один момент времени может принадлежать только одному составному объекту.</a:t>
-            </a:r>
-          </a:p>
-          <a:p>
-            <a:pPr>
+              <a:t>не удаляет его </a:t>
+            </a:r>
+          </a:p>
+          <a:p>
+            <a:pPr marL="171450" indent="-171450">
               <a:buFont typeface="Arial" panose="020B0604020202020204" pitchFamily="34" charset="0"/>
               <a:buChar char="•"/>
             </a:pPr>
             <a:r>
               <a:rPr lang="ru-RU" dirty="0"/>
-              <a:t>Составной объект управляет своими частями. В частности, когда объект удаляется, его части должны быть также удалены.</a:t>
-            </a:r>
-          </a:p>
-          <a:p>
-            <a:pPr>
-              <a:buFont typeface="Arial" panose="020B0604020202020204" pitchFamily="34" charset="0"/>
-              <a:buChar char="•"/>
-            </a:pPr>
-            <a:r>
-              <a:rPr lang="ru-RU" dirty="0"/>
-              <a:t>Часть не знает о существовании объекта, который ею владеет.</a:t>
-            </a:r>
-          </a:p>
-          <a:p>
-            <a:r>
-              <a:rPr lang="ru-RU" dirty="0"/>
-              <a:t>В C++ мы обычно используем композицию, когда объявляем структуру или класс.</a:t>
-            </a:r>
-          </a:p>
-          <a:p>
-            <a:endParaRPr lang="ru-RU" dirty="0"/>
+              <a:t>не управляет его временем жизни </a:t>
+            </a:r>
+          </a:p>
+          <a:p>
+            <a:r>
+              <a:rPr lang="ru-RU" dirty="0"/>
+              <a:t>Он просто хранит ссылку на него.</a:t>
+            </a:r>
+          </a:p>
+          <a:p>
+            <a:r>
+              <a:rPr lang="ru-RU" dirty="0"/>
+              <a:t>Это и есть классическая ассоциация:</a:t>
+            </a:r>
+            <a:r>
+              <a:rPr lang="en-US" dirty="0"/>
+              <a:t> </a:t>
+            </a:r>
+            <a:r>
+              <a:rPr lang="ru-RU" dirty="0"/>
+              <a:t>объекты связаны, но </a:t>
+            </a:r>
+            <a:r>
+              <a:rPr lang="ru-RU" b="1" dirty="0"/>
+              <a:t>не владеют друг другом</a:t>
+            </a:r>
+            <a:r>
+              <a:rPr lang="ru-RU" dirty="0"/>
+              <a:t>.</a:t>
+            </a:r>
+          </a:p>
+          <a:p>
+            <a:r>
+              <a:rPr lang="ru-RU" dirty="0"/>
+              <a:t>Если мы удалим учителя, студент всё ещё может существовать —</a:t>
+            </a:r>
+            <a:r>
+              <a:rPr lang="en-US" dirty="0"/>
+              <a:t> </a:t>
+            </a:r>
+            <a:r>
+              <a:rPr lang="ru-RU" dirty="0"/>
+              <a:t>просто его указатель станет </a:t>
+            </a:r>
+            <a:r>
+              <a:rPr lang="ru-RU" dirty="0" err="1"/>
+              <a:t>невалидным</a:t>
+            </a:r>
+            <a:r>
+              <a:rPr lang="ru-RU" dirty="0"/>
+              <a:t>.</a:t>
+            </a:r>
+          </a:p>
+          <a:p>
+            <a:r>
+              <a:rPr lang="ru-RU" dirty="0"/>
+              <a:t>Именно независимость жизненных циклов — ключевой признак ассоциации.</a:t>
+            </a:r>
+          </a:p>
+          <a:p>
+            <a:endParaRPr lang="en-US" dirty="0"/>
           </a:p>
         </p:txBody>
       </p:sp>
       <p:sp>
         <p:nvSpPr>
-          <p:cNvPr id="4" name="Номер слайда 3"/>
+          <p:cNvPr id="4" name="Slide Number Placeholder 3"/>
           <p:cNvSpPr>
             <a:spLocks noGrp="1"/>
           </p:cNvSpPr>
@@ -2842,7 +4098,7 @@
             <a:fld id="{7AD27560-579B-482E-BED7-036450DE1808}" type="slidenum">
               <a:rPr lang="ru-RU" smtClean="0"/>
               <a:pPr/>
-              <a:t>8</a:t>
+              <a:t>7</a:t>
             </a:fld>
             <a:endParaRPr lang="ru-RU"/>
           </a:p>
@@ -2851,7 +4107,7 @@
     </p:spTree>
     <p:extLst>
       <p:ext uri="{BB962C8B-B14F-4D97-AF65-F5344CB8AC3E}">
-        <p14:creationId xmlns:p14="http://schemas.microsoft.com/office/powerpoint/2010/main" val="1361405534"/>
+        <p14:creationId xmlns:p14="http://schemas.microsoft.com/office/powerpoint/2010/main" val="2353799546"/>
       </p:ext>
     </p:extLst>
   </p:cSld>
@@ -2910,39 +4166,26 @@
           <a:bodyPr/>
           <a:lstStyle/>
           <a:p>
-            <a:r>
-              <a:rPr lang="ru-RU" dirty="0"/>
-              <a:t>Примеры композиции:</a:t>
-            </a:r>
-          </a:p>
-          <a:p>
-            <a:pPr>
-              <a:buFont typeface="Arial" panose="020B0604020202020204" pitchFamily="34" charset="0"/>
-              <a:buChar char="•"/>
+            <a:pPr marL="0" marR="0" lvl="0" indent="0" algn="l" defTabSz="914400" rtl="0" eaLnBrk="1" fontAlgn="auto" latinLnBrk="0" hangingPunct="1">
+              <a:lnSpc>
+                <a:spcPct val="100000"/>
+              </a:lnSpc>
+              <a:spcBef>
+                <a:spcPts val="0"/>
+              </a:spcBef>
+              <a:spcAft>
+                <a:spcPts val="0"/>
+              </a:spcAft>
+              <a:buClrTx/>
+              <a:buSzTx/>
+              <a:buFontTx/>
+              <a:buNone/>
+              <a:tabLst/>
+              <a:defRPr/>
             </a:pPr>
             <a:r>
               <a:rPr lang="ru-RU" dirty="0"/>
-              <a:t>Точка на плоскости состоит из двух чисел, хранящих её координаты.</a:t>
-            </a:r>
-          </a:p>
-          <a:p>
-            <a:pPr>
-              <a:buFont typeface="Arial" panose="020B0604020202020204" pitchFamily="34" charset="0"/>
-              <a:buChar char="•"/>
-            </a:pPr>
-            <a:r>
-              <a:rPr lang="ru-RU" dirty="0"/>
-              <a:t>Окружность состоит из точки, задающей координаты центра, и числа, задающего радиус.</a:t>
-            </a:r>
-          </a:p>
-          <a:p>
-            <a:pPr>
-              <a:buFont typeface="Arial" panose="020B0604020202020204" pitchFamily="34" charset="0"/>
-              <a:buChar char="•"/>
-            </a:pPr>
-            <a:r>
-              <a:rPr lang="ru-RU" dirty="0"/>
-              <a:t>Класс рациональных чисел состоит из двух целых чисел — числителя и знаменателя.</a:t>
+              <a:t>Композиция — один из самых простых способов создать новый тип данных, используя функционал уже имеющихся. При композиции мы получаем новый, более сложный тип, состоящий из одного или нескольких более простых объектов.</a:t>
             </a:r>
           </a:p>
           <a:p>
@@ -2968,7 +4211,7 @@
             <a:fld id="{7AD27560-579B-482E-BED7-036450DE1808}" type="slidenum">
               <a:rPr lang="ru-RU" smtClean="0"/>
               <a:pPr/>
-              <a:t>9</a:t>
+              <a:t>8</a:t>
             </a:fld>
             <a:endParaRPr lang="ru-RU"/>
           </a:p>
@@ -2977,7 +4220,7 @@
     </p:spTree>
     <p:extLst>
       <p:ext uri="{BB962C8B-B14F-4D97-AF65-F5344CB8AC3E}">
-        <p14:creationId xmlns:p14="http://schemas.microsoft.com/office/powerpoint/2010/main" val="3668715743"/>
+        <p14:creationId xmlns:p14="http://schemas.microsoft.com/office/powerpoint/2010/main" val="2406096540"/>
       </p:ext>
     </p:extLst>
   </p:cSld>
@@ -3038,7 +4281,116 @@
           <a:p>
             <a:r>
               <a:rPr lang="ru-RU" dirty="0"/>
-              <a:t>Композиция позволяет с лёгкостью создавать сложные объекты из более простых. Однажды разработав и протестировав класс, мы можем многократно использовать его как надёжный «кирпичик» в составе более крупных компонентов нашей программы. Классы стандартной библиотеки C++ являются хорошим примером таких «кирпичиков». </a:t>
+              <a:t>Теперь переходим к более сильному типу связи — композиции.</a:t>
+            </a:r>
+          </a:p>
+          <a:p>
+            <a:r>
+              <a:rPr lang="ru-RU" dirty="0"/>
+              <a:t>Композиция — это отношение «часть–целое»,</a:t>
+            </a:r>
+            <a:r>
+              <a:rPr lang="en-US" dirty="0"/>
+              <a:t> </a:t>
+            </a:r>
+            <a:r>
+              <a:rPr lang="ru-RU" dirty="0"/>
+              <a:t>где один объект </a:t>
+            </a:r>
+            <a:r>
+              <a:rPr lang="ru-RU" b="1" dirty="0"/>
+              <a:t>владеет</a:t>
+            </a:r>
+            <a:r>
+              <a:rPr lang="ru-RU" dirty="0"/>
+              <a:t> другими.</a:t>
+            </a:r>
+          </a:p>
+          <a:p>
+            <a:r>
+              <a:rPr lang="ru-RU" dirty="0"/>
+              <a:t>Это означает, что:</a:t>
+            </a:r>
+            <a:r>
+              <a:rPr lang="en-US" dirty="0"/>
+              <a:t> </a:t>
+            </a:r>
+            <a:r>
+              <a:rPr lang="ru-RU" dirty="0"/>
+              <a:t>части не существуют отдельно </a:t>
+            </a:r>
+          </a:p>
+          <a:p>
+            <a:r>
+              <a:rPr lang="ru-RU" dirty="0"/>
+              <a:t>их жизненный цикл полностью зависит от целого </a:t>
+            </a:r>
+            <a:r>
+              <a:rPr lang="en-US" dirty="0"/>
+              <a:t>/</a:t>
+            </a:r>
+          </a:p>
+          <a:p>
+            <a:endParaRPr lang="ru-RU" dirty="0"/>
+          </a:p>
+          <a:p>
+            <a:r>
+              <a:rPr lang="ru-RU" dirty="0"/>
+              <a:t>Если уничтожается целый объект — уничтожаются и все его части.</a:t>
+            </a:r>
+          </a:p>
+          <a:p>
+            <a:r>
+              <a:rPr lang="ru-RU" dirty="0"/>
+              <a:t>Например, дом и комнаты.</a:t>
+            </a:r>
+            <a:br>
+              <a:rPr lang="ru-RU" dirty="0"/>
+            </a:br>
+            <a:r>
+              <a:rPr lang="ru-RU" dirty="0"/>
+              <a:t>Комната не существует сама по себе — она часть конкретного дома.</a:t>
+            </a:r>
+          </a:p>
+          <a:p>
+            <a:r>
+              <a:rPr lang="ru-RU" dirty="0"/>
+              <a:t>В C++ композиция встречается постоянно:</a:t>
+            </a:r>
+            <a:r>
+              <a:rPr lang="en-US" dirty="0"/>
+              <a:t> </a:t>
+            </a:r>
+            <a:r>
+              <a:rPr lang="ru-RU" dirty="0"/>
+              <a:t>когда один класс содержит другой как поле.</a:t>
+            </a:r>
+          </a:p>
+          <a:p>
+            <a:r>
+              <a:rPr lang="ru-RU" dirty="0"/>
+              <a:t>Важно:</a:t>
+            </a:r>
+            <a:br>
+              <a:rPr lang="ru-RU" dirty="0"/>
+            </a:br>
+            <a:r>
+              <a:rPr lang="ru-RU" dirty="0"/>
+              <a:t>здесь уже есть </a:t>
+            </a:r>
+            <a:r>
+              <a:rPr lang="ru-RU" b="1" dirty="0"/>
+              <a:t>владение</a:t>
+            </a:r>
+            <a:r>
+              <a:rPr lang="ru-RU" dirty="0"/>
+              <a:t>, в отличие от ассоциации, где его не было.</a:t>
+            </a:r>
+          </a:p>
+          <a:p>
+            <a:r>
+              <a:rPr lang="ru-RU" dirty="0"/>
+              <a:t>Именно это делает композицию самой сильной формой связи между объектами.</a:t>
             </a:r>
           </a:p>
         </p:txBody>
@@ -3061,7 +4413,7 @@
             <a:fld id="{7AD27560-579B-482E-BED7-036450DE1808}" type="slidenum">
               <a:rPr lang="ru-RU" smtClean="0"/>
               <a:pPr/>
-              <a:t>10</a:t>
+              <a:t>9</a:t>
             </a:fld>
             <a:endParaRPr lang="ru-RU"/>
           </a:p>
@@ -3070,7 +4422,7 @@
     </p:spTree>
     <p:extLst>
       <p:ext uri="{BB962C8B-B14F-4D97-AF65-F5344CB8AC3E}">
-        <p14:creationId xmlns:p14="http://schemas.microsoft.com/office/powerpoint/2010/main" val="27535934"/>
+        <p14:creationId xmlns:p14="http://schemas.microsoft.com/office/powerpoint/2010/main" val="1361405534"/>
       </p:ext>
     </p:extLst>
   </p:cSld>
@@ -3131,38 +4483,41 @@
           <a:p>
             <a:r>
               <a:rPr lang="ru-RU" dirty="0"/>
-              <a:t>На диаграмме классов композиция обозначается соединительной линией с закрашенным ромбом, исходящим от составного объекта. Со стороны включаемого объекта наконечника может и не быть.</a:t>
-            </a:r>
-          </a:p>
-          <a:p>
-            <a:r>
-              <a:rPr lang="ru-RU" dirty="0"/>
-              <a:t>Ограничений на количество включений простого объекта в состав более сложного нет. В приведённом примере </a:t>
-            </a:r>
-            <a:r>
-              <a:rPr lang="ru-RU" dirty="0" err="1"/>
-              <a:t>Circle</a:t>
-            </a:r>
-            <a:r>
-              <a:rPr lang="ru-RU" dirty="0"/>
-              <a:t> содержит один экземпляр </a:t>
-            </a:r>
-            <a:r>
-              <a:rPr lang="ru-RU" dirty="0" err="1"/>
-              <a:t>Point</a:t>
-            </a:r>
-            <a:r>
-              <a:rPr lang="ru-RU" dirty="0"/>
-              <a:t>, а </a:t>
-            </a:r>
-            <a:r>
-              <a:rPr lang="ru-RU" dirty="0" err="1"/>
-              <a:t>Triangle</a:t>
-            </a:r>
-            <a:r>
-              <a:rPr lang="ru-RU" dirty="0"/>
-              <a:t> — три. Чтобы подчеркнуть множественный характер связи, на конце стрелочки может указываться количество экземпляров.</a:t>
-            </a:r>
+              <a:t>Примеры композиции:</a:t>
+            </a:r>
+          </a:p>
+          <a:p>
+            <a:pPr>
+              <a:buFont typeface="Arial" panose="020B0604020202020204" pitchFamily="34" charset="0"/>
+              <a:buChar char="•"/>
+            </a:pPr>
+            <a:r>
+              <a:rPr lang="ru-RU" dirty="0"/>
+              <a:t>Точка на плоскости состоит из двух чисел, хранящих её координаты.</a:t>
+            </a:r>
+          </a:p>
+          <a:p>
+            <a:pPr>
+              <a:buFont typeface="Arial" panose="020B0604020202020204" pitchFamily="34" charset="0"/>
+              <a:buChar char="•"/>
+            </a:pPr>
+            <a:r>
+              <a:rPr lang="ru-RU" dirty="0"/>
+              <a:t>Окружность состоит из точки, задающей координаты центра, и числа, задающего радиус.</a:t>
+            </a:r>
+          </a:p>
+          <a:p>
+            <a:pPr>
+              <a:buFont typeface="Arial" panose="020B0604020202020204" pitchFamily="34" charset="0"/>
+              <a:buChar char="•"/>
+            </a:pPr>
+            <a:r>
+              <a:rPr lang="ru-RU" dirty="0"/>
+              <a:t>Класс рациональных чисел состоит из двух целых чисел — числителя и знаменателя.</a:t>
+            </a:r>
+          </a:p>
+          <a:p>
+            <a:endParaRPr lang="ru-RU" dirty="0"/>
           </a:p>
         </p:txBody>
       </p:sp>
@@ -3184,7 +4539,7 @@
             <a:fld id="{7AD27560-579B-482E-BED7-036450DE1808}" type="slidenum">
               <a:rPr lang="ru-RU" smtClean="0"/>
               <a:pPr/>
-              <a:t>11</a:t>
+              <a:t>10</a:t>
             </a:fld>
             <a:endParaRPr lang="ru-RU"/>
           </a:p>
@@ -3193,7 +4548,7 @@
     </p:spTree>
     <p:extLst>
       <p:ext uri="{BB962C8B-B14F-4D97-AF65-F5344CB8AC3E}">
-        <p14:creationId xmlns:p14="http://schemas.microsoft.com/office/powerpoint/2010/main" val="914357788"/>
+        <p14:creationId xmlns:p14="http://schemas.microsoft.com/office/powerpoint/2010/main" val="3668715743"/>
       </p:ext>
     </p:extLst>
   </p:cSld>
@@ -3254,148 +4609,8 @@
           <a:p>
             <a:r>
               <a:rPr lang="ru-RU" dirty="0"/>
-              <a:t>Составной класс, как правило, прячет свои члены-данные от доступа извне и управляет ими. Это позволяет сохранить состояние объекта согласованным. </a:t>
-            </a:r>
-            <a:endParaRPr lang="en-US" dirty="0"/>
-          </a:p>
-          <a:p>
-            <a:r>
-              <a:rPr lang="ru-RU" dirty="0"/>
-              <a:t>На диаграмме представлен класс </a:t>
-            </a:r>
-            <a:r>
-              <a:rPr lang="ru-RU" dirty="0" err="1">
-                <a:solidFill>
-                  <a:srgbClr val="EB5757"/>
-                </a:solidFill>
-                <a:effectLst/>
-                <a:latin typeface="SFMono-Regular"/>
-              </a:rPr>
-              <a:t>AlarmClock</a:t>
-            </a:r>
-            <a:r>
-              <a:rPr lang="ru-RU" dirty="0"/>
-              <a:t>, который состоит из часов (</a:t>
-            </a:r>
-            <a:r>
-              <a:rPr lang="ru-RU" dirty="0" err="1"/>
-              <a:t>Clock</a:t>
-            </a:r>
-            <a:r>
-              <a:rPr lang="ru-RU" dirty="0"/>
-              <a:t>), звукового устройства (</a:t>
-            </a:r>
-            <a:r>
-              <a:rPr lang="ru-RU" dirty="0" err="1"/>
-              <a:t>Beeper</a:t>
-            </a:r>
-            <a:r>
-              <a:rPr lang="ru-RU" dirty="0"/>
-              <a:t>) и времени включения звукового сигнала. Пользователи Будильника не имеют доступа к содержащимся в нём полям </a:t>
-            </a:r>
-            <a:r>
-              <a:rPr lang="ru-RU" dirty="0" err="1">
-                <a:solidFill>
-                  <a:srgbClr val="EB5757"/>
-                </a:solidFill>
-                <a:effectLst/>
-                <a:latin typeface="SFMono-Regular"/>
-              </a:rPr>
-              <a:t>clock</a:t>
-            </a:r>
-            <a:r>
-              <a:rPr lang="ru-RU" dirty="0">
-                <a:solidFill>
-                  <a:srgbClr val="EB5757"/>
-                </a:solidFill>
-                <a:effectLst/>
-                <a:latin typeface="SFMono-Regular"/>
-              </a:rPr>
-              <a:t>_</a:t>
-            </a:r>
-            <a:r>
-              <a:rPr lang="ru-RU" dirty="0"/>
-              <a:t> и </a:t>
-            </a:r>
-            <a:r>
-              <a:rPr lang="ru-RU" dirty="0" err="1">
-                <a:solidFill>
-                  <a:srgbClr val="EB5757"/>
-                </a:solidFill>
-                <a:effectLst/>
-                <a:latin typeface="SFMono-Regular"/>
-              </a:rPr>
-              <a:t>beeper</a:t>
-            </a:r>
-            <a:r>
-              <a:rPr lang="ru-RU" dirty="0">
-                <a:solidFill>
-                  <a:srgbClr val="EB5757"/>
-                </a:solidFill>
-                <a:effectLst/>
-                <a:latin typeface="SFMono-Regular"/>
-              </a:rPr>
-              <a:t>_</a:t>
-            </a:r>
-            <a:r>
-              <a:rPr lang="ru-RU" dirty="0"/>
-              <a:t>. Благодаря этому сигнал пробуждения прозвучит в тот момент, когда текущее время, предоставляемое часами, станет равно значению поля </a:t>
-            </a:r>
-            <a:r>
-              <a:rPr lang="ru-RU" dirty="0" err="1">
-                <a:solidFill>
-                  <a:srgbClr val="EB5757"/>
-                </a:solidFill>
-                <a:effectLst/>
-                <a:latin typeface="SFMono-Regular"/>
-              </a:rPr>
-              <a:t>alarm_time</a:t>
-            </a:r>
-            <a:r>
-              <a:rPr lang="ru-RU" dirty="0">
-                <a:solidFill>
-                  <a:srgbClr val="EB5757"/>
-                </a:solidFill>
-                <a:effectLst/>
-                <a:latin typeface="SFMono-Regular"/>
-              </a:rPr>
-              <a:t>_</a:t>
-            </a:r>
-            <a:r>
-              <a:rPr lang="ru-RU" dirty="0"/>
-              <a:t>.</a:t>
-            </a:r>
-          </a:p>
-          <a:p>
-            <a:r>
-              <a:rPr lang="ru-RU" dirty="0"/>
-              <a:t>То, что класс </a:t>
-            </a:r>
-            <a:r>
-              <a:rPr lang="ru-RU" dirty="0" err="1"/>
-              <a:t>Beeper</a:t>
-            </a:r>
-            <a:r>
-              <a:rPr lang="ru-RU" dirty="0"/>
-              <a:t> не знает об объектах, в которых он содержится, даёт возможность использовать </a:t>
-            </a:r>
-            <a:r>
-              <a:rPr lang="ru-RU" dirty="0" err="1"/>
-              <a:t>Beeper</a:t>
-            </a:r>
-            <a:r>
-              <a:rPr lang="ru-RU" dirty="0"/>
-              <a:t> не только в будильнике, но и, например, в игрушечной полицейской машине. Только в этом случае звуковой сигнал будет включён не по достижении определённого времени, а сразу при включении игрушки.</a:t>
-            </a:r>
-          </a:p>
-          <a:p>
-            <a:r>
-              <a:rPr lang="ru-RU" dirty="0"/>
-              <a:t>При разрушении составного объекта удаляются и входящие в его состав объекты. Например, при удалении папки должны быть удалены все содержащиеся в ней файлы.</a:t>
-            </a:r>
-          </a:p>
-          <a:p>
-            <a:endParaRPr lang="ru-RU" dirty="0"/>
+              <a:t>Композиция позволяет с лёгкостью создавать сложные объекты из более простых. Однажды разработав и протестировав класс, мы можем многократно использовать его как надёжный «кирпичик» в составе более крупных компонентов нашей программы. Классы стандартной библиотеки C++ являются хорошим примером таких «кирпичиков». </a:t>
+            </a:r>
           </a:p>
         </p:txBody>
       </p:sp>
@@ -3417,7 +4632,7 @@
             <a:fld id="{7AD27560-579B-482E-BED7-036450DE1808}" type="slidenum">
               <a:rPr lang="ru-RU" smtClean="0"/>
               <a:pPr/>
-              <a:t>12</a:t>
+              <a:t>11</a:t>
             </a:fld>
             <a:endParaRPr lang="ru-RU"/>
           </a:p>
@@ -3426,7 +4641,7 @@
     </p:spTree>
     <p:extLst>
       <p:ext uri="{BB962C8B-B14F-4D97-AF65-F5344CB8AC3E}">
-        <p14:creationId xmlns:p14="http://schemas.microsoft.com/office/powerpoint/2010/main" val="3688023569"/>
+        <p14:creationId xmlns:p14="http://schemas.microsoft.com/office/powerpoint/2010/main" val="27535934"/>
       </p:ext>
     </p:extLst>
   </p:cSld>
@@ -6696,6 +7911,9 @@
         </p:txBody>
       </p:sp>
     </p:spTree>
+    <p:custDataLst>
+      <p:tags r:id="rId1"/>
+    </p:custDataLst>
     <p:extLst>
       <p:ext uri="{BB962C8B-B14F-4D97-AF65-F5344CB8AC3E}">
         <p14:creationId xmlns:p14="http://schemas.microsoft.com/office/powerpoint/2010/main" val="4239331289"/>
@@ -6709,6 +7927,733 @@
 </file>
 
 <file path=ppt/slides/slide10.xml><?xml version="1.0" encoding="utf-8"?>
+<p:sld xmlns:a="http://schemas.openxmlformats.org/drawingml/2006/main" xmlns:r="http://schemas.openxmlformats.org/officeDocument/2006/relationships" xmlns:p="http://schemas.openxmlformats.org/presentationml/2006/main">
+  <p:cSld>
+    <p:spTree>
+      <p:nvGrpSpPr>
+        <p:cNvPr id="1" name=""/>
+        <p:cNvGrpSpPr/>
+        <p:nvPr/>
+      </p:nvGrpSpPr>
+      <p:grpSpPr>
+        <a:xfrm>
+          <a:off x="0" y="0"/>
+          <a:ext cx="0" cy="0"/>
+          <a:chOff x="0" y="0"/>
+          <a:chExt cx="0" cy="0"/>
+        </a:xfrm>
+      </p:grpSpPr>
+      <p:sp>
+        <p:nvSpPr>
+          <p:cNvPr id="2" name="Заголовок 1">
+            <a:extLst>
+              <a:ext uri="{FF2B5EF4-FFF2-40B4-BE49-F238E27FC236}">
+                <a16:creationId xmlns:a16="http://schemas.microsoft.com/office/drawing/2014/main" id="{3F7EDF0C-5F6E-4497-A839-4FCA94CDB171}"/>
+              </a:ext>
+            </a:extLst>
+          </p:cNvPr>
+          <p:cNvSpPr>
+            <a:spLocks noGrp="1"/>
+          </p:cNvSpPr>
+          <p:nvPr>
+            <p:ph type="title"/>
+          </p:nvPr>
+        </p:nvSpPr>
+        <p:spPr/>
+        <p:txBody>
+          <a:bodyPr/>
+          <a:lstStyle/>
+          <a:p>
+            <a:r>
+              <a:rPr lang="ru-RU" dirty="0"/>
+              <a:t>Примеры</a:t>
+            </a:r>
+          </a:p>
+        </p:txBody>
+      </p:sp>
+      <p:sp>
+        <p:nvSpPr>
+          <p:cNvPr id="3" name="Объект 2">
+            <a:extLst>
+              <a:ext uri="{FF2B5EF4-FFF2-40B4-BE49-F238E27FC236}">
+                <a16:creationId xmlns:a16="http://schemas.microsoft.com/office/drawing/2014/main" id="{4F76F067-A745-4012-8CF4-6EB40B0AB0D1}"/>
+              </a:ext>
+            </a:extLst>
+          </p:cNvPr>
+          <p:cNvSpPr>
+            <a:spLocks noGrp="1"/>
+          </p:cNvSpPr>
+          <p:nvPr>
+            <p:ph idx="1"/>
+          </p:nvPr>
+        </p:nvSpPr>
+        <p:spPr>
+          <a:xfrm>
+            <a:off x="838200" y="1825625"/>
+            <a:ext cx="6553944" cy="4351338"/>
+          </a:xfrm>
+        </p:spPr>
+        <p:txBody>
+          <a:bodyPr>
+            <a:normAutofit fontScale="92500"/>
+          </a:bodyPr>
+          <a:lstStyle/>
+          <a:p>
+            <a:r>
+              <a:rPr lang="ru-RU" dirty="0"/>
+              <a:t>Точка на плоскости</a:t>
+            </a:r>
+          </a:p>
+          <a:p>
+            <a:pPr lvl="1"/>
+            <a:r>
+              <a:rPr lang="ru-RU" dirty="0"/>
+              <a:t>Пара чисел, задающих координаты точки</a:t>
+            </a:r>
+          </a:p>
+          <a:p>
+            <a:r>
+              <a:rPr lang="ru-RU" dirty="0"/>
+              <a:t>Окружность</a:t>
+            </a:r>
+          </a:p>
+          <a:p>
+            <a:pPr lvl="1"/>
+            <a:r>
+              <a:rPr lang="ru-RU" dirty="0"/>
+              <a:t>Точка (центр) и число (радиус)</a:t>
+            </a:r>
+          </a:p>
+          <a:p>
+            <a:r>
+              <a:rPr lang="ru-RU" dirty="0"/>
+              <a:t>Класс комплексных чисел</a:t>
+            </a:r>
+          </a:p>
+          <a:p>
+            <a:pPr lvl="1"/>
+            <a:r>
+              <a:rPr lang="ru-RU" dirty="0"/>
+              <a:t>Действительная и мнимая часть</a:t>
+            </a:r>
+            <a:endParaRPr lang="en-US" dirty="0"/>
+          </a:p>
+          <a:p>
+            <a:r>
+              <a:rPr lang="ru-RU" dirty="0"/>
+              <a:t>Класс рациональных чисел</a:t>
+            </a:r>
+          </a:p>
+          <a:p>
+            <a:pPr lvl="1"/>
+            <a:r>
+              <a:rPr lang="ru-RU" dirty="0"/>
+              <a:t>Пара целых чисел - числитель и знаменатель</a:t>
+            </a:r>
+          </a:p>
+          <a:p>
+            <a:r>
+              <a:rPr lang="ru-RU" dirty="0"/>
+              <a:t>Многоугольник</a:t>
+            </a:r>
+          </a:p>
+          <a:p>
+            <a:pPr lvl="1"/>
+            <a:r>
+              <a:rPr lang="ru-RU" dirty="0"/>
+              <a:t>Координаты вершин</a:t>
+            </a:r>
+          </a:p>
+        </p:txBody>
+      </p:sp>
+      <p:sp>
+        <p:nvSpPr>
+          <p:cNvPr id="7" name="TextBox 6">
+            <a:extLst>
+              <a:ext uri="{FF2B5EF4-FFF2-40B4-BE49-F238E27FC236}">
+                <a16:creationId xmlns:a16="http://schemas.microsoft.com/office/drawing/2014/main" id="{0104880E-E7E2-4F8C-80D3-DB6BEC83767B}"/>
+              </a:ext>
+            </a:extLst>
+          </p:cNvPr>
+          <p:cNvSpPr txBox="1"/>
+          <p:nvPr/>
+        </p:nvSpPr>
+        <p:spPr>
+          <a:xfrm>
+            <a:off x="7536160" y="548680"/>
+            <a:ext cx="4557119" cy="6186309"/>
+          </a:xfrm>
+          <a:prstGeom prst="rect">
+            <a:avLst/>
+          </a:prstGeom>
+          <a:noFill/>
+        </p:spPr>
+        <p:txBody>
+          <a:bodyPr wrap="square">
+            <a:spAutoFit/>
+          </a:bodyPr>
+          <a:lstStyle/>
+          <a:p>
+            <a:r>
+              <a:rPr lang="en-US" b="0" dirty="0">
+                <a:solidFill>
+                  <a:srgbClr val="0000FF"/>
+                </a:solidFill>
+                <a:effectLst/>
+                <a:latin typeface="Consolas" panose="020B0609020204030204" pitchFamily="49" charset="0"/>
+              </a:rPr>
+              <a:t>struct</a:t>
+            </a:r>
+            <a:r>
+              <a:rPr lang="en-US" b="0" dirty="0">
+                <a:solidFill>
+                  <a:srgbClr val="000000"/>
+                </a:solidFill>
+                <a:effectLst/>
+                <a:latin typeface="Consolas" panose="020B0609020204030204" pitchFamily="49" charset="0"/>
+              </a:rPr>
+              <a:t> Point {</a:t>
+            </a:r>
+          </a:p>
+          <a:p>
+            <a:r>
+              <a:rPr lang="en-US" b="0" dirty="0">
+                <a:solidFill>
+                  <a:srgbClr val="000000"/>
+                </a:solidFill>
+                <a:effectLst/>
+                <a:latin typeface="Consolas" panose="020B0609020204030204" pitchFamily="49" charset="0"/>
+              </a:rPr>
+              <a:t>  </a:t>
+            </a:r>
+            <a:r>
+              <a:rPr lang="en-US" b="0" dirty="0">
+                <a:solidFill>
+                  <a:srgbClr val="0000FF"/>
+                </a:solidFill>
+                <a:effectLst/>
+                <a:latin typeface="Consolas" panose="020B0609020204030204" pitchFamily="49" charset="0"/>
+              </a:rPr>
+              <a:t>double</a:t>
+            </a:r>
+            <a:r>
+              <a:rPr lang="en-US" b="0" dirty="0">
+                <a:solidFill>
+                  <a:srgbClr val="000000"/>
+                </a:solidFill>
+                <a:effectLst/>
+                <a:latin typeface="Consolas" panose="020B0609020204030204" pitchFamily="49" charset="0"/>
+              </a:rPr>
+              <a:t> x, y;</a:t>
+            </a:r>
+          </a:p>
+          <a:p>
+            <a:r>
+              <a:rPr lang="en-US" b="0" dirty="0">
+                <a:solidFill>
+                  <a:srgbClr val="000000"/>
+                </a:solidFill>
+                <a:effectLst/>
+                <a:latin typeface="Consolas" panose="020B0609020204030204" pitchFamily="49" charset="0"/>
+              </a:rPr>
+              <a:t>};</a:t>
+            </a:r>
+          </a:p>
+          <a:p>
+            <a:br>
+              <a:rPr lang="en-US" b="0" dirty="0">
+                <a:solidFill>
+                  <a:srgbClr val="000000"/>
+                </a:solidFill>
+                <a:effectLst/>
+                <a:latin typeface="Consolas" panose="020B0609020204030204" pitchFamily="49" charset="0"/>
+              </a:rPr>
+            </a:br>
+            <a:r>
+              <a:rPr lang="en-US" b="0" dirty="0">
+                <a:solidFill>
+                  <a:srgbClr val="0000FF"/>
+                </a:solidFill>
+                <a:effectLst/>
+                <a:latin typeface="Consolas" panose="020B0609020204030204" pitchFamily="49" charset="0"/>
+              </a:rPr>
+              <a:t>class</a:t>
+            </a:r>
+            <a:r>
+              <a:rPr lang="en-US" b="0" dirty="0">
+                <a:solidFill>
+                  <a:srgbClr val="000000"/>
+                </a:solidFill>
+                <a:effectLst/>
+                <a:latin typeface="Consolas" panose="020B0609020204030204" pitchFamily="49" charset="0"/>
+              </a:rPr>
+              <a:t> Circle {</a:t>
+            </a:r>
+          </a:p>
+          <a:p>
+            <a:r>
+              <a:rPr lang="en-US" b="0" dirty="0">
+                <a:solidFill>
+                  <a:srgbClr val="000000"/>
+                </a:solidFill>
+                <a:effectLst/>
+                <a:latin typeface="Consolas" panose="020B0609020204030204" pitchFamily="49" charset="0"/>
+              </a:rPr>
+              <a:t>  Point </a:t>
+            </a:r>
+            <a:r>
+              <a:rPr lang="en-US" b="0" dirty="0" err="1">
+                <a:solidFill>
+                  <a:srgbClr val="000000"/>
+                </a:solidFill>
+                <a:effectLst/>
+                <a:latin typeface="Consolas" panose="020B0609020204030204" pitchFamily="49" charset="0"/>
+              </a:rPr>
+              <a:t>m_center</a:t>
+            </a:r>
+            <a:r>
+              <a:rPr lang="en-US" b="0" dirty="0">
+                <a:solidFill>
+                  <a:srgbClr val="000000"/>
+                </a:solidFill>
+                <a:effectLst/>
+                <a:latin typeface="Consolas" panose="020B0609020204030204" pitchFamily="49" charset="0"/>
+              </a:rPr>
+              <a:t>;</a:t>
+            </a:r>
+          </a:p>
+          <a:p>
+            <a:r>
+              <a:rPr lang="en-US" b="0" dirty="0">
+                <a:solidFill>
+                  <a:srgbClr val="000000"/>
+                </a:solidFill>
+                <a:effectLst/>
+                <a:latin typeface="Consolas" panose="020B0609020204030204" pitchFamily="49" charset="0"/>
+              </a:rPr>
+              <a:t>  </a:t>
+            </a:r>
+            <a:r>
+              <a:rPr lang="en-US" b="0" dirty="0">
+                <a:solidFill>
+                  <a:srgbClr val="0000FF"/>
+                </a:solidFill>
+                <a:effectLst/>
+                <a:latin typeface="Consolas" panose="020B0609020204030204" pitchFamily="49" charset="0"/>
+              </a:rPr>
+              <a:t>double</a:t>
+            </a:r>
+            <a:r>
+              <a:rPr lang="en-US" b="0" dirty="0">
+                <a:solidFill>
+                  <a:srgbClr val="000000"/>
+                </a:solidFill>
+                <a:effectLst/>
+                <a:latin typeface="Consolas" panose="020B0609020204030204" pitchFamily="49" charset="0"/>
+              </a:rPr>
+              <a:t> </a:t>
+            </a:r>
+            <a:r>
+              <a:rPr lang="en-US" b="0" dirty="0" err="1">
+                <a:solidFill>
+                  <a:srgbClr val="000000"/>
+                </a:solidFill>
+                <a:effectLst/>
+                <a:latin typeface="Consolas" panose="020B0609020204030204" pitchFamily="49" charset="0"/>
+              </a:rPr>
+              <a:t>m_radius</a:t>
+            </a:r>
+            <a:r>
+              <a:rPr lang="en-US" b="0" dirty="0">
+                <a:solidFill>
+                  <a:srgbClr val="000000"/>
+                </a:solidFill>
+                <a:effectLst/>
+                <a:latin typeface="Consolas" panose="020B0609020204030204" pitchFamily="49" charset="0"/>
+              </a:rPr>
+              <a:t>;</a:t>
+            </a:r>
+          </a:p>
+          <a:p>
+            <a:r>
+              <a:rPr lang="en-US" b="0" dirty="0">
+                <a:solidFill>
+                  <a:srgbClr val="000000"/>
+                </a:solidFill>
+                <a:effectLst/>
+                <a:latin typeface="Consolas" panose="020B0609020204030204" pitchFamily="49" charset="0"/>
+              </a:rPr>
+              <a:t>};</a:t>
+            </a:r>
+          </a:p>
+          <a:p>
+            <a:br>
+              <a:rPr lang="en-US" b="0" dirty="0">
+                <a:solidFill>
+                  <a:srgbClr val="000000"/>
+                </a:solidFill>
+                <a:effectLst/>
+                <a:latin typeface="Consolas" panose="020B0609020204030204" pitchFamily="49" charset="0"/>
+              </a:rPr>
+            </a:br>
+            <a:r>
+              <a:rPr lang="en-US" b="0" dirty="0">
+                <a:solidFill>
+                  <a:srgbClr val="0000FF"/>
+                </a:solidFill>
+                <a:effectLst/>
+                <a:latin typeface="Consolas" panose="020B0609020204030204" pitchFamily="49" charset="0"/>
+              </a:rPr>
+              <a:t>struct</a:t>
+            </a:r>
+            <a:r>
+              <a:rPr lang="en-US" b="0" dirty="0">
+                <a:solidFill>
+                  <a:srgbClr val="000000"/>
+                </a:solidFill>
+                <a:effectLst/>
+                <a:latin typeface="Consolas" panose="020B0609020204030204" pitchFamily="49" charset="0"/>
+              </a:rPr>
+              <a:t> Complex {</a:t>
+            </a:r>
+          </a:p>
+          <a:p>
+            <a:r>
+              <a:rPr lang="en-US" b="0" dirty="0">
+                <a:solidFill>
+                  <a:srgbClr val="000000"/>
+                </a:solidFill>
+                <a:effectLst/>
+                <a:latin typeface="Consolas" panose="020B0609020204030204" pitchFamily="49" charset="0"/>
+              </a:rPr>
+              <a:t>  </a:t>
+            </a:r>
+            <a:r>
+              <a:rPr lang="en-US" b="0" dirty="0">
+                <a:solidFill>
+                  <a:srgbClr val="0000FF"/>
+                </a:solidFill>
+                <a:effectLst/>
+                <a:latin typeface="Consolas" panose="020B0609020204030204" pitchFamily="49" charset="0"/>
+              </a:rPr>
+              <a:t>double</a:t>
+            </a:r>
+            <a:r>
+              <a:rPr lang="en-US" b="0" dirty="0">
+                <a:solidFill>
+                  <a:srgbClr val="000000"/>
+                </a:solidFill>
+                <a:effectLst/>
+                <a:latin typeface="Consolas" panose="020B0609020204030204" pitchFamily="49" charset="0"/>
+              </a:rPr>
+              <a:t> real;</a:t>
+            </a:r>
+          </a:p>
+          <a:p>
+            <a:r>
+              <a:rPr lang="en-US" b="0" dirty="0">
+                <a:solidFill>
+                  <a:srgbClr val="000000"/>
+                </a:solidFill>
+                <a:effectLst/>
+                <a:latin typeface="Consolas" panose="020B0609020204030204" pitchFamily="49" charset="0"/>
+              </a:rPr>
+              <a:t>  </a:t>
+            </a:r>
+            <a:r>
+              <a:rPr lang="en-US" b="0" dirty="0">
+                <a:solidFill>
+                  <a:srgbClr val="0000FF"/>
+                </a:solidFill>
+                <a:effectLst/>
+                <a:latin typeface="Consolas" panose="020B0609020204030204" pitchFamily="49" charset="0"/>
+              </a:rPr>
+              <a:t>double</a:t>
+            </a:r>
+            <a:r>
+              <a:rPr lang="en-US" b="0" dirty="0">
+                <a:solidFill>
+                  <a:srgbClr val="000000"/>
+                </a:solidFill>
+                <a:effectLst/>
+                <a:latin typeface="Consolas" panose="020B0609020204030204" pitchFamily="49" charset="0"/>
+              </a:rPr>
+              <a:t> </a:t>
+            </a:r>
+            <a:r>
+              <a:rPr lang="en-US" b="0" dirty="0" err="1">
+                <a:solidFill>
+                  <a:srgbClr val="000000"/>
+                </a:solidFill>
+                <a:effectLst/>
+                <a:latin typeface="Consolas" panose="020B0609020204030204" pitchFamily="49" charset="0"/>
+              </a:rPr>
+              <a:t>im</a:t>
+            </a:r>
+            <a:r>
+              <a:rPr lang="en-US" b="0" dirty="0">
+                <a:solidFill>
+                  <a:srgbClr val="000000"/>
+                </a:solidFill>
+                <a:effectLst/>
+                <a:latin typeface="Consolas" panose="020B0609020204030204" pitchFamily="49" charset="0"/>
+              </a:rPr>
+              <a:t>;</a:t>
+            </a:r>
+          </a:p>
+          <a:p>
+            <a:r>
+              <a:rPr lang="en-US" b="0" dirty="0">
+                <a:solidFill>
+                  <a:srgbClr val="000000"/>
+                </a:solidFill>
+                <a:effectLst/>
+                <a:latin typeface="Consolas" panose="020B0609020204030204" pitchFamily="49" charset="0"/>
+              </a:rPr>
+              <a:t>};</a:t>
+            </a:r>
+          </a:p>
+          <a:p>
+            <a:br>
+              <a:rPr lang="en-US" b="0" dirty="0">
+                <a:solidFill>
+                  <a:srgbClr val="000000"/>
+                </a:solidFill>
+                <a:effectLst/>
+                <a:latin typeface="Consolas" panose="020B0609020204030204" pitchFamily="49" charset="0"/>
+              </a:rPr>
+            </a:br>
+            <a:r>
+              <a:rPr lang="en-US" b="0" dirty="0">
+                <a:solidFill>
+                  <a:srgbClr val="0000FF"/>
+                </a:solidFill>
+                <a:effectLst/>
+                <a:latin typeface="Consolas" panose="020B0609020204030204" pitchFamily="49" charset="0"/>
+              </a:rPr>
+              <a:t>class</a:t>
+            </a:r>
+            <a:r>
+              <a:rPr lang="en-US" b="0" dirty="0">
+                <a:solidFill>
+                  <a:srgbClr val="000000"/>
+                </a:solidFill>
+                <a:effectLst/>
+                <a:latin typeface="Consolas" panose="020B0609020204030204" pitchFamily="49" charset="0"/>
+              </a:rPr>
+              <a:t> Rational {</a:t>
+            </a:r>
+          </a:p>
+          <a:p>
+            <a:r>
+              <a:rPr lang="en-US" b="0" dirty="0">
+                <a:solidFill>
+                  <a:srgbClr val="000000"/>
+                </a:solidFill>
+                <a:effectLst/>
+                <a:latin typeface="Consolas" panose="020B0609020204030204" pitchFamily="49" charset="0"/>
+              </a:rPr>
+              <a:t>  </a:t>
+            </a:r>
+            <a:r>
+              <a:rPr lang="en-US" b="0" dirty="0">
+                <a:solidFill>
+                  <a:srgbClr val="0000FF"/>
+                </a:solidFill>
+                <a:effectLst/>
+                <a:latin typeface="Consolas" panose="020B0609020204030204" pitchFamily="49" charset="0"/>
+              </a:rPr>
+              <a:t>int</a:t>
+            </a:r>
+            <a:r>
+              <a:rPr lang="en-US" b="0" dirty="0">
+                <a:solidFill>
+                  <a:srgbClr val="000000"/>
+                </a:solidFill>
+                <a:effectLst/>
+                <a:latin typeface="Consolas" panose="020B0609020204030204" pitchFamily="49" charset="0"/>
+              </a:rPr>
+              <a:t> </a:t>
+            </a:r>
+            <a:r>
+              <a:rPr lang="en-US" b="0" dirty="0" err="1">
+                <a:solidFill>
+                  <a:srgbClr val="000000"/>
+                </a:solidFill>
+                <a:effectLst/>
+                <a:latin typeface="Consolas" panose="020B0609020204030204" pitchFamily="49" charset="0"/>
+              </a:rPr>
+              <a:t>m_numerator</a:t>
+            </a:r>
+            <a:r>
+              <a:rPr lang="en-US" b="0" dirty="0">
+                <a:solidFill>
+                  <a:srgbClr val="000000"/>
+                </a:solidFill>
+                <a:effectLst/>
+                <a:latin typeface="Consolas" panose="020B0609020204030204" pitchFamily="49" charset="0"/>
+              </a:rPr>
+              <a:t>;</a:t>
+            </a:r>
+          </a:p>
+          <a:p>
+            <a:r>
+              <a:rPr lang="en-US" b="0" dirty="0">
+                <a:solidFill>
+                  <a:srgbClr val="000000"/>
+                </a:solidFill>
+                <a:effectLst/>
+                <a:latin typeface="Consolas" panose="020B0609020204030204" pitchFamily="49" charset="0"/>
+              </a:rPr>
+              <a:t>  </a:t>
+            </a:r>
+            <a:r>
+              <a:rPr lang="en-US" b="0" dirty="0">
+                <a:solidFill>
+                  <a:srgbClr val="0000FF"/>
+                </a:solidFill>
+                <a:effectLst/>
+                <a:latin typeface="Consolas" panose="020B0609020204030204" pitchFamily="49" charset="0"/>
+              </a:rPr>
+              <a:t>int</a:t>
+            </a:r>
+            <a:r>
+              <a:rPr lang="en-US" b="0" dirty="0">
+                <a:solidFill>
+                  <a:srgbClr val="000000"/>
+                </a:solidFill>
+                <a:effectLst/>
+                <a:latin typeface="Consolas" panose="020B0609020204030204" pitchFamily="49" charset="0"/>
+              </a:rPr>
+              <a:t> </a:t>
+            </a:r>
+            <a:r>
+              <a:rPr lang="en-US" b="0" dirty="0" err="1">
+                <a:solidFill>
+                  <a:srgbClr val="000000"/>
+                </a:solidFill>
+                <a:effectLst/>
+                <a:latin typeface="Consolas" panose="020B0609020204030204" pitchFamily="49" charset="0"/>
+              </a:rPr>
+              <a:t>m_denominator</a:t>
+            </a:r>
+            <a:r>
+              <a:rPr lang="en-US" b="0" dirty="0">
+                <a:solidFill>
+                  <a:srgbClr val="000000"/>
+                </a:solidFill>
+                <a:effectLst/>
+                <a:latin typeface="Consolas" panose="020B0609020204030204" pitchFamily="49" charset="0"/>
+              </a:rPr>
+              <a:t>;</a:t>
+            </a:r>
+          </a:p>
+          <a:p>
+            <a:r>
+              <a:rPr lang="en-US" b="0" dirty="0">
+                <a:solidFill>
+                  <a:srgbClr val="000000"/>
+                </a:solidFill>
+                <a:effectLst/>
+                <a:latin typeface="Consolas" panose="020B0609020204030204" pitchFamily="49" charset="0"/>
+              </a:rPr>
+              <a:t>};</a:t>
+            </a:r>
+          </a:p>
+          <a:p>
+            <a:br>
+              <a:rPr lang="en-US" b="0" dirty="0">
+                <a:solidFill>
+                  <a:srgbClr val="000000"/>
+                </a:solidFill>
+                <a:effectLst/>
+                <a:latin typeface="Consolas" panose="020B0609020204030204" pitchFamily="49" charset="0"/>
+              </a:rPr>
+            </a:br>
+            <a:r>
+              <a:rPr lang="en-US" b="0" dirty="0">
+                <a:solidFill>
+                  <a:srgbClr val="0000FF"/>
+                </a:solidFill>
+                <a:effectLst/>
+                <a:latin typeface="Consolas" panose="020B0609020204030204" pitchFamily="49" charset="0"/>
+              </a:rPr>
+              <a:t>class</a:t>
+            </a:r>
+            <a:r>
+              <a:rPr lang="en-US" b="0" dirty="0">
+                <a:solidFill>
+                  <a:srgbClr val="000000"/>
+                </a:solidFill>
+                <a:effectLst/>
+                <a:latin typeface="Consolas" panose="020B0609020204030204" pitchFamily="49" charset="0"/>
+              </a:rPr>
+              <a:t> Polygon {</a:t>
+            </a:r>
+          </a:p>
+          <a:p>
+            <a:r>
+              <a:rPr lang="en-US" b="0" dirty="0">
+                <a:solidFill>
+                  <a:srgbClr val="000000"/>
+                </a:solidFill>
+                <a:effectLst/>
+                <a:latin typeface="Consolas" panose="020B0609020204030204" pitchFamily="49" charset="0"/>
+              </a:rPr>
+              <a:t>  std::vector&lt;Point&gt; </a:t>
+            </a:r>
+            <a:r>
+              <a:rPr lang="en-US" b="0" dirty="0" err="1">
+                <a:solidFill>
+                  <a:srgbClr val="000000"/>
+                </a:solidFill>
+                <a:effectLst/>
+                <a:latin typeface="Consolas" panose="020B0609020204030204" pitchFamily="49" charset="0"/>
+              </a:rPr>
+              <a:t>m_vertices</a:t>
+            </a:r>
+            <a:r>
+              <a:rPr lang="en-US" b="0" dirty="0">
+                <a:solidFill>
+                  <a:srgbClr val="000000"/>
+                </a:solidFill>
+                <a:effectLst/>
+                <a:latin typeface="Consolas" panose="020B0609020204030204" pitchFamily="49" charset="0"/>
+              </a:rPr>
+              <a:t>;</a:t>
+            </a:r>
+          </a:p>
+          <a:p>
+            <a:r>
+              <a:rPr lang="en-US" b="0" dirty="0">
+                <a:solidFill>
+                  <a:srgbClr val="000000"/>
+                </a:solidFill>
+                <a:effectLst/>
+                <a:latin typeface="Consolas" panose="020B0609020204030204" pitchFamily="49" charset="0"/>
+              </a:rPr>
+              <a:t>};</a:t>
+            </a:r>
+          </a:p>
+        </p:txBody>
+      </p:sp>
+    </p:spTree>
+    <p:custDataLst>
+      <p:tags r:id="rId1"/>
+    </p:custDataLst>
+    <p:extLst>
+      <p:ext uri="{BB962C8B-B14F-4D97-AF65-F5344CB8AC3E}">
+        <p14:creationId xmlns:p14="http://schemas.microsoft.com/office/powerpoint/2010/main" val="3886857560"/>
+      </p:ext>
+    </p:extLst>
+  </p:cSld>
+  <p:clrMapOvr>
+    <a:masterClrMapping/>
+  </p:clrMapOvr>
+</p:sld>
+</file>
+
+<file path=ppt/slides/slide11.xml><?xml version="1.0" encoding="utf-8"?>
 <p:sld xmlns:a="http://schemas.openxmlformats.org/drawingml/2006/main" xmlns:r="http://schemas.openxmlformats.org/officeDocument/2006/relationships" xmlns:p="http://schemas.openxmlformats.org/presentationml/2006/main">
   <p:cSld>
     <p:spTree>
@@ -7674,6 +9619,9 @@
         </p:txBody>
       </p:sp>
     </p:spTree>
+    <p:custDataLst>
+      <p:tags r:id="rId1"/>
+    </p:custDataLst>
     <p:extLst>
       <p:ext uri="{BB962C8B-B14F-4D97-AF65-F5344CB8AC3E}">
         <p14:creationId xmlns:p14="http://schemas.microsoft.com/office/powerpoint/2010/main" val="178838665"/>
@@ -7686,7 +9634,7 @@
 </p:sld>
 </file>
 
-<file path=ppt/slides/slide11.xml><?xml version="1.0" encoding="utf-8"?>
+<file path=ppt/slides/slide12.xml><?xml version="1.0" encoding="utf-8"?>
 <p:sld xmlns:a="http://schemas.openxmlformats.org/drawingml/2006/main" xmlns:r="http://schemas.openxmlformats.org/officeDocument/2006/relationships" xmlns:p="http://schemas.openxmlformats.org/presentationml/2006/main">
   <p:cSld>
     <p:spTree>
@@ -7748,7 +9696,7 @@
           <p:nvPr/>
         </p:nvPicPr>
         <p:blipFill>
-          <a:blip r:embed="rId3">
+          <a:blip r:embed="rId4">
             <a:extLst>
               <a:ext uri="{28A0092B-C50C-407E-A947-70E740481C1C}">
                 <a14:useLocalDpi xmlns:a14="http://schemas.microsoft.com/office/drawing/2010/main" val="0"/>
@@ -7770,6 +9718,9 @@
         </p:spPr>
       </p:pic>
     </p:spTree>
+    <p:custDataLst>
+      <p:tags r:id="rId1"/>
+    </p:custDataLst>
     <p:extLst>
       <p:ext uri="{BB962C8B-B14F-4D97-AF65-F5344CB8AC3E}">
         <p14:creationId xmlns:p14="http://schemas.microsoft.com/office/powerpoint/2010/main" val="2342119668"/>
@@ -7782,7 +9733,7 @@
 </p:sld>
 </file>
 
-<file path=ppt/slides/slide12.xml><?xml version="1.0" encoding="utf-8"?>
+<file path=ppt/slides/slide13.xml><?xml version="1.0" encoding="utf-8"?>
 <p:sld xmlns:a="http://schemas.openxmlformats.org/drawingml/2006/main" xmlns:r="http://schemas.openxmlformats.org/officeDocument/2006/relationships" xmlns:p="http://schemas.openxmlformats.org/presentationml/2006/main">
   <p:cSld>
     <p:spTree>
@@ -7844,7 +9795,7 @@
           <p:nvPr/>
         </p:nvPicPr>
         <p:blipFill>
-          <a:blip r:embed="rId3" cstate="print">
+          <a:blip r:embed="rId4" cstate="print">
             <a:extLst>
               <a:ext uri="{28A0092B-C50C-407E-A947-70E740481C1C}">
                 <a14:useLocalDpi xmlns:a14="http://schemas.microsoft.com/office/drawing/2010/main" val="0"/>
@@ -7865,6 +9816,9 @@
         </p:spPr>
       </p:pic>
     </p:spTree>
+    <p:custDataLst>
+      <p:tags r:id="rId1"/>
+    </p:custDataLst>
     <p:extLst>
       <p:ext uri="{BB962C8B-B14F-4D97-AF65-F5344CB8AC3E}">
         <p14:creationId xmlns:p14="http://schemas.microsoft.com/office/powerpoint/2010/main" val="964997260"/>
@@ -7877,7 +9831,7 @@
 </p:sld>
 </file>
 
-<file path=ppt/slides/slide13.xml><?xml version="1.0" encoding="utf-8"?>
+<file path=ppt/slides/slide14.xml><?xml version="1.0" encoding="utf-8"?>
 <p:sld xmlns:a="http://schemas.openxmlformats.org/drawingml/2006/main" xmlns:r="http://schemas.openxmlformats.org/officeDocument/2006/relationships" xmlns:p="http://schemas.openxmlformats.org/presentationml/2006/main">
   <p:cSld>
     <p:spTree>
@@ -7948,6 +9902,9 @@
         </p:txBody>
       </p:sp>
     </p:spTree>
+    <p:custDataLst>
+      <p:tags r:id="rId1"/>
+    </p:custDataLst>
     <p:extLst>
       <p:ext uri="{BB962C8B-B14F-4D97-AF65-F5344CB8AC3E}">
         <p14:creationId xmlns:p14="http://schemas.microsoft.com/office/powerpoint/2010/main" val="688670217"/>
@@ -7960,7 +9917,7 @@
 </p:sld>
 </file>
 
-<file path=ppt/slides/slide14.xml><?xml version="1.0" encoding="utf-8"?>
+<file path=ppt/slides/slide15.xml><?xml version="1.0" encoding="utf-8"?>
 <p:sld xmlns:a="http://schemas.openxmlformats.org/drawingml/2006/main" xmlns:r="http://schemas.openxmlformats.org/officeDocument/2006/relationships" xmlns:p="http://schemas.openxmlformats.org/presentationml/2006/main">
   <p:cSld>
     <p:spTree>
@@ -8000,8 +9957,13 @@
           <a:p>
             <a:r>
               <a:rPr lang="ru-RU" dirty="0"/>
-              <a:t>Агрегация</a:t>
-            </a:r>
+              <a:t>Агрегация (</a:t>
+            </a:r>
+            <a:r>
+              <a:rPr lang="en-US" dirty="0"/>
+              <a:t>Aggregation)</a:t>
+            </a:r>
+            <a:endParaRPr lang="ru-RU" dirty="0"/>
           </a:p>
         </p:txBody>
       </p:sp>
@@ -8024,68 +9986,134 @@
         <p:spPr/>
         <p:txBody>
           <a:bodyPr>
-            <a:normAutofit fontScale="92500" lnSpcReduction="20000"/>
+            <a:normAutofit fontScale="62500" lnSpcReduction="20000"/>
           </a:bodyPr>
           <a:lstStyle/>
           <a:p>
             <a:r>
               <a:rPr lang="ru-RU" dirty="0"/>
-              <a:t>Отношение вида «Часть – Целое»</a:t>
-            </a:r>
-          </a:p>
-          <a:p>
-            <a:r>
-              <a:rPr lang="ru-RU" dirty="0"/>
-              <a:t>Часть является частью Целого</a:t>
-            </a:r>
-          </a:p>
-          <a:p>
-            <a:r>
-              <a:rPr lang="ru-RU" dirty="0"/>
-              <a:t>Часть в один и тот же момент может принадлежать нескольким составным объектам</a:t>
-            </a:r>
-          </a:p>
-          <a:p>
-            <a:r>
-              <a:rPr lang="ru-RU" dirty="0"/>
-              <a:t>Целое не управляет своими частями</a:t>
-            </a:r>
+              <a:t>Связь «Часть – Целое» без полного владения</a:t>
+            </a:r>
+          </a:p>
+          <a:p>
+            <a:r>
+              <a:rPr lang="ru-RU" b="1" dirty="0"/>
+              <a:t>Ключевые свойства:</a:t>
+            </a:r>
+            <a:endParaRPr lang="ru-RU" dirty="0"/>
           </a:p>
           <a:p>
             <a:pPr lvl="1"/>
             <a:r>
               <a:rPr lang="ru-RU" dirty="0"/>
-              <a:t>При удалении Целого Часть продолжает существовать</a:t>
-            </a:r>
-          </a:p>
-          <a:p>
-            <a:r>
-              <a:rPr lang="ru-RU" dirty="0"/>
-              <a:t>Часть не знает о существовании Целого</a:t>
-            </a:r>
-          </a:p>
-          <a:p>
-            <a:r>
-              <a:rPr lang="ru-RU" dirty="0"/>
-              <a:t>Транзитивность</a:t>
+              <a:t>Часть входит в состав целого </a:t>
             </a:r>
           </a:p>
           <a:p>
             <a:pPr lvl="1"/>
             <a:r>
               <a:rPr lang="ru-RU" dirty="0"/>
-              <a:t>Ни один из объектов не является прямой или косвенной частью себя</a:t>
-            </a:r>
-          </a:p>
-          <a:p>
-            <a:r>
-              <a:rPr lang="ru-RU" dirty="0"/>
-              <a:t>Класс-агрегат хранит ссылки или указатели на объекты, созданные за пределами класса</a:t>
+              <a:t>Нет полного владения </a:t>
+            </a:r>
+          </a:p>
+          <a:p>
+            <a:pPr lvl="1"/>
+            <a:r>
+              <a:rPr lang="ru-RU" dirty="0"/>
+              <a:t>Независимые жизненные циклы </a:t>
+            </a:r>
+          </a:p>
+          <a:p>
+            <a:pPr lvl="1"/>
+            <a:r>
+              <a:rPr lang="ru-RU" dirty="0"/>
+              <a:t>Часть может принадлежать нескольким объектам </a:t>
+            </a:r>
+          </a:p>
+          <a:p>
+            <a:r>
+              <a:rPr lang="ru-RU" b="1" dirty="0"/>
+              <a:t>Поведение:</a:t>
+            </a:r>
+            <a:endParaRPr lang="ru-RU" dirty="0"/>
+          </a:p>
+          <a:p>
+            <a:pPr lvl="1"/>
+            <a:r>
+              <a:rPr lang="ru-RU" dirty="0"/>
+              <a:t>Удаление целого не удаляет часть </a:t>
+            </a:r>
+          </a:p>
+          <a:p>
+            <a:pPr lvl="1"/>
+            <a:r>
+              <a:rPr lang="ru-RU" dirty="0"/>
+              <a:t>Часть существует отдельно </a:t>
+            </a:r>
+          </a:p>
+          <a:p>
+            <a:pPr lvl="1"/>
+            <a:r>
+              <a:rPr lang="ru-RU" dirty="0"/>
+              <a:t>Часть не знает о целом </a:t>
+            </a:r>
+          </a:p>
+          <a:p>
+            <a:r>
+              <a:rPr lang="ru-RU" b="1" dirty="0"/>
+              <a:t>Ограничение:</a:t>
+            </a:r>
+            <a:endParaRPr lang="ru-RU" dirty="0"/>
+          </a:p>
+          <a:p>
+            <a:pPr lvl="1"/>
+            <a:r>
+              <a:rPr lang="ru-RU" dirty="0"/>
+              <a:t>Нет циклов (объект не может содержать сам себя) </a:t>
+            </a:r>
+          </a:p>
+          <a:p>
+            <a:r>
+              <a:rPr lang="ru-RU" b="1" dirty="0"/>
+              <a:t>Реализация в C++:</a:t>
+            </a:r>
+            <a:endParaRPr lang="ru-RU" dirty="0"/>
+          </a:p>
+          <a:p>
+            <a:pPr lvl="1"/>
+            <a:r>
+              <a:rPr lang="ru-RU" dirty="0"/>
+              <a:t>указатели (*) </a:t>
+            </a:r>
+          </a:p>
+          <a:p>
+            <a:pPr lvl="1"/>
+            <a:r>
+              <a:rPr lang="ru-RU" dirty="0"/>
+              <a:t>ссылки (&amp;) </a:t>
+            </a:r>
+          </a:p>
+          <a:p>
+            <a:pPr lvl="1"/>
+            <a:r>
+              <a:rPr lang="en-US" dirty="0" err="1"/>
+              <a:t>shared_ptr</a:t>
+            </a:r>
+            <a:endParaRPr lang="ru-RU" dirty="0"/>
+          </a:p>
+          <a:p>
+            <a:pPr lvl="1"/>
+            <a:r>
+              <a:rPr lang="ru-RU" dirty="0"/>
+              <a:t>объекты создаются вне класса</a:t>
             </a:r>
           </a:p>
         </p:txBody>
       </p:sp>
     </p:spTree>
+    <p:custDataLst>
+      <p:tags r:id="rId1"/>
+    </p:custDataLst>
     <p:extLst>
       <p:ext uri="{BB962C8B-B14F-4D97-AF65-F5344CB8AC3E}">
         <p14:creationId xmlns:p14="http://schemas.microsoft.com/office/powerpoint/2010/main" val="2248682480"/>
@@ -8164,458 +10192,6 @@
                       </p:childTnLst>
                     </p:cTn>
                   </p:par>
-                  <p:par>
-                    <p:cTn id="8" fill="hold">
-                      <p:stCondLst>
-                        <p:cond delay="indefinite"/>
-                      </p:stCondLst>
-                      <p:childTnLst>
-                        <p:par>
-                          <p:cTn id="9" fill="hold">
-                            <p:stCondLst>
-                              <p:cond delay="0"/>
-                            </p:stCondLst>
-                            <p:childTnLst>
-                              <p:par>
-                                <p:cTn id="10" presetID="10" presetClass="entr" presetSubtype="0" fill="hold" grpId="0" nodeType="clickEffect">
-                                  <p:stCondLst>
-                                    <p:cond delay="0"/>
-                                  </p:stCondLst>
-                                  <p:childTnLst>
-                                    <p:set>
-                                      <p:cBhvr>
-                                        <p:cTn id="11" dur="1" fill="hold">
-                                          <p:stCondLst>
-                                            <p:cond delay="0"/>
-                                          </p:stCondLst>
-                                        </p:cTn>
-                                        <p:tgtEl>
-                                          <p:spTgt spid="5">
-                                            <p:txEl>
-                                              <p:pRg st="1" end="1"/>
-                                            </p:txEl>
-                                          </p:spTgt>
-                                        </p:tgtEl>
-                                        <p:attrNameLst>
-                                          <p:attrName>style.visibility</p:attrName>
-                                        </p:attrNameLst>
-                                      </p:cBhvr>
-                                      <p:to>
-                                        <p:strVal val="visible"/>
-                                      </p:to>
-                                    </p:set>
-                                    <p:animEffect transition="in" filter="fade">
-                                      <p:cBhvr>
-                                        <p:cTn id="12" dur="500"/>
-                                        <p:tgtEl>
-                                          <p:spTgt spid="5">
-                                            <p:txEl>
-                                              <p:pRg st="1" end="1"/>
-                                            </p:txEl>
-                                          </p:spTgt>
-                                        </p:tgtEl>
-                                      </p:cBhvr>
-                                    </p:animEffect>
-                                  </p:childTnLst>
-                                </p:cTn>
-                              </p:par>
-                            </p:childTnLst>
-                          </p:cTn>
-                        </p:par>
-                      </p:childTnLst>
-                    </p:cTn>
-                  </p:par>
-                  <p:par>
-                    <p:cTn id="13" fill="hold">
-                      <p:stCondLst>
-                        <p:cond delay="indefinite"/>
-                      </p:stCondLst>
-                      <p:childTnLst>
-                        <p:par>
-                          <p:cTn id="14" fill="hold">
-                            <p:stCondLst>
-                              <p:cond delay="0"/>
-                            </p:stCondLst>
-                            <p:childTnLst>
-                              <p:par>
-                                <p:cTn id="15" presetID="10" presetClass="entr" presetSubtype="0" fill="hold" grpId="0" nodeType="clickEffect">
-                                  <p:stCondLst>
-                                    <p:cond delay="0"/>
-                                  </p:stCondLst>
-                                  <p:childTnLst>
-                                    <p:set>
-                                      <p:cBhvr>
-                                        <p:cTn id="16" dur="1" fill="hold">
-                                          <p:stCondLst>
-                                            <p:cond delay="0"/>
-                                          </p:stCondLst>
-                                        </p:cTn>
-                                        <p:tgtEl>
-                                          <p:spTgt spid="5">
-                                            <p:txEl>
-                                              <p:pRg st="2" end="2"/>
-                                            </p:txEl>
-                                          </p:spTgt>
-                                        </p:tgtEl>
-                                        <p:attrNameLst>
-                                          <p:attrName>style.visibility</p:attrName>
-                                        </p:attrNameLst>
-                                      </p:cBhvr>
-                                      <p:to>
-                                        <p:strVal val="visible"/>
-                                      </p:to>
-                                    </p:set>
-                                    <p:animEffect transition="in" filter="fade">
-                                      <p:cBhvr>
-                                        <p:cTn id="17" dur="500"/>
-                                        <p:tgtEl>
-                                          <p:spTgt spid="5">
-                                            <p:txEl>
-                                              <p:pRg st="2" end="2"/>
-                                            </p:txEl>
-                                          </p:spTgt>
-                                        </p:tgtEl>
-                                      </p:cBhvr>
-                                    </p:animEffect>
-                                  </p:childTnLst>
-                                </p:cTn>
-                              </p:par>
-                            </p:childTnLst>
-                          </p:cTn>
-                        </p:par>
-                      </p:childTnLst>
-                    </p:cTn>
-                  </p:par>
-                  <p:par>
-                    <p:cTn id="18" fill="hold">
-                      <p:stCondLst>
-                        <p:cond delay="indefinite"/>
-                      </p:stCondLst>
-                      <p:childTnLst>
-                        <p:par>
-                          <p:cTn id="19" fill="hold">
-                            <p:stCondLst>
-                              <p:cond delay="0"/>
-                            </p:stCondLst>
-                            <p:childTnLst>
-                              <p:par>
-                                <p:cTn id="20" presetID="10" presetClass="entr" presetSubtype="0" fill="hold" grpId="0" nodeType="clickEffect">
-                                  <p:stCondLst>
-                                    <p:cond delay="0"/>
-                                  </p:stCondLst>
-                                  <p:childTnLst>
-                                    <p:set>
-                                      <p:cBhvr>
-                                        <p:cTn id="21" dur="1" fill="hold">
-                                          <p:stCondLst>
-                                            <p:cond delay="0"/>
-                                          </p:stCondLst>
-                                        </p:cTn>
-                                        <p:tgtEl>
-                                          <p:spTgt spid="5">
-                                            <p:txEl>
-                                              <p:pRg st="3" end="3"/>
-                                            </p:txEl>
-                                          </p:spTgt>
-                                        </p:tgtEl>
-                                        <p:attrNameLst>
-                                          <p:attrName>style.visibility</p:attrName>
-                                        </p:attrNameLst>
-                                      </p:cBhvr>
-                                      <p:to>
-                                        <p:strVal val="visible"/>
-                                      </p:to>
-                                    </p:set>
-                                    <p:animEffect transition="in" filter="fade">
-                                      <p:cBhvr>
-                                        <p:cTn id="22" dur="500"/>
-                                        <p:tgtEl>
-                                          <p:spTgt spid="5">
-                                            <p:txEl>
-                                              <p:pRg st="3" end="3"/>
-                                            </p:txEl>
-                                          </p:spTgt>
-                                        </p:tgtEl>
-                                      </p:cBhvr>
-                                    </p:animEffect>
-                                  </p:childTnLst>
-                                </p:cTn>
-                              </p:par>
-                              <p:par>
-                                <p:cTn id="23" presetID="10" presetClass="entr" presetSubtype="0" fill="hold" grpId="0" nodeType="withEffect">
-                                  <p:stCondLst>
-                                    <p:cond delay="0"/>
-                                  </p:stCondLst>
-                                  <p:childTnLst>
-                                    <p:set>
-                                      <p:cBhvr>
-                                        <p:cTn id="24" dur="1" fill="hold">
-                                          <p:stCondLst>
-                                            <p:cond delay="0"/>
-                                          </p:stCondLst>
-                                        </p:cTn>
-                                        <p:tgtEl>
-                                          <p:spTgt spid="5">
-                                            <p:txEl>
-                                              <p:pRg st="4" end="4"/>
-                                            </p:txEl>
-                                          </p:spTgt>
-                                        </p:tgtEl>
-                                        <p:attrNameLst>
-                                          <p:attrName>style.visibility</p:attrName>
-                                        </p:attrNameLst>
-                                      </p:cBhvr>
-                                      <p:to>
-                                        <p:strVal val="visible"/>
-                                      </p:to>
-                                    </p:set>
-                                    <p:animEffect transition="in" filter="fade">
-                                      <p:cBhvr>
-                                        <p:cTn id="25" dur="500"/>
-                                        <p:tgtEl>
-                                          <p:spTgt spid="5">
-                                            <p:txEl>
-                                              <p:pRg st="4" end="4"/>
-                                            </p:txEl>
-                                          </p:spTgt>
-                                        </p:tgtEl>
-                                      </p:cBhvr>
-                                    </p:animEffect>
-                                  </p:childTnLst>
-                                </p:cTn>
-                              </p:par>
-                            </p:childTnLst>
-                          </p:cTn>
-                        </p:par>
-                      </p:childTnLst>
-                    </p:cTn>
-                  </p:par>
-                  <p:par>
-                    <p:cTn id="26" fill="hold">
-                      <p:stCondLst>
-                        <p:cond delay="indefinite"/>
-                      </p:stCondLst>
-                      <p:childTnLst>
-                        <p:par>
-                          <p:cTn id="27" fill="hold">
-                            <p:stCondLst>
-                              <p:cond delay="0"/>
-                            </p:stCondLst>
-                            <p:childTnLst>
-                              <p:par>
-                                <p:cTn id="28" presetID="10" presetClass="entr" presetSubtype="0" fill="hold" grpId="0" nodeType="clickEffect">
-                                  <p:stCondLst>
-                                    <p:cond delay="0"/>
-                                  </p:stCondLst>
-                                  <p:childTnLst>
-                                    <p:set>
-                                      <p:cBhvr>
-                                        <p:cTn id="29" dur="1" fill="hold">
-                                          <p:stCondLst>
-                                            <p:cond delay="0"/>
-                                          </p:stCondLst>
-                                        </p:cTn>
-                                        <p:tgtEl>
-                                          <p:spTgt spid="5">
-                                            <p:txEl>
-                                              <p:pRg st="5" end="5"/>
-                                            </p:txEl>
-                                          </p:spTgt>
-                                        </p:tgtEl>
-                                        <p:attrNameLst>
-                                          <p:attrName>style.visibility</p:attrName>
-                                        </p:attrNameLst>
-                                      </p:cBhvr>
-                                      <p:to>
-                                        <p:strVal val="visible"/>
-                                      </p:to>
-                                    </p:set>
-                                    <p:animEffect transition="in" filter="fade">
-                                      <p:cBhvr>
-                                        <p:cTn id="30" dur="500"/>
-                                        <p:tgtEl>
-                                          <p:spTgt spid="5">
-                                            <p:txEl>
-                                              <p:pRg st="5" end="5"/>
-                                            </p:txEl>
-                                          </p:spTgt>
-                                        </p:tgtEl>
-                                      </p:cBhvr>
-                                    </p:animEffect>
-                                  </p:childTnLst>
-                                </p:cTn>
-                              </p:par>
-                            </p:childTnLst>
-                          </p:cTn>
-                        </p:par>
-                      </p:childTnLst>
-                    </p:cTn>
-                  </p:par>
-                  <p:par>
-                    <p:cTn id="31" fill="hold">
-                      <p:stCondLst>
-                        <p:cond delay="indefinite"/>
-                      </p:stCondLst>
-                      <p:childTnLst>
-                        <p:par>
-                          <p:cTn id="32" fill="hold">
-                            <p:stCondLst>
-                              <p:cond delay="0"/>
-                            </p:stCondLst>
-                            <p:childTnLst>
-                              <p:par>
-                                <p:cTn id="33" presetID="10" presetClass="entr" presetSubtype="0" fill="hold" grpId="0" nodeType="clickEffect">
-                                  <p:stCondLst>
-                                    <p:cond delay="0"/>
-                                  </p:stCondLst>
-                                  <p:childTnLst>
-                                    <p:set>
-                                      <p:cBhvr>
-                                        <p:cTn id="34" dur="1" fill="hold">
-                                          <p:stCondLst>
-                                            <p:cond delay="0"/>
-                                          </p:stCondLst>
-                                        </p:cTn>
-                                        <p:tgtEl>
-                                          <p:spTgt spid="5">
-                                            <p:txEl>
-                                              <p:pRg st="6" end="6"/>
-                                            </p:txEl>
-                                          </p:spTgt>
-                                        </p:tgtEl>
-                                        <p:attrNameLst>
-                                          <p:attrName>style.visibility</p:attrName>
-                                        </p:attrNameLst>
-                                      </p:cBhvr>
-                                      <p:to>
-                                        <p:strVal val="visible"/>
-                                      </p:to>
-                                    </p:set>
-                                    <p:animEffect transition="in" filter="fade">
-                                      <p:cBhvr>
-                                        <p:cTn id="35" dur="500"/>
-                                        <p:tgtEl>
-                                          <p:spTgt spid="5">
-                                            <p:txEl>
-                                              <p:pRg st="6" end="6"/>
-                                            </p:txEl>
-                                          </p:spTgt>
-                                        </p:tgtEl>
-                                      </p:cBhvr>
-                                    </p:animEffect>
-                                  </p:childTnLst>
-                                </p:cTn>
-                              </p:par>
-                              <p:par>
-                                <p:cTn id="36" presetID="10" presetClass="entr" presetSubtype="0" fill="hold" grpId="0" nodeType="withEffect">
-                                  <p:stCondLst>
-                                    <p:cond delay="0"/>
-                                  </p:stCondLst>
-                                  <p:childTnLst>
-                                    <p:set>
-                                      <p:cBhvr>
-                                        <p:cTn id="37" dur="1" fill="hold">
-                                          <p:stCondLst>
-                                            <p:cond delay="0"/>
-                                          </p:stCondLst>
-                                        </p:cTn>
-                                        <p:tgtEl>
-                                          <p:spTgt spid="5">
-                                            <p:txEl>
-                                              <p:pRg st="7" end="7"/>
-                                            </p:txEl>
-                                          </p:spTgt>
-                                        </p:tgtEl>
-                                        <p:attrNameLst>
-                                          <p:attrName>style.visibility</p:attrName>
-                                        </p:attrNameLst>
-                                      </p:cBhvr>
-                                      <p:to>
-                                        <p:strVal val="visible"/>
-                                      </p:to>
-                                    </p:set>
-                                    <p:animEffect transition="in" filter="fade">
-                                      <p:cBhvr>
-                                        <p:cTn id="38" dur="500"/>
-                                        <p:tgtEl>
-                                          <p:spTgt spid="5">
-                                            <p:txEl>
-                                              <p:pRg st="7" end="7"/>
-                                            </p:txEl>
-                                          </p:spTgt>
-                                        </p:tgtEl>
-                                      </p:cBhvr>
-                                    </p:animEffect>
-                                  </p:childTnLst>
-                                </p:cTn>
-                              </p:par>
-                            </p:childTnLst>
-                          </p:cTn>
-                        </p:par>
-                      </p:childTnLst>
-                    </p:cTn>
-                  </p:par>
-                  <p:par>
-                    <p:cTn id="39" fill="hold">
-                      <p:stCondLst>
-                        <p:cond delay="indefinite"/>
-                      </p:stCondLst>
-                      <p:childTnLst>
-                        <p:par>
-                          <p:cTn id="40" fill="hold">
-                            <p:stCondLst>
-                              <p:cond delay="0"/>
-                            </p:stCondLst>
-                            <p:childTnLst>
-                              <p:par>
-                                <p:cTn id="41" presetID="10" presetClass="entr" presetSubtype="0" fill="hold" grpId="0" nodeType="clickEffect">
-                                  <p:stCondLst>
-                                    <p:cond delay="0"/>
-                                  </p:stCondLst>
-                                  <p:childTnLst>
-                                    <p:set>
-                                      <p:cBhvr>
-                                        <p:cTn id="42" dur="1" fill="hold">
-                                          <p:stCondLst>
-                                            <p:cond delay="0"/>
-                                          </p:stCondLst>
-                                        </p:cTn>
-                                        <p:tgtEl>
-                                          <p:spTgt spid="5">
-                                            <p:txEl>
-                                              <p:pRg st="8" end="8"/>
-                                            </p:txEl>
-                                          </p:spTgt>
-                                        </p:tgtEl>
-                                        <p:attrNameLst>
-                                          <p:attrName>style.visibility</p:attrName>
-                                        </p:attrNameLst>
-                                      </p:cBhvr>
-                                      <p:to>
-                                        <p:strVal val="visible"/>
-                                      </p:to>
-                                    </p:set>
-                                    <p:animEffect transition="in" filter="fade">
-                                      <p:cBhvr>
-                                        <p:cTn id="43" dur="500"/>
-                                        <p:tgtEl>
-                                          <p:spTgt spid="5">
-                                            <p:txEl>
-                                              <p:pRg st="8" end="8"/>
-                                            </p:txEl>
-                                          </p:spTgt>
-                                        </p:tgtEl>
-                                      </p:cBhvr>
-                                    </p:animEffect>
-                                  </p:childTnLst>
-                                </p:cTn>
-                              </p:par>
-                            </p:childTnLst>
-                          </p:cTn>
-                        </p:par>
-                      </p:childTnLst>
-                    </p:cTn>
-                  </p:par>
                 </p:childTnLst>
               </p:cTn>
               <p:prevCondLst>
@@ -8644,7 +10220,7 @@
 </p:sld>
 </file>
 
-<file path=ppt/slides/slide15.xml><?xml version="1.0" encoding="utf-8"?>
+<file path=ppt/slides/slide16.xml><?xml version="1.0" encoding="utf-8"?>
 <p:sld xmlns:a="http://schemas.openxmlformats.org/drawingml/2006/main" xmlns:r="http://schemas.openxmlformats.org/officeDocument/2006/relationships" xmlns:p="http://schemas.openxmlformats.org/presentationml/2006/main">
   <p:cSld>
     <p:spTree>
@@ -9284,6 +10860,9 @@
         </p:txBody>
       </p:sp>
     </p:spTree>
+    <p:custDataLst>
+      <p:tags r:id="rId1"/>
+    </p:custDataLst>
     <p:extLst>
       <p:ext uri="{BB962C8B-B14F-4D97-AF65-F5344CB8AC3E}">
         <p14:creationId xmlns:p14="http://schemas.microsoft.com/office/powerpoint/2010/main" val="3394195629"/>
@@ -9296,7 +10875,7 @@
 </p:sld>
 </file>
 
-<file path=ppt/slides/slide16.xml><?xml version="1.0" encoding="utf-8"?>
+<file path=ppt/slides/slide17.xml><?xml version="1.0" encoding="utf-8"?>
 <p:sld xmlns:a="http://schemas.openxmlformats.org/drawingml/2006/main" xmlns:r="http://schemas.openxmlformats.org/officeDocument/2006/relationships" xmlns:p="http://schemas.openxmlformats.org/presentationml/2006/main">
   <p:cSld>
     <p:spTree>
@@ -9356,7 +10935,7 @@
           <p:nvPr/>
         </p:nvPicPr>
         <p:blipFill>
-          <a:blip r:embed="rId3" cstate="print">
+          <a:blip r:embed="rId4" cstate="print">
             <a:extLst>
               <a:ext uri="{28A0092B-C50C-407E-A947-70E740481C1C}">
                 <a14:useLocalDpi xmlns:a14="http://schemas.microsoft.com/office/drawing/2010/main" val="0"/>
@@ -9377,6 +10956,9 @@
         </p:spPr>
       </p:pic>
     </p:spTree>
+    <p:custDataLst>
+      <p:tags r:id="rId1"/>
+    </p:custDataLst>
     <p:extLst>
       <p:ext uri="{BB962C8B-B14F-4D97-AF65-F5344CB8AC3E}">
         <p14:creationId xmlns:p14="http://schemas.microsoft.com/office/powerpoint/2010/main" val="3742619390"/>
@@ -9389,7 +10971,7 @@
 </p:sld>
 </file>
 
-<file path=ppt/slides/slide17.xml><?xml version="1.0" encoding="utf-8"?>
+<file path=ppt/slides/slide18.xml><?xml version="1.0" encoding="utf-8"?>
 <p:sld xmlns:a="http://schemas.openxmlformats.org/drawingml/2006/main" xmlns:r="http://schemas.openxmlformats.org/officeDocument/2006/relationships" xmlns:p="http://schemas.openxmlformats.org/presentationml/2006/main">
   <p:cSld>
     <p:spTree>
@@ -9449,7 +11031,7 @@
           <p:nvPr/>
         </p:nvPicPr>
         <p:blipFill>
-          <a:blip r:embed="rId2">
+          <a:blip r:embed="rId4">
             <a:extLst>
               <a:ext uri="{28A0092B-C50C-407E-A947-70E740481C1C}">
                 <a14:useLocalDpi xmlns:a14="http://schemas.microsoft.com/office/drawing/2010/main" val="0"/>
@@ -9480,6 +11062,9 @@
         </p:spPr>
       </p:pic>
     </p:spTree>
+    <p:custDataLst>
+      <p:tags r:id="rId1"/>
+    </p:custDataLst>
     <p:extLst>
       <p:ext uri="{BB962C8B-B14F-4D97-AF65-F5344CB8AC3E}">
         <p14:creationId xmlns:p14="http://schemas.microsoft.com/office/powerpoint/2010/main" val="1537544543"/>
@@ -9492,7 +11077,7 @@
 </p:sld>
 </file>
 
-<file path=ppt/slides/slide18.xml><?xml version="1.0" encoding="utf-8"?>
+<file path=ppt/slides/slide19.xml><?xml version="1.0" encoding="utf-8"?>
 <p:sld xmlns:a="http://schemas.openxmlformats.org/drawingml/2006/main" xmlns:r="http://schemas.openxmlformats.org/officeDocument/2006/relationships" xmlns:p="http://schemas.openxmlformats.org/presentationml/2006/main">
   <p:cSld>
     <p:spTree>
@@ -9568,6 +11153,9 @@
         </p:txBody>
       </p:sp>
     </p:spTree>
+    <p:custDataLst>
+      <p:tags r:id="rId1"/>
+    </p:custDataLst>
     <p:extLst>
       <p:ext uri="{BB962C8B-B14F-4D97-AF65-F5344CB8AC3E}">
         <p14:creationId xmlns:p14="http://schemas.microsoft.com/office/powerpoint/2010/main" val="3571331919"/>
@@ -9580,7 +11168,114 @@
 </p:sld>
 </file>
 
-<file path=ppt/slides/slide19.xml><?xml version="1.0" encoding="utf-8"?>
+<file path=ppt/slides/slide2.xml><?xml version="1.0" encoding="utf-8"?>
+<p:sld xmlns:a="http://schemas.openxmlformats.org/drawingml/2006/main" xmlns:r="http://schemas.openxmlformats.org/officeDocument/2006/relationships" xmlns:p="http://schemas.openxmlformats.org/presentationml/2006/main">
+  <p:cSld>
+    <p:spTree>
+      <p:nvGrpSpPr>
+        <p:cNvPr id="1" name=""/>
+        <p:cNvGrpSpPr/>
+        <p:nvPr/>
+      </p:nvGrpSpPr>
+      <p:grpSpPr>
+        <a:xfrm>
+          <a:off x="0" y="0"/>
+          <a:ext cx="0" cy="0"/>
+          <a:chOff x="0" y="0"/>
+          <a:chExt cx="0" cy="0"/>
+        </a:xfrm>
+      </p:grpSpPr>
+      <p:sp>
+        <p:nvSpPr>
+          <p:cNvPr id="2" name="Заголовок 1">
+            <a:extLst>
+              <a:ext uri="{FF2B5EF4-FFF2-40B4-BE49-F238E27FC236}">
+                <a16:creationId xmlns:a16="http://schemas.microsoft.com/office/drawing/2014/main" id="{4339A0ED-8DD3-4A0D-BE41-177DCF99B76F}"/>
+              </a:ext>
+            </a:extLst>
+          </p:cNvPr>
+          <p:cNvSpPr>
+            <a:spLocks noGrp="1"/>
+          </p:cNvSpPr>
+          <p:nvPr>
+            <p:ph type="title"/>
+          </p:nvPr>
+        </p:nvSpPr>
+        <p:spPr/>
+        <p:txBody>
+          <a:bodyPr/>
+          <a:lstStyle/>
+          <a:p>
+            <a:r>
+              <a:rPr lang="ru-RU" dirty="0"/>
+              <a:t>Визуализация архитектуры</a:t>
+            </a:r>
+          </a:p>
+        </p:txBody>
+      </p:sp>
+      <p:sp>
+        <p:nvSpPr>
+          <p:cNvPr id="3" name="Объект 2">
+            <a:extLst>
+              <a:ext uri="{FF2B5EF4-FFF2-40B4-BE49-F238E27FC236}">
+                <a16:creationId xmlns:a16="http://schemas.microsoft.com/office/drawing/2014/main" id="{6B699399-666B-4850-8464-3DF2B61BBE3F}"/>
+              </a:ext>
+            </a:extLst>
+          </p:cNvPr>
+          <p:cNvSpPr>
+            <a:spLocks noGrp="1"/>
+          </p:cNvSpPr>
+          <p:nvPr>
+            <p:ph idx="1"/>
+          </p:nvPr>
+        </p:nvSpPr>
+        <p:spPr/>
+        <p:txBody>
+          <a:bodyPr/>
+          <a:lstStyle/>
+          <a:p>
+            <a:r>
+              <a:rPr lang="ru-RU" dirty="0"/>
+              <a:t>Классы программы создаются и взаимодействуют по определённым правилам</a:t>
+            </a:r>
+          </a:p>
+          <a:p>
+            <a:r>
+              <a:rPr lang="ru-RU" dirty="0"/>
+              <a:t>Знание этих правил позволяет создавать программу не методом проб и ошибок, а проектировать её ещё до написания кода</a:t>
+            </a:r>
+          </a:p>
+          <a:p>
+            <a:r>
+              <a:rPr lang="ru-RU" dirty="0"/>
+              <a:t>Можно обсудить архитектуру и распределить работу над программы между программистами</a:t>
+            </a:r>
+          </a:p>
+          <a:p>
+            <a:r>
+              <a:rPr lang="ru-RU" dirty="0"/>
+              <a:t>Можно распределить работу над различными частями программы</a:t>
+            </a:r>
+          </a:p>
+        </p:txBody>
+      </p:sp>
+    </p:spTree>
+    <p:custDataLst>
+      <p:tags r:id="rId1"/>
+    </p:custDataLst>
+    <p:extLst>
+      <p:ext uri="{BB962C8B-B14F-4D97-AF65-F5344CB8AC3E}">
+        <p14:creationId xmlns:p14="http://schemas.microsoft.com/office/powerpoint/2010/main" val="4292201402"/>
+      </p:ext>
+    </p:extLst>
+  </p:cSld>
+  <p:clrMapOvr>
+    <a:masterClrMapping/>
+  </p:clrMapOvr>
+</p:sld>
+</file>
+
+<file path=ppt/slides/slide20.xml><?xml version="1.0" encoding="utf-8"?>
 <p:sld xmlns:a="http://schemas.openxmlformats.org/drawingml/2006/main" xmlns:r="http://schemas.openxmlformats.org/officeDocument/2006/relationships" xmlns:p="http://schemas.openxmlformats.org/presentationml/2006/main">
   <p:cSld>
     <p:spTree>
@@ -9620,8 +11315,13 @@
           <a:p>
             <a:r>
               <a:rPr lang="ru-RU" dirty="0"/>
-              <a:t>Особенности</a:t>
-            </a:r>
+              <a:t>Зависимость </a:t>
+            </a:r>
+            <a:r>
+              <a:rPr lang="en-US" dirty="0"/>
+              <a:t>(Dependency)</a:t>
+            </a:r>
+            <a:endParaRPr lang="ru-RU" dirty="0"/>
           </a:p>
         </p:txBody>
       </p:sp>
@@ -9643,64 +11343,106 @@
         </p:nvSpPr>
         <p:spPr/>
         <p:txBody>
-          <a:bodyPr/>
+          <a:bodyPr>
+            <a:normAutofit fontScale="85000" lnSpcReduction="20000"/>
+          </a:bodyPr>
           <a:lstStyle/>
           <a:p>
             <a:r>
               <a:rPr lang="ru-RU" dirty="0"/>
-              <a:t>Отношение «Клиент – Поставщик», при котором изменения в Поставщике могут вызвать изменения в Клиенте (но не наоборот)</a:t>
-            </a:r>
-          </a:p>
-          <a:p>
-            <a:r>
-              <a:rPr lang="ru-RU" dirty="0"/>
-              <a:t>Возникает в следующих случаях:</a:t>
-            </a:r>
+              <a:t>Слабая кратковременная связь «клиент–поставщик»</a:t>
+            </a:r>
+          </a:p>
+          <a:p>
+            <a:r>
+              <a:rPr lang="ru-RU" b="1" dirty="0"/>
+              <a:t>Суть:</a:t>
+            </a:r>
+            <a:endParaRPr lang="ru-RU" dirty="0"/>
           </a:p>
           <a:p>
             <a:pPr lvl="1"/>
             <a:r>
               <a:rPr lang="ru-RU" dirty="0"/>
-              <a:t>Поставщик создаётся внутри метода Клиента</a:t>
+              <a:t>Клиент использует Поставщика </a:t>
             </a:r>
           </a:p>
           <a:p>
             <a:pPr lvl="1"/>
             <a:r>
               <a:rPr lang="ru-RU" dirty="0"/>
-              <a:t>Поставщик передаётся в метод Клиента, который вызывает его методы</a:t>
+              <a:t>Нет хранения ссылки/указателя </a:t>
             </a:r>
           </a:p>
           <a:p>
             <a:pPr lvl="1"/>
             <a:r>
               <a:rPr lang="ru-RU" dirty="0"/>
-              <a:t>Метод Клиента возвращает Поставщика</a:t>
-            </a:r>
-          </a:p>
-          <a:p>
-            <a:r>
-              <a:rPr lang="ru-RU" dirty="0"/>
-              <a:t>Поставщик ничего не знает про Клиента</a:t>
-            </a:r>
-          </a:p>
-          <a:p>
-            <a:r>
-              <a:rPr lang="ru-RU" dirty="0"/>
-              <a:t>Зависимость создаёт</a:t>
-            </a:r>
-            <a:r>
-              <a:rPr lang="en-US" dirty="0"/>
-              <a:t> </a:t>
-            </a:r>
-            <a:r>
-              <a:rPr lang="ru-RU" dirty="0"/>
-              <a:t>кратковременную связь между объектами (на время вызова метода)</a:t>
+              <a:t>Связь возникает только во время вызова метода </a:t>
+            </a:r>
+          </a:p>
+          <a:p>
+            <a:r>
+              <a:rPr lang="ru-RU" b="1" dirty="0"/>
+              <a:t>Когда возникает:</a:t>
+            </a:r>
+            <a:endParaRPr lang="ru-RU" dirty="0"/>
+          </a:p>
+          <a:p>
+            <a:pPr lvl="1"/>
+            <a:r>
+              <a:rPr lang="ru-RU" dirty="0"/>
+              <a:t>объект создаётся внутри метода </a:t>
+            </a:r>
+          </a:p>
+          <a:p>
+            <a:pPr lvl="1"/>
+            <a:r>
+              <a:rPr lang="ru-RU" dirty="0"/>
+              <a:t>объект передаётся в метод (параметр) </a:t>
+            </a:r>
+          </a:p>
+          <a:p>
+            <a:pPr lvl="1"/>
+            <a:r>
+              <a:rPr lang="ru-RU" dirty="0"/>
+              <a:t>объект возвращается из метода </a:t>
+            </a:r>
+          </a:p>
+          <a:p>
+            <a:r>
+              <a:rPr lang="ru-RU" b="1" dirty="0"/>
+              <a:t>Особенности:</a:t>
+            </a:r>
+            <a:endParaRPr lang="ru-RU" dirty="0"/>
+          </a:p>
+          <a:p>
+            <a:pPr lvl="1"/>
+            <a:r>
+              <a:rPr lang="ru-RU" dirty="0"/>
+              <a:t>Поставщик не знает о Клиенте </a:t>
+            </a:r>
+          </a:p>
+          <a:p>
+            <a:pPr lvl="1"/>
+            <a:r>
+              <a:rPr lang="ru-RU" dirty="0"/>
+              <a:t>Изменения в Поставщике могут влиять на Клиента </a:t>
+            </a:r>
+          </a:p>
+          <a:p>
+            <a:pPr lvl="1"/>
+            <a:r>
+              <a:rPr lang="ru-RU" dirty="0"/>
+              <a:t>Самая слабая форма связи</a:t>
             </a:r>
           </a:p>
         </p:txBody>
       </p:sp>
     </p:spTree>
+    <p:custDataLst>
+      <p:tags r:id="rId1"/>
+    </p:custDataLst>
     <p:extLst>
       <p:ext uri="{BB962C8B-B14F-4D97-AF65-F5344CB8AC3E}">
         <p14:creationId xmlns:p14="http://schemas.microsoft.com/office/powerpoint/2010/main" val="1400479843"/>
@@ -10024,33 +11766,15 @@
                                   </p:childTnLst>
                                 </p:cTn>
                               </p:par>
-                            </p:childTnLst>
-                          </p:cTn>
-                        </p:par>
-                      </p:childTnLst>
-                    </p:cTn>
-                  </p:par>
-                  <p:par>
-                    <p:cTn id="27" fill="hold">
-                      <p:stCondLst>
-                        <p:cond delay="indefinite"/>
-                      </p:stCondLst>
-                      <p:childTnLst>
-                        <p:par>
-                          <p:cTn id="28" fill="hold">
-                            <p:stCondLst>
-                              <p:cond delay="0"/>
-                            </p:stCondLst>
-                            <p:childTnLst>
                               <p:par>
-                                <p:cTn id="29" presetID="10" presetClass="entr" presetSubtype="0" fill="hold" grpId="0" nodeType="clickEffect">
+                                <p:cTn id="27" presetID="10" presetClass="entr" presetSubtype="0" fill="hold" grpId="0" nodeType="withEffect">
                                   <p:stCondLst>
                                     <p:cond delay="0"/>
                                   </p:stCondLst>
                                   <p:childTnLst>
                                     <p:set>
                                       <p:cBhvr>
-                                        <p:cTn id="30" dur="1" fill="hold">
+                                        <p:cTn id="28" dur="1" fill="hold">
                                           <p:stCondLst>
                                             <p:cond delay="0"/>
                                           </p:stCondLst>
@@ -10072,11 +11796,287 @@
                                     </p:set>
                                     <p:animEffect transition="in" filter="fade">
                                       <p:cBhvr>
-                                        <p:cTn id="31" dur="500"/>
+                                        <p:cTn id="29" dur="500"/>
                                         <p:tgtEl>
                                           <p:spTgt spid="5">
                                             <p:txEl>
                                               <p:pRg st="6" end="6"/>
+                                            </p:txEl>
+                                          </p:spTgt>
+                                        </p:tgtEl>
+                                      </p:cBhvr>
+                                    </p:animEffect>
+                                  </p:childTnLst>
+                                </p:cTn>
+                              </p:par>
+                              <p:par>
+                                <p:cTn id="30" presetID="10" presetClass="entr" presetSubtype="0" fill="hold" grpId="0" nodeType="withEffect">
+                                  <p:stCondLst>
+                                    <p:cond delay="0"/>
+                                  </p:stCondLst>
+                                  <p:childTnLst>
+                                    <p:set>
+                                      <p:cBhvr>
+                                        <p:cTn id="31" dur="1" fill="hold">
+                                          <p:stCondLst>
+                                            <p:cond delay="0"/>
+                                          </p:stCondLst>
+                                        </p:cTn>
+                                        <p:tgtEl>
+                                          <p:spTgt spid="5">
+                                            <p:txEl>
+                                              <p:pRg st="7" end="7"/>
+                                            </p:txEl>
+                                          </p:spTgt>
+                                        </p:tgtEl>
+                                        <p:attrNameLst>
+                                          <p:attrName>style.visibility</p:attrName>
+                                        </p:attrNameLst>
+                                      </p:cBhvr>
+                                      <p:to>
+                                        <p:strVal val="visible"/>
+                                      </p:to>
+                                    </p:set>
+                                    <p:animEffect transition="in" filter="fade">
+                                      <p:cBhvr>
+                                        <p:cTn id="32" dur="500"/>
+                                        <p:tgtEl>
+                                          <p:spTgt spid="5">
+                                            <p:txEl>
+                                              <p:pRg st="7" end="7"/>
+                                            </p:txEl>
+                                          </p:spTgt>
+                                        </p:tgtEl>
+                                      </p:cBhvr>
+                                    </p:animEffect>
+                                  </p:childTnLst>
+                                </p:cTn>
+                              </p:par>
+                              <p:par>
+                                <p:cTn id="33" presetID="10" presetClass="entr" presetSubtype="0" fill="hold" grpId="0" nodeType="withEffect">
+                                  <p:stCondLst>
+                                    <p:cond delay="0"/>
+                                  </p:stCondLst>
+                                  <p:childTnLst>
+                                    <p:set>
+                                      <p:cBhvr>
+                                        <p:cTn id="34" dur="1" fill="hold">
+                                          <p:stCondLst>
+                                            <p:cond delay="0"/>
+                                          </p:stCondLst>
+                                        </p:cTn>
+                                        <p:tgtEl>
+                                          <p:spTgt spid="5">
+                                            <p:txEl>
+                                              <p:pRg st="8" end="8"/>
+                                            </p:txEl>
+                                          </p:spTgt>
+                                        </p:tgtEl>
+                                        <p:attrNameLst>
+                                          <p:attrName>style.visibility</p:attrName>
+                                        </p:attrNameLst>
+                                      </p:cBhvr>
+                                      <p:to>
+                                        <p:strVal val="visible"/>
+                                      </p:to>
+                                    </p:set>
+                                    <p:animEffect transition="in" filter="fade">
+                                      <p:cBhvr>
+                                        <p:cTn id="35" dur="500"/>
+                                        <p:tgtEl>
+                                          <p:spTgt spid="5">
+                                            <p:txEl>
+                                              <p:pRg st="8" end="8"/>
+                                            </p:txEl>
+                                          </p:spTgt>
+                                        </p:tgtEl>
+                                      </p:cBhvr>
+                                    </p:animEffect>
+                                  </p:childTnLst>
+                                </p:cTn>
+                              </p:par>
+                            </p:childTnLst>
+                          </p:cTn>
+                        </p:par>
+                      </p:childTnLst>
+                    </p:cTn>
+                  </p:par>
+                  <p:par>
+                    <p:cTn id="36" fill="hold">
+                      <p:stCondLst>
+                        <p:cond delay="indefinite"/>
+                      </p:stCondLst>
+                      <p:childTnLst>
+                        <p:par>
+                          <p:cTn id="37" fill="hold">
+                            <p:stCondLst>
+                              <p:cond delay="0"/>
+                            </p:stCondLst>
+                            <p:childTnLst>
+                              <p:par>
+                                <p:cTn id="38" presetID="10" presetClass="entr" presetSubtype="0" fill="hold" grpId="0" nodeType="clickEffect">
+                                  <p:stCondLst>
+                                    <p:cond delay="0"/>
+                                  </p:stCondLst>
+                                  <p:childTnLst>
+                                    <p:set>
+                                      <p:cBhvr>
+                                        <p:cTn id="39" dur="1" fill="hold">
+                                          <p:stCondLst>
+                                            <p:cond delay="0"/>
+                                          </p:stCondLst>
+                                        </p:cTn>
+                                        <p:tgtEl>
+                                          <p:spTgt spid="5">
+                                            <p:txEl>
+                                              <p:pRg st="9" end="9"/>
+                                            </p:txEl>
+                                          </p:spTgt>
+                                        </p:tgtEl>
+                                        <p:attrNameLst>
+                                          <p:attrName>style.visibility</p:attrName>
+                                        </p:attrNameLst>
+                                      </p:cBhvr>
+                                      <p:to>
+                                        <p:strVal val="visible"/>
+                                      </p:to>
+                                    </p:set>
+                                    <p:animEffect transition="in" filter="fade">
+                                      <p:cBhvr>
+                                        <p:cTn id="40" dur="500"/>
+                                        <p:tgtEl>
+                                          <p:spTgt spid="5">
+                                            <p:txEl>
+                                              <p:pRg st="9" end="9"/>
+                                            </p:txEl>
+                                          </p:spTgt>
+                                        </p:tgtEl>
+                                      </p:cBhvr>
+                                    </p:animEffect>
+                                  </p:childTnLst>
+                                </p:cTn>
+                              </p:par>
+                              <p:par>
+                                <p:cTn id="41" presetID="10" presetClass="entr" presetSubtype="0" fill="hold" grpId="0" nodeType="withEffect">
+                                  <p:stCondLst>
+                                    <p:cond delay="0"/>
+                                  </p:stCondLst>
+                                  <p:childTnLst>
+                                    <p:set>
+                                      <p:cBhvr>
+                                        <p:cTn id="42" dur="1" fill="hold">
+                                          <p:stCondLst>
+                                            <p:cond delay="0"/>
+                                          </p:stCondLst>
+                                        </p:cTn>
+                                        <p:tgtEl>
+                                          <p:spTgt spid="5">
+                                            <p:txEl>
+                                              <p:pRg st="10" end="10"/>
+                                            </p:txEl>
+                                          </p:spTgt>
+                                        </p:tgtEl>
+                                        <p:attrNameLst>
+                                          <p:attrName>style.visibility</p:attrName>
+                                        </p:attrNameLst>
+                                      </p:cBhvr>
+                                      <p:to>
+                                        <p:strVal val="visible"/>
+                                      </p:to>
+                                    </p:set>
+                                    <p:animEffect transition="in" filter="fade">
+                                      <p:cBhvr>
+                                        <p:cTn id="43" dur="500"/>
+                                        <p:tgtEl>
+                                          <p:spTgt spid="5">
+                                            <p:txEl>
+                                              <p:pRg st="10" end="10"/>
+                                            </p:txEl>
+                                          </p:spTgt>
+                                        </p:tgtEl>
+                                      </p:cBhvr>
+                                    </p:animEffect>
+                                  </p:childTnLst>
+                                </p:cTn>
+                              </p:par>
+                              <p:par>
+                                <p:cTn id="44" presetID="10" presetClass="entr" presetSubtype="0" fill="hold" grpId="0" nodeType="withEffect">
+                                  <p:stCondLst>
+                                    <p:cond delay="0"/>
+                                  </p:stCondLst>
+                                  <p:childTnLst>
+                                    <p:set>
+                                      <p:cBhvr>
+                                        <p:cTn id="45" dur="1" fill="hold">
+                                          <p:stCondLst>
+                                            <p:cond delay="0"/>
+                                          </p:stCondLst>
+                                        </p:cTn>
+                                        <p:tgtEl>
+                                          <p:spTgt spid="5">
+                                            <p:txEl>
+                                              <p:pRg st="11" end="11"/>
+                                            </p:txEl>
+                                          </p:spTgt>
+                                        </p:tgtEl>
+                                        <p:attrNameLst>
+                                          <p:attrName>style.visibility</p:attrName>
+                                        </p:attrNameLst>
+                                      </p:cBhvr>
+                                      <p:to>
+                                        <p:strVal val="visible"/>
+                                      </p:to>
+                                    </p:set>
+                                    <p:animEffect transition="in" filter="fade">
+                                      <p:cBhvr>
+                                        <p:cTn id="46" dur="500"/>
+                                        <p:tgtEl>
+                                          <p:spTgt spid="5">
+                                            <p:txEl>
+                                              <p:pRg st="11" end="11"/>
+                                            </p:txEl>
+                                          </p:spTgt>
+                                        </p:tgtEl>
+                                      </p:cBhvr>
+                                    </p:animEffect>
+                                  </p:childTnLst>
+                                </p:cTn>
+                              </p:par>
+                              <p:par>
+                                <p:cTn id="47" presetID="10" presetClass="entr" presetSubtype="0" fill="hold" grpId="0" nodeType="withEffect">
+                                  <p:stCondLst>
+                                    <p:cond delay="0"/>
+                                  </p:stCondLst>
+                                  <p:childTnLst>
+                                    <p:set>
+                                      <p:cBhvr>
+                                        <p:cTn id="48" dur="1" fill="hold">
+                                          <p:stCondLst>
+                                            <p:cond delay="0"/>
+                                          </p:stCondLst>
+                                        </p:cTn>
+                                        <p:tgtEl>
+                                          <p:spTgt spid="5">
+                                            <p:txEl>
+                                              <p:pRg st="12" end="12"/>
+                                            </p:txEl>
+                                          </p:spTgt>
+                                        </p:tgtEl>
+                                        <p:attrNameLst>
+                                          <p:attrName>style.visibility</p:attrName>
+                                        </p:attrNameLst>
+                                      </p:cBhvr>
+                                      <p:to>
+                                        <p:strVal val="visible"/>
+                                      </p:to>
+                                    </p:set>
+                                    <p:animEffect transition="in" filter="fade">
+                                      <p:cBhvr>
+                                        <p:cTn id="49" dur="500"/>
+                                        <p:tgtEl>
+                                          <p:spTgt spid="5">
+                                            <p:txEl>
+                                              <p:pRg st="12" end="12"/>
                                             </p:txEl>
                                           </p:spTgt>
                                         </p:tgtEl>
@@ -10119,111 +12119,7 @@
 </p:sld>
 </file>
 
-<file path=ppt/slides/slide2.xml><?xml version="1.0" encoding="utf-8"?>
-<p:sld xmlns:a="http://schemas.openxmlformats.org/drawingml/2006/main" xmlns:r="http://schemas.openxmlformats.org/officeDocument/2006/relationships" xmlns:p="http://schemas.openxmlformats.org/presentationml/2006/main">
-  <p:cSld>
-    <p:spTree>
-      <p:nvGrpSpPr>
-        <p:cNvPr id="1" name=""/>
-        <p:cNvGrpSpPr/>
-        <p:nvPr/>
-      </p:nvGrpSpPr>
-      <p:grpSpPr>
-        <a:xfrm>
-          <a:off x="0" y="0"/>
-          <a:ext cx="0" cy="0"/>
-          <a:chOff x="0" y="0"/>
-          <a:chExt cx="0" cy="0"/>
-        </a:xfrm>
-      </p:grpSpPr>
-      <p:sp>
-        <p:nvSpPr>
-          <p:cNvPr id="2" name="Заголовок 1">
-            <a:extLst>
-              <a:ext uri="{FF2B5EF4-FFF2-40B4-BE49-F238E27FC236}">
-                <a16:creationId xmlns:a16="http://schemas.microsoft.com/office/drawing/2014/main" id="{4339A0ED-8DD3-4A0D-BE41-177DCF99B76F}"/>
-              </a:ext>
-            </a:extLst>
-          </p:cNvPr>
-          <p:cNvSpPr>
-            <a:spLocks noGrp="1"/>
-          </p:cNvSpPr>
-          <p:nvPr>
-            <p:ph type="title"/>
-          </p:nvPr>
-        </p:nvSpPr>
-        <p:spPr/>
-        <p:txBody>
-          <a:bodyPr/>
-          <a:lstStyle/>
-          <a:p>
-            <a:r>
-              <a:rPr lang="ru-RU" dirty="0"/>
-              <a:t>Визуализация архитектуры</a:t>
-            </a:r>
-          </a:p>
-        </p:txBody>
-      </p:sp>
-      <p:sp>
-        <p:nvSpPr>
-          <p:cNvPr id="3" name="Объект 2">
-            <a:extLst>
-              <a:ext uri="{FF2B5EF4-FFF2-40B4-BE49-F238E27FC236}">
-                <a16:creationId xmlns:a16="http://schemas.microsoft.com/office/drawing/2014/main" id="{6B699399-666B-4850-8464-3DF2B61BBE3F}"/>
-              </a:ext>
-            </a:extLst>
-          </p:cNvPr>
-          <p:cNvSpPr>
-            <a:spLocks noGrp="1"/>
-          </p:cNvSpPr>
-          <p:nvPr>
-            <p:ph idx="1"/>
-          </p:nvPr>
-        </p:nvSpPr>
-        <p:spPr/>
-        <p:txBody>
-          <a:bodyPr/>
-          <a:lstStyle/>
-          <a:p>
-            <a:r>
-              <a:rPr lang="ru-RU" dirty="0"/>
-              <a:t>Классы программы создаются и взаимодействуют по определённым правилам</a:t>
-            </a:r>
-          </a:p>
-          <a:p>
-            <a:r>
-              <a:rPr lang="ru-RU" dirty="0"/>
-              <a:t>Знание этих правил позволяет создавать программу не методом проб и ошибок, а проектировать её ещё до написания кода</a:t>
-            </a:r>
-          </a:p>
-          <a:p>
-            <a:r>
-              <a:rPr lang="ru-RU" dirty="0"/>
-              <a:t>Можно обсудить архитектуру и распределить работу над программы между программистами</a:t>
-            </a:r>
-          </a:p>
-          <a:p>
-            <a:r>
-              <a:rPr lang="ru-RU" dirty="0"/>
-              <a:t>Можно распределить работу над различными частями программы</a:t>
-            </a:r>
-          </a:p>
-        </p:txBody>
-      </p:sp>
-    </p:spTree>
-    <p:extLst>
-      <p:ext uri="{BB962C8B-B14F-4D97-AF65-F5344CB8AC3E}">
-        <p14:creationId xmlns:p14="http://schemas.microsoft.com/office/powerpoint/2010/main" val="4292201402"/>
-      </p:ext>
-    </p:extLst>
-  </p:cSld>
-  <p:clrMapOvr>
-    <a:masterClrMapping/>
-  </p:clrMapOvr>
-</p:sld>
-</file>
-
-<file path=ppt/slides/slide20.xml><?xml version="1.0" encoding="utf-8"?>
+<file path=ppt/slides/slide21.xml><?xml version="1.0" encoding="utf-8"?>
 <p:sld xmlns:a="http://schemas.openxmlformats.org/drawingml/2006/main" xmlns:r="http://schemas.openxmlformats.org/officeDocument/2006/relationships" xmlns:p="http://schemas.openxmlformats.org/presentationml/2006/main">
   <p:cSld>
     <p:spTree>
@@ -11381,6 +13277,9 @@
         </p:txBody>
       </p:sp>
     </p:spTree>
+    <p:custDataLst>
+      <p:tags r:id="rId1"/>
+    </p:custDataLst>
     <p:extLst>
       <p:ext uri="{BB962C8B-B14F-4D97-AF65-F5344CB8AC3E}">
         <p14:creationId xmlns:p14="http://schemas.microsoft.com/office/powerpoint/2010/main" val="1887105715"/>
@@ -11393,7 +13292,7 @@
 </p:sld>
 </file>
 
-<file path=ppt/slides/slide21.xml><?xml version="1.0" encoding="utf-8"?>
+<file path=ppt/slides/slide22.xml><?xml version="1.0" encoding="utf-8"?>
 <p:sld xmlns:a="http://schemas.openxmlformats.org/drawingml/2006/main" xmlns:r="http://schemas.openxmlformats.org/officeDocument/2006/relationships" xmlns:p="http://schemas.openxmlformats.org/presentationml/2006/main">
   <p:cSld>
     <p:spTree>
@@ -12870,6 +14769,9 @@
         </p:txBody>
       </p:sp>
     </p:spTree>
+    <p:custDataLst>
+      <p:tags r:id="rId1"/>
+    </p:custDataLst>
     <p:extLst>
       <p:ext uri="{BB962C8B-B14F-4D97-AF65-F5344CB8AC3E}">
         <p14:creationId xmlns:p14="http://schemas.microsoft.com/office/powerpoint/2010/main" val="1184711793"/>
@@ -13654,7 +15556,7 @@
 </p:sld>
 </file>
 
-<file path=ppt/slides/slide22.xml><?xml version="1.0" encoding="utf-8"?>
+<file path=ppt/slides/slide23.xml><?xml version="1.0" encoding="utf-8"?>
 <p:sld xmlns:a="http://schemas.openxmlformats.org/drawingml/2006/main" xmlns:r="http://schemas.openxmlformats.org/officeDocument/2006/relationships" xmlns:p="http://schemas.openxmlformats.org/presentationml/2006/main">
   <p:cSld>
     <p:spTree>
@@ -13686,7 +15588,7 @@
           <p:nvPr/>
         </p:nvPicPr>
         <p:blipFill>
-          <a:blip r:embed="rId3">
+          <a:blip r:embed="rId4">
             <a:extLst>
               <a:ext uri="{28A0092B-C50C-407E-A947-70E740481C1C}">
                 <a14:useLocalDpi xmlns:a14="http://schemas.microsoft.com/office/drawing/2010/main" val="0"/>
@@ -13752,7 +15654,7 @@
           <p:nvPr/>
         </p:nvPicPr>
         <p:blipFill>
-          <a:blip r:embed="rId4" cstate="print">
+          <a:blip r:embed="rId5" cstate="print">
             <a:extLst>
               <a:ext uri="{28A0092B-C50C-407E-A947-70E740481C1C}">
                 <a14:useLocalDpi xmlns:a14="http://schemas.microsoft.com/office/drawing/2010/main" val="0"/>
@@ -13785,6 +15687,9 @@
         </p:spPr>
       </p:pic>
     </p:spTree>
+    <p:custDataLst>
+      <p:tags r:id="rId1"/>
+    </p:custDataLst>
     <p:extLst>
       <p:ext uri="{BB962C8B-B14F-4D97-AF65-F5344CB8AC3E}">
         <p14:creationId xmlns:p14="http://schemas.microsoft.com/office/powerpoint/2010/main" val="1354985777"/>
@@ -13933,7 +15838,7 @@
 </p:sld>
 </file>
 
-<file path=ppt/slides/slide23.xml><?xml version="1.0" encoding="utf-8"?>
+<file path=ppt/slides/slide24.xml><?xml version="1.0" encoding="utf-8"?>
 <p:sld xmlns:a="http://schemas.openxmlformats.org/drawingml/2006/main" xmlns:r="http://schemas.openxmlformats.org/officeDocument/2006/relationships" xmlns:p="http://schemas.openxmlformats.org/presentationml/2006/main">
   <p:cSld>
     <p:spTree>
@@ -13993,7 +15898,7 @@
           <p:nvPr/>
         </p:nvPicPr>
         <p:blipFill>
-          <a:blip r:embed="rId3" cstate="print">
+          <a:blip r:embed="rId4" cstate="print">
             <a:extLst>
               <a:ext uri="{28A0092B-C50C-407E-A947-70E740481C1C}">
                 <a14:useLocalDpi xmlns:a14="http://schemas.microsoft.com/office/drawing/2010/main" val="0"/>
@@ -14026,6 +15931,9 @@
         </p:spPr>
       </p:pic>
     </p:spTree>
+    <p:custDataLst>
+      <p:tags r:id="rId1"/>
+    </p:custDataLst>
     <p:extLst>
       <p:ext uri="{BB962C8B-B14F-4D97-AF65-F5344CB8AC3E}">
         <p14:creationId xmlns:p14="http://schemas.microsoft.com/office/powerpoint/2010/main" val="2977006715"/>
@@ -14038,7 +15946,7 @@
 </p:sld>
 </file>
 
-<file path=ppt/slides/slide24.xml><?xml version="1.0" encoding="utf-8"?>
+<file path=ppt/slides/slide25.xml><?xml version="1.0" encoding="utf-8"?>
 <p:sld xmlns:a="http://schemas.openxmlformats.org/drawingml/2006/main" xmlns:r="http://schemas.openxmlformats.org/officeDocument/2006/relationships" xmlns:p="http://schemas.openxmlformats.org/presentationml/2006/main">
   <p:cSld>
     <p:spTree>
@@ -14109,6 +16017,9 @@
         </p:txBody>
       </p:sp>
     </p:spTree>
+    <p:custDataLst>
+      <p:tags r:id="rId1"/>
+    </p:custDataLst>
     <p:extLst>
       <p:ext uri="{BB962C8B-B14F-4D97-AF65-F5344CB8AC3E}">
         <p14:creationId xmlns:p14="http://schemas.microsoft.com/office/powerpoint/2010/main" val="187316163"/>
@@ -14121,7 +16032,7 @@
 </p:sld>
 </file>
 
-<file path=ppt/slides/slide25.xml><?xml version="1.0" encoding="utf-8"?>
+<file path=ppt/slides/slide26.xml><?xml version="1.0" encoding="utf-8"?>
 <p:sld xmlns:a="http://schemas.openxmlformats.org/drawingml/2006/main" xmlns:r="http://schemas.openxmlformats.org/officeDocument/2006/relationships" xmlns:p="http://schemas.openxmlformats.org/presentationml/2006/main">
   <p:cSld>
     <p:spTree>
@@ -14228,7 +16139,7 @@
           <p:nvPr/>
         </p:nvPicPr>
         <p:blipFill>
-          <a:blip r:embed="rId3" cstate="print">
+          <a:blip r:embed="rId4" cstate="print">
             <a:extLst>
               <a:ext uri="{28A0092B-C50C-407E-A947-70E740481C1C}">
                 <a14:useLocalDpi xmlns:a14="http://schemas.microsoft.com/office/drawing/2010/main" val="0"/>
@@ -14249,6 +16160,9 @@
         </p:spPr>
       </p:pic>
     </p:spTree>
+    <p:custDataLst>
+      <p:tags r:id="rId1"/>
+    </p:custDataLst>
     <p:extLst>
       <p:ext uri="{BB962C8B-B14F-4D97-AF65-F5344CB8AC3E}">
         <p14:creationId xmlns:p14="http://schemas.microsoft.com/office/powerpoint/2010/main" val="3206182078"/>
@@ -14261,7 +16175,7 @@
 </p:sld>
 </file>
 
-<file path=ppt/slides/slide26.xml><?xml version="1.0" encoding="utf-8"?>
+<file path=ppt/slides/slide27.xml><?xml version="1.0" encoding="utf-8"?>
 <p:sld xmlns:a="http://schemas.openxmlformats.org/drawingml/2006/main" xmlns:r="http://schemas.openxmlformats.org/officeDocument/2006/relationships" xmlns:p="http://schemas.openxmlformats.org/presentationml/2006/main">
   <p:cSld>
     <p:spTree>
@@ -14376,7 +16290,7 @@
           <p:nvPr/>
         </p:nvPicPr>
         <p:blipFill>
-          <a:blip r:embed="rId3" cstate="print">
+          <a:blip r:embed="rId4" cstate="print">
             <a:extLst>
               <a:ext uri="{28A0092B-C50C-407E-A947-70E740481C1C}">
                 <a14:useLocalDpi xmlns:a14="http://schemas.microsoft.com/office/drawing/2010/main" val="0"/>
@@ -14397,6 +16311,9 @@
         </p:spPr>
       </p:pic>
     </p:spTree>
+    <p:custDataLst>
+      <p:tags r:id="rId1"/>
+    </p:custDataLst>
     <p:extLst>
       <p:ext uri="{BB962C8B-B14F-4D97-AF65-F5344CB8AC3E}">
         <p14:creationId xmlns:p14="http://schemas.microsoft.com/office/powerpoint/2010/main" val="1822650094"/>
@@ -14409,7 +16326,7 @@
 </p:sld>
 </file>
 
-<file path=ppt/slides/slide27.xml><?xml version="1.0" encoding="utf-8"?>
+<file path=ppt/slides/slide28.xml><?xml version="1.0" encoding="utf-8"?>
 <p:sld xmlns:a="http://schemas.openxmlformats.org/drawingml/2006/main" xmlns:r="http://schemas.openxmlformats.org/officeDocument/2006/relationships" xmlns:p="http://schemas.openxmlformats.org/presentationml/2006/main">
   <p:cSld>
     <p:spTree>
@@ -14507,7 +16424,7 @@
           </p:nvPr>
         </p:nvPicPr>
         <p:blipFill>
-          <a:blip r:embed="rId2" cstate="print">
+          <a:blip r:embed="rId3" cstate="print">
             <a:extLst>
               <a:ext uri="{28A0092B-C50C-407E-A947-70E740481C1C}">
                 <a14:useLocalDpi xmlns:a14="http://schemas.microsoft.com/office/drawing/2010/main" val="0"/>
@@ -14540,6 +16457,9 @@
         </p:spPr>
       </p:pic>
     </p:spTree>
+    <p:custDataLst>
+      <p:tags r:id="rId1"/>
+    </p:custDataLst>
     <p:extLst>
       <p:ext uri="{BB962C8B-B14F-4D97-AF65-F5344CB8AC3E}">
         <p14:creationId xmlns:p14="http://schemas.microsoft.com/office/powerpoint/2010/main" val="52155651"/>
@@ -14552,7 +16472,7 @@
 </p:sld>
 </file>
 
-<file path=ppt/slides/slide28.xml><?xml version="1.0" encoding="utf-8"?>
+<file path=ppt/slides/slide29.xml><?xml version="1.0" encoding="utf-8"?>
 <p:sld xmlns:a="http://schemas.openxmlformats.org/drawingml/2006/main" xmlns:r="http://schemas.openxmlformats.org/officeDocument/2006/relationships" xmlns:p="http://schemas.openxmlformats.org/presentationml/2006/main">
   <p:cSld>
     <p:spTree>
@@ -14665,7 +16585,7 @@
           <p:nvPr/>
         </p:nvPicPr>
         <p:blipFill>
-          <a:blip r:embed="rId3">
+          <a:blip r:embed="rId4">
             <a:extLst>
               <a:ext uri="{28A0092B-C50C-407E-A947-70E740481C1C}">
                 <a14:useLocalDpi xmlns:a14="http://schemas.microsoft.com/office/drawing/2010/main" val="0"/>
@@ -14687,6 +16607,9 @@
         </p:spPr>
       </p:pic>
     </p:spTree>
+    <p:custDataLst>
+      <p:tags r:id="rId1"/>
+    </p:custDataLst>
     <p:extLst>
       <p:ext uri="{BB962C8B-B14F-4D97-AF65-F5344CB8AC3E}">
         <p14:creationId xmlns:p14="http://schemas.microsoft.com/office/powerpoint/2010/main" val="1153779281"/>
@@ -14699,7 +16622,230 @@
 </p:sld>
 </file>
 
-<file path=ppt/slides/slide29.xml><?xml version="1.0" encoding="utf-8"?>
+<file path=ppt/slides/slide3.xml><?xml version="1.0" encoding="utf-8"?>
+<p:sld xmlns:a="http://schemas.openxmlformats.org/drawingml/2006/main" xmlns:r="http://schemas.openxmlformats.org/officeDocument/2006/relationships" xmlns:p="http://schemas.openxmlformats.org/presentationml/2006/main">
+  <p:cSld>
+    <p:spTree>
+      <p:nvGrpSpPr>
+        <p:cNvPr id="1" name=""/>
+        <p:cNvGrpSpPr/>
+        <p:nvPr/>
+      </p:nvGrpSpPr>
+      <p:grpSpPr>
+        <a:xfrm>
+          <a:off x="0" y="0"/>
+          <a:ext cx="0" cy="0"/>
+          <a:chOff x="0" y="0"/>
+          <a:chExt cx="0" cy="0"/>
+        </a:xfrm>
+      </p:grpSpPr>
+      <p:sp>
+        <p:nvSpPr>
+          <p:cNvPr id="2" name="Заголовок 1">
+            <a:extLst>
+              <a:ext uri="{FF2B5EF4-FFF2-40B4-BE49-F238E27FC236}">
+                <a16:creationId xmlns:a16="http://schemas.microsoft.com/office/drawing/2014/main" id="{E12DDA6B-B205-44FB-9002-AC2269452C53}"/>
+              </a:ext>
+            </a:extLst>
+          </p:cNvPr>
+          <p:cNvSpPr>
+            <a:spLocks noGrp="1"/>
+          </p:cNvSpPr>
+          <p:nvPr>
+            <p:ph type="title"/>
+          </p:nvPr>
+        </p:nvSpPr>
+        <p:spPr/>
+        <p:txBody>
+          <a:bodyPr/>
+          <a:lstStyle/>
+          <a:p>
+            <a:r>
+              <a:rPr lang="ru-RU" dirty="0"/>
+              <a:t>Диаграмма классов</a:t>
+            </a:r>
+          </a:p>
+        </p:txBody>
+      </p:sp>
+      <p:sp>
+        <p:nvSpPr>
+          <p:cNvPr id="3" name="Объект 2">
+            <a:extLst>
+              <a:ext uri="{FF2B5EF4-FFF2-40B4-BE49-F238E27FC236}">
+                <a16:creationId xmlns:a16="http://schemas.microsoft.com/office/drawing/2014/main" id="{0FA450FE-1DFD-47E9-9263-7D0A9C7B3181}"/>
+              </a:ext>
+            </a:extLst>
+          </p:cNvPr>
+          <p:cNvSpPr>
+            <a:spLocks noGrp="1"/>
+          </p:cNvSpPr>
+          <p:nvPr>
+            <p:ph idx="1"/>
+          </p:nvPr>
+        </p:nvSpPr>
+        <p:spPr/>
+        <p:txBody>
+          <a:bodyPr/>
+          <a:lstStyle/>
+          <a:p>
+            <a:r>
+              <a:rPr lang="ru-RU" dirty="0"/>
+              <a:t>Один из способов визуализации структуры программы</a:t>
+            </a:r>
+          </a:p>
+          <a:p>
+            <a:r>
+              <a:rPr lang="ru-RU" dirty="0"/>
+              <a:t>Показывает классы и интерфейсы, их состав и связи между ними</a:t>
+            </a:r>
+          </a:p>
+          <a:p>
+            <a:r>
+              <a:rPr lang="en-US" dirty="0"/>
+              <a:t>UML – </a:t>
+            </a:r>
+            <a:r>
+              <a:rPr lang="ru-RU" dirty="0"/>
+              <a:t>универсальный язык моделирования</a:t>
+            </a:r>
+          </a:p>
+        </p:txBody>
+      </p:sp>
+      <p:pic>
+        <p:nvPicPr>
+          <p:cNvPr id="5" name="Рисунок 4">
+            <a:extLst>
+              <a:ext uri="{FF2B5EF4-FFF2-40B4-BE49-F238E27FC236}">
+                <a16:creationId xmlns:a16="http://schemas.microsoft.com/office/drawing/2014/main" id="{C60A991B-FF38-4274-A00D-85B8ED5419B6}"/>
+              </a:ext>
+            </a:extLst>
+          </p:cNvPr>
+          <p:cNvPicPr>
+            <a:picLocks noChangeAspect="1"/>
+          </p:cNvPicPr>
+          <p:nvPr/>
+        </p:nvPicPr>
+        <p:blipFill>
+          <a:blip r:embed="rId4" cstate="print">
+            <a:extLst>
+              <a:ext uri="{28A0092B-C50C-407E-A947-70E740481C1C}">
+                <a14:useLocalDpi xmlns:a14="http://schemas.microsoft.com/office/drawing/2010/main" val="0"/>
+              </a:ext>
+            </a:extLst>
+          </a:blip>
+          <a:srcRect/>
+          <a:stretch/>
+        </p:blipFill>
+        <p:spPr>
+          <a:xfrm>
+            <a:off x="1775520" y="4020439"/>
+            <a:ext cx="8820944" cy="2623952"/>
+          </a:xfrm>
+          <a:prstGeom prst="rect">
+            <a:avLst/>
+          </a:prstGeom>
+        </p:spPr>
+      </p:pic>
+    </p:spTree>
+    <p:custDataLst>
+      <p:tags r:id="rId1"/>
+    </p:custDataLst>
+    <p:extLst>
+      <p:ext uri="{BB962C8B-B14F-4D97-AF65-F5344CB8AC3E}">
+        <p14:creationId xmlns:p14="http://schemas.microsoft.com/office/powerpoint/2010/main" val="3178513329"/>
+      </p:ext>
+    </p:extLst>
+  </p:cSld>
+  <p:clrMapOvr>
+    <a:masterClrMapping/>
+  </p:clrMapOvr>
+  <p:timing>
+    <p:tnLst>
+      <p:par>
+        <p:cTn id="1" dur="indefinite" restart="never" nodeType="tmRoot">
+          <p:childTnLst>
+            <p:seq concurrent="1" nextAc="seek">
+              <p:cTn id="2" dur="indefinite" nodeType="mainSeq">
+                <p:childTnLst>
+                  <p:par>
+                    <p:cTn id="3" fill="hold">
+                      <p:stCondLst>
+                        <p:cond delay="indefinite"/>
+                      </p:stCondLst>
+                      <p:childTnLst>
+                        <p:par>
+                          <p:cTn id="4" fill="hold">
+                            <p:stCondLst>
+                              <p:cond delay="0"/>
+                            </p:stCondLst>
+                            <p:childTnLst>
+                              <p:par>
+                                <p:cTn id="5" presetID="10" presetClass="entr" presetSubtype="0" fill="hold" nodeType="clickEffect">
+                                  <p:stCondLst>
+                                    <p:cond delay="0"/>
+                                  </p:stCondLst>
+                                  <p:childTnLst>
+                                    <p:set>
+                                      <p:cBhvr>
+                                        <p:cTn id="6" dur="1" fill="hold">
+                                          <p:stCondLst>
+                                            <p:cond delay="0"/>
+                                          </p:stCondLst>
+                                        </p:cTn>
+                                        <p:tgtEl>
+                                          <p:spTgt spid="5"/>
+                                        </p:tgtEl>
+                                        <p:attrNameLst>
+                                          <p:attrName>style.visibility</p:attrName>
+                                        </p:attrNameLst>
+                                      </p:cBhvr>
+                                      <p:to>
+                                        <p:strVal val="visible"/>
+                                      </p:to>
+                                    </p:set>
+                                    <p:animEffect transition="in" filter="fade">
+                                      <p:cBhvr>
+                                        <p:cTn id="7" dur="500"/>
+                                        <p:tgtEl>
+                                          <p:spTgt spid="5"/>
+                                        </p:tgtEl>
+                                      </p:cBhvr>
+                                    </p:animEffect>
+                                  </p:childTnLst>
+                                </p:cTn>
+                              </p:par>
+                            </p:childTnLst>
+                          </p:cTn>
+                        </p:par>
+                      </p:childTnLst>
+                    </p:cTn>
+                  </p:par>
+                </p:childTnLst>
+              </p:cTn>
+              <p:prevCondLst>
+                <p:cond evt="onPrev" delay="0">
+                  <p:tgtEl>
+                    <p:sldTgt/>
+                  </p:tgtEl>
+                </p:cond>
+              </p:prevCondLst>
+              <p:nextCondLst>
+                <p:cond evt="onNext" delay="0">
+                  <p:tgtEl>
+                    <p:sldTgt/>
+                  </p:tgtEl>
+                </p:cond>
+              </p:nextCondLst>
+            </p:seq>
+          </p:childTnLst>
+        </p:cTn>
+      </p:par>
+    </p:tnLst>
+  </p:timing>
+</p:sld>
+</file>
+
+<file path=ppt/slides/slide30.xml><?xml version="1.0" encoding="utf-8"?>
 <p:sld xmlns:a="http://schemas.openxmlformats.org/drawingml/2006/main" xmlns:r="http://schemas.openxmlformats.org/officeDocument/2006/relationships" xmlns:p="http://schemas.openxmlformats.org/presentationml/2006/main" show="0">
   <p:cSld>
     <p:spTree>
@@ -14761,7 +16907,7 @@
           <p:nvPr/>
         </p:nvPicPr>
         <p:blipFill>
-          <a:blip r:embed="rId3" cstate="print">
+          <a:blip r:embed="rId4" cstate="print">
             <a:extLst>
               <a:ext uri="{28A0092B-C50C-407E-A947-70E740481C1C}">
                 <a14:useLocalDpi xmlns:a14="http://schemas.microsoft.com/office/drawing/2010/main" val="0"/>
@@ -14797,7 +16943,7 @@
           <p:nvPr/>
         </p:nvPicPr>
         <p:blipFill>
-          <a:blip r:embed="rId4" cstate="print">
+          <a:blip r:embed="rId5" cstate="print">
             <a:extLst>
               <a:ext uri="{28A0092B-C50C-407E-A947-70E740481C1C}">
                 <a14:useLocalDpi xmlns:a14="http://schemas.microsoft.com/office/drawing/2010/main" val="0"/>
@@ -14833,7 +16979,7 @@
           <p:nvPr/>
         </p:nvPicPr>
         <p:blipFill>
-          <a:blip r:embed="rId5" cstate="print">
+          <a:blip r:embed="rId6" cstate="print">
             <a:extLst>
               <a:ext uri="{28A0092B-C50C-407E-A947-70E740481C1C}">
                 <a14:useLocalDpi xmlns:a14="http://schemas.microsoft.com/office/drawing/2010/main" val="0"/>
@@ -14869,7 +17015,7 @@
           <p:nvPr/>
         </p:nvPicPr>
         <p:blipFill>
-          <a:blip r:embed="rId6" cstate="print">
+          <a:blip r:embed="rId7" cstate="print">
             <a:extLst>
               <a:ext uri="{28A0092B-C50C-407E-A947-70E740481C1C}">
                 <a14:useLocalDpi xmlns:a14="http://schemas.microsoft.com/office/drawing/2010/main" val="0"/>
@@ -14905,7 +17051,7 @@
           <p:nvPr/>
         </p:nvPicPr>
         <p:blipFill>
-          <a:blip r:embed="rId7" cstate="print">
+          <a:blip r:embed="rId8" cstate="print">
             <a:extLst>
               <a:ext uri="{28A0092B-C50C-407E-A947-70E740481C1C}">
                 <a14:useLocalDpi xmlns:a14="http://schemas.microsoft.com/office/drawing/2010/main" val="0"/>
@@ -14965,6 +17111,9 @@
         </p:txBody>
       </p:sp>
     </p:spTree>
+    <p:custDataLst>
+      <p:tags r:id="rId1"/>
+    </p:custDataLst>
     <p:extLst>
       <p:ext uri="{BB962C8B-B14F-4D97-AF65-F5344CB8AC3E}">
         <p14:creationId xmlns:p14="http://schemas.microsoft.com/office/powerpoint/2010/main" val="885069872"/>
@@ -15063,226 +17212,6 @@
 </p:sld>
 </file>
 
-<file path=ppt/slides/slide3.xml><?xml version="1.0" encoding="utf-8"?>
-<p:sld xmlns:a="http://schemas.openxmlformats.org/drawingml/2006/main" xmlns:r="http://schemas.openxmlformats.org/officeDocument/2006/relationships" xmlns:p="http://schemas.openxmlformats.org/presentationml/2006/main">
-  <p:cSld>
-    <p:spTree>
-      <p:nvGrpSpPr>
-        <p:cNvPr id="1" name=""/>
-        <p:cNvGrpSpPr/>
-        <p:nvPr/>
-      </p:nvGrpSpPr>
-      <p:grpSpPr>
-        <a:xfrm>
-          <a:off x="0" y="0"/>
-          <a:ext cx="0" cy="0"/>
-          <a:chOff x="0" y="0"/>
-          <a:chExt cx="0" cy="0"/>
-        </a:xfrm>
-      </p:grpSpPr>
-      <p:sp>
-        <p:nvSpPr>
-          <p:cNvPr id="2" name="Заголовок 1">
-            <a:extLst>
-              <a:ext uri="{FF2B5EF4-FFF2-40B4-BE49-F238E27FC236}">
-                <a16:creationId xmlns:a16="http://schemas.microsoft.com/office/drawing/2014/main" id="{E12DDA6B-B205-44FB-9002-AC2269452C53}"/>
-              </a:ext>
-            </a:extLst>
-          </p:cNvPr>
-          <p:cNvSpPr>
-            <a:spLocks noGrp="1"/>
-          </p:cNvSpPr>
-          <p:nvPr>
-            <p:ph type="title"/>
-          </p:nvPr>
-        </p:nvSpPr>
-        <p:spPr/>
-        <p:txBody>
-          <a:bodyPr/>
-          <a:lstStyle/>
-          <a:p>
-            <a:r>
-              <a:rPr lang="ru-RU" dirty="0"/>
-              <a:t>Диаграмма классов</a:t>
-            </a:r>
-          </a:p>
-        </p:txBody>
-      </p:sp>
-      <p:sp>
-        <p:nvSpPr>
-          <p:cNvPr id="3" name="Объект 2">
-            <a:extLst>
-              <a:ext uri="{FF2B5EF4-FFF2-40B4-BE49-F238E27FC236}">
-                <a16:creationId xmlns:a16="http://schemas.microsoft.com/office/drawing/2014/main" id="{0FA450FE-1DFD-47E9-9263-7D0A9C7B3181}"/>
-              </a:ext>
-            </a:extLst>
-          </p:cNvPr>
-          <p:cNvSpPr>
-            <a:spLocks noGrp="1"/>
-          </p:cNvSpPr>
-          <p:nvPr>
-            <p:ph idx="1"/>
-          </p:nvPr>
-        </p:nvSpPr>
-        <p:spPr/>
-        <p:txBody>
-          <a:bodyPr/>
-          <a:lstStyle/>
-          <a:p>
-            <a:r>
-              <a:rPr lang="ru-RU" dirty="0"/>
-              <a:t>Один из способов визуализации структуры программы</a:t>
-            </a:r>
-          </a:p>
-          <a:p>
-            <a:r>
-              <a:rPr lang="ru-RU" dirty="0"/>
-              <a:t>Показывает классы и интерфейсы, их состав и связи между ними</a:t>
-            </a:r>
-          </a:p>
-          <a:p>
-            <a:r>
-              <a:rPr lang="en-US" dirty="0"/>
-              <a:t>UML – </a:t>
-            </a:r>
-            <a:r>
-              <a:rPr lang="ru-RU" dirty="0"/>
-              <a:t>универсальный язык моделирования</a:t>
-            </a:r>
-          </a:p>
-        </p:txBody>
-      </p:sp>
-      <p:pic>
-        <p:nvPicPr>
-          <p:cNvPr id="5" name="Рисунок 4">
-            <a:extLst>
-              <a:ext uri="{FF2B5EF4-FFF2-40B4-BE49-F238E27FC236}">
-                <a16:creationId xmlns:a16="http://schemas.microsoft.com/office/drawing/2014/main" id="{C60A991B-FF38-4274-A00D-85B8ED5419B6}"/>
-              </a:ext>
-            </a:extLst>
-          </p:cNvPr>
-          <p:cNvPicPr>
-            <a:picLocks noChangeAspect="1"/>
-          </p:cNvPicPr>
-          <p:nvPr/>
-        </p:nvPicPr>
-        <p:blipFill>
-          <a:blip r:embed="rId3" cstate="print">
-            <a:extLst>
-              <a:ext uri="{28A0092B-C50C-407E-A947-70E740481C1C}">
-                <a14:useLocalDpi xmlns:a14="http://schemas.microsoft.com/office/drawing/2010/main" val="0"/>
-              </a:ext>
-            </a:extLst>
-          </a:blip>
-          <a:srcRect/>
-          <a:stretch/>
-        </p:blipFill>
-        <p:spPr>
-          <a:xfrm>
-            <a:off x="1775520" y="4020439"/>
-            <a:ext cx="8820944" cy="2623952"/>
-          </a:xfrm>
-          <a:prstGeom prst="rect">
-            <a:avLst/>
-          </a:prstGeom>
-        </p:spPr>
-      </p:pic>
-    </p:spTree>
-    <p:extLst>
-      <p:ext uri="{BB962C8B-B14F-4D97-AF65-F5344CB8AC3E}">
-        <p14:creationId xmlns:p14="http://schemas.microsoft.com/office/powerpoint/2010/main" val="3178513329"/>
-      </p:ext>
-    </p:extLst>
-  </p:cSld>
-  <p:clrMapOvr>
-    <a:masterClrMapping/>
-  </p:clrMapOvr>
-  <p:timing>
-    <p:tnLst>
-      <p:par>
-        <p:cTn id="1" dur="indefinite" restart="never" nodeType="tmRoot">
-          <p:childTnLst>
-            <p:seq concurrent="1" nextAc="seek">
-              <p:cTn id="2" dur="indefinite" nodeType="mainSeq">
-                <p:childTnLst>
-                  <p:par>
-                    <p:cTn id="3" fill="hold">
-                      <p:stCondLst>
-                        <p:cond delay="indefinite"/>
-                      </p:stCondLst>
-                      <p:childTnLst>
-                        <p:par>
-                          <p:cTn id="4" fill="hold">
-                            <p:stCondLst>
-                              <p:cond delay="0"/>
-                            </p:stCondLst>
-                            <p:childTnLst>
-                              <p:par>
-                                <p:cTn id="5" presetID="10" presetClass="entr" presetSubtype="0" fill="hold" nodeType="clickEffect">
-                                  <p:stCondLst>
-                                    <p:cond delay="0"/>
-                                  </p:stCondLst>
-                                  <p:childTnLst>
-                                    <p:set>
-                                      <p:cBhvr>
-                                        <p:cTn id="6" dur="1" fill="hold">
-                                          <p:stCondLst>
-                                            <p:cond delay="0"/>
-                                          </p:stCondLst>
-                                        </p:cTn>
-                                        <p:tgtEl>
-                                          <p:spTgt spid="5"/>
-                                        </p:tgtEl>
-                                        <p:attrNameLst>
-                                          <p:attrName>style.visibility</p:attrName>
-                                        </p:attrNameLst>
-                                      </p:cBhvr>
-                                      <p:to>
-                                        <p:strVal val="visible"/>
-                                      </p:to>
-                                    </p:set>
-                                    <p:animEffect transition="in" filter="fade">
-                                      <p:cBhvr>
-                                        <p:cTn id="7" dur="500"/>
-                                        <p:tgtEl>
-                                          <p:spTgt spid="5"/>
-                                        </p:tgtEl>
-                                      </p:cBhvr>
-                                    </p:animEffect>
-                                  </p:childTnLst>
-                                </p:cTn>
-                              </p:par>
-                            </p:childTnLst>
-                          </p:cTn>
-                        </p:par>
-                      </p:childTnLst>
-                    </p:cTn>
-                  </p:par>
-                </p:childTnLst>
-              </p:cTn>
-              <p:prevCondLst>
-                <p:cond evt="onPrev" delay="0">
-                  <p:tgtEl>
-                    <p:sldTgt/>
-                  </p:tgtEl>
-                </p:cond>
-              </p:prevCondLst>
-              <p:nextCondLst>
-                <p:cond evt="onNext" delay="0">
-                  <p:tgtEl>
-                    <p:sldTgt/>
-                  </p:tgtEl>
-                </p:cond>
-              </p:nextCondLst>
-            </p:seq>
-          </p:childTnLst>
-        </p:cTn>
-      </p:par>
-    </p:tnLst>
-  </p:timing>
-</p:sld>
-</file>
-
 <file path=ppt/slides/slide4.xml><?xml version="1.0" encoding="utf-8"?>
 <p:sld xmlns:a="http://schemas.openxmlformats.org/drawingml/2006/main" xmlns:r="http://schemas.openxmlformats.org/officeDocument/2006/relationships" xmlns:p="http://schemas.openxmlformats.org/presentationml/2006/main">
   <p:cSld>
@@ -15355,6 +17284,9 @@
         </p:txBody>
       </p:sp>
     </p:spTree>
+    <p:custDataLst>
+      <p:tags r:id="rId1"/>
+    </p:custDataLst>
     <p:extLst>
       <p:ext uri="{BB962C8B-B14F-4D97-AF65-F5344CB8AC3E}">
         <p14:creationId xmlns:p14="http://schemas.microsoft.com/office/powerpoint/2010/main" val="1860757464"/>
@@ -15407,9 +17339,12 @@
           <a:p>
             <a:r>
               <a:rPr lang="ru-RU" dirty="0"/>
-              <a:t>Ассоциация</a:t>
-            </a:r>
-            <a:endParaRPr lang="en-US" dirty="0"/>
+              <a:t>Ассоциация (</a:t>
+            </a:r>
+            <a:r>
+              <a:rPr lang="en-US" dirty="0"/>
+              <a:t>Association)</a:t>
+            </a:r>
           </a:p>
         </p:txBody>
       </p:sp>
@@ -15431,52 +17366,142 @@
         </p:nvSpPr>
         <p:spPr/>
         <p:txBody>
-          <a:bodyPr/>
+          <a:bodyPr>
+            <a:normAutofit fontScale="62500" lnSpcReduction="20000"/>
+          </a:bodyPr>
           <a:lstStyle/>
           <a:p>
             <a:r>
               <a:rPr lang="ru-RU" dirty="0"/>
-              <a:t>Отношение, при котором один класс знает о другом, но может существовать отдельно от него</a:t>
-            </a:r>
-          </a:p>
-          <a:p>
-            <a:r>
-              <a:rPr lang="ru-RU" dirty="0"/>
-              <a:t>Возможно наличие двусторонней ассоциации</a:t>
-            </a:r>
-          </a:p>
-          <a:p>
-            <a:r>
-              <a:rPr lang="ru-RU" dirty="0"/>
+              <a:t>Общее понятие связи между классами</a:t>
+            </a:r>
+          </a:p>
+          <a:p>
+            <a:r>
+              <a:rPr lang="ru-RU" b="1" dirty="0"/>
+              <a:t>Характеристики:</a:t>
+            </a:r>
+            <a:endParaRPr lang="ru-RU" dirty="0"/>
+          </a:p>
+          <a:p>
+            <a:pPr lvl="1"/>
+            <a:r>
+              <a:rPr lang="ru-RU" dirty="0"/>
+              <a:t>Объекты знают друг о друге </a:t>
+            </a:r>
+          </a:p>
+          <a:p>
+            <a:pPr lvl="1"/>
+            <a:r>
+              <a:rPr lang="ru-RU" dirty="0"/>
+              <a:t>Нет владения (</a:t>
+            </a:r>
+            <a:r>
+              <a:rPr lang="ru-RU" dirty="0" err="1"/>
+              <a:t>ownership</a:t>
+            </a:r>
+            <a:r>
+              <a:rPr lang="ru-RU" dirty="0"/>
+              <a:t>) </a:t>
+            </a:r>
+          </a:p>
+          <a:p>
+            <a:pPr lvl="1"/>
+            <a:r>
+              <a:rPr lang="ru-RU" dirty="0"/>
+              <a:t>Независимые жизненные циклы </a:t>
+            </a:r>
+          </a:p>
+          <a:p>
+            <a:r>
+              <a:rPr lang="ru-RU" b="1" dirty="0"/>
+              <a:t>Виды ассоциации:</a:t>
+            </a:r>
+            <a:endParaRPr lang="ru-RU" dirty="0"/>
+          </a:p>
+          <a:p>
+            <a:pPr lvl="1"/>
+            <a:r>
+              <a:rPr lang="ru-RU" dirty="0"/>
+              <a:t>Простая ассоциация </a:t>
+            </a:r>
+          </a:p>
+          <a:p>
+            <a:pPr lvl="1"/>
+            <a:r>
+              <a:rPr lang="ru-RU" dirty="0"/>
+              <a:t>Агрегация (слабое владение) </a:t>
+            </a:r>
+          </a:p>
+          <a:p>
+            <a:pPr lvl="1"/>
+            <a:r>
+              <a:rPr lang="ru-RU" dirty="0"/>
+              <a:t>Композиция (сильное владение) </a:t>
+            </a:r>
+          </a:p>
+          <a:p>
+            <a:r>
+              <a:rPr lang="ru-RU" b="1" dirty="0"/>
+              <a:t>Связь может быть:</a:t>
+            </a:r>
+            <a:endParaRPr lang="ru-RU" dirty="0"/>
+          </a:p>
+          <a:p>
+            <a:pPr lvl="1"/>
+            <a:r>
+              <a:rPr lang="ru-RU" dirty="0"/>
+              <a:t>односторонней </a:t>
+            </a:r>
+          </a:p>
+          <a:p>
+            <a:pPr lvl="1"/>
+            <a:r>
+              <a:rPr lang="ru-RU" dirty="0"/>
+              <a:t>двусторонней </a:t>
+            </a:r>
+          </a:p>
+          <a:p>
+            <a:r>
+              <a:rPr lang="ru-RU" b="1" dirty="0"/>
+              <a:t>Реализация в C++:</a:t>
+            </a:r>
+            <a:endParaRPr lang="ru-RU" dirty="0"/>
+          </a:p>
+          <a:p>
+            <a:pPr lvl="1"/>
+            <a:r>
+              <a:rPr lang="ru-RU" dirty="0"/>
+              <a:t>указатели (*) </a:t>
+            </a:r>
+          </a:p>
+          <a:p>
+            <a:pPr lvl="1"/>
+            <a:r>
+              <a:rPr lang="ru-RU" dirty="0"/>
+              <a:t>ссылки (&amp;) </a:t>
+            </a:r>
+          </a:p>
+          <a:p>
+            <a:r>
+              <a:rPr lang="ru-RU" b="1" dirty="0"/>
               <a:t>Пример:</a:t>
             </a:r>
-          </a:p>
-          <a:p>
-            <a:pPr lvl="1"/>
-            <a:r>
-              <a:rPr lang="ru-RU" dirty="0"/>
-              <a:t>Учитель </a:t>
-            </a:r>
-            <a:r>
-              <a:rPr lang="en-US" dirty="0"/>
-              <a:t>&lt;-&gt; </a:t>
-            </a:r>
-            <a:r>
-              <a:rPr lang="ru-RU" dirty="0"/>
-              <a:t>Ученик</a:t>
-            </a:r>
-            <a:endParaRPr lang="en-US" dirty="0"/>
-          </a:p>
-          <a:p>
-            <a:r>
-              <a:rPr lang="ru-RU" dirty="0"/>
-              <a:t>Реализуется за счёт хранения ссылки или указателя на ассоциированный объект</a:t>
-            </a:r>
-            <a:endParaRPr lang="en-US" dirty="0"/>
+            <a:r>
+              <a:rPr lang="en-US" b="1" dirty="0"/>
+              <a:t> </a:t>
+            </a:r>
+            <a:r>
+              <a:rPr lang="ru-RU" dirty="0"/>
+              <a:t>Учитель ↔ Ученик</a:t>
+            </a:r>
           </a:p>
         </p:txBody>
       </p:sp>
     </p:spTree>
+    <p:custDataLst>
+      <p:tags r:id="rId1"/>
+    </p:custDataLst>
     <p:extLst>
       <p:ext uri="{BB962C8B-B14F-4D97-AF65-F5344CB8AC3E}">
         <p14:creationId xmlns:p14="http://schemas.microsoft.com/office/powerpoint/2010/main" val="2826153714"/>
@@ -15550,7 +17575,7 @@
           <p:nvPr/>
         </p:nvPicPr>
         <p:blipFill>
-          <a:blip r:embed="rId2">
+          <a:blip r:embed="rId3">
             <a:extLst>
               <a:ext uri="{28A0092B-C50C-407E-A947-70E740481C1C}">
                 <a14:useLocalDpi xmlns:a14="http://schemas.microsoft.com/office/drawing/2010/main" val="0"/>
@@ -15585,7 +17610,7 @@
           <p:nvPr/>
         </p:nvPicPr>
         <p:blipFill>
-          <a:blip r:embed="rId3">
+          <a:blip r:embed="rId4">
             <a:extLst>
               <a:ext uri="{28A0092B-C50C-407E-A947-70E740481C1C}">
                 <a14:useLocalDpi xmlns:a14="http://schemas.microsoft.com/office/drawing/2010/main" val="0"/>
@@ -15618,6 +17643,9 @@
         </p:spPr>
       </p:pic>
     </p:spTree>
+    <p:custDataLst>
+      <p:tags r:id="rId1"/>
+    </p:custDataLst>
     <p:extLst>
       <p:ext uri="{BB962C8B-B14F-4D97-AF65-F5344CB8AC3E}">
         <p14:creationId xmlns:p14="http://schemas.microsoft.com/office/powerpoint/2010/main" val="75330884"/>
@@ -15631,6 +17659,1156 @@
 </file>
 
 <file path=ppt/slides/slide7.xml><?xml version="1.0" encoding="utf-8"?>
+<p:sld xmlns:a="http://schemas.openxmlformats.org/drawingml/2006/main" xmlns:r="http://schemas.openxmlformats.org/officeDocument/2006/relationships" xmlns:p="http://schemas.openxmlformats.org/presentationml/2006/main">
+  <p:cSld>
+    <p:spTree>
+      <p:nvGrpSpPr>
+        <p:cNvPr id="1" name=""/>
+        <p:cNvGrpSpPr/>
+        <p:nvPr/>
+      </p:nvGrpSpPr>
+      <p:grpSpPr>
+        <a:xfrm>
+          <a:off x="0" y="0"/>
+          <a:ext cx="0" cy="0"/>
+          <a:chOff x="0" y="0"/>
+          <a:chExt cx="0" cy="0"/>
+        </a:xfrm>
+      </p:grpSpPr>
+      <p:sp>
+        <p:nvSpPr>
+          <p:cNvPr id="2" name="Title 1">
+            <a:extLst>
+              <a:ext uri="{FF2B5EF4-FFF2-40B4-BE49-F238E27FC236}">
+                <a16:creationId xmlns:a16="http://schemas.microsoft.com/office/drawing/2014/main" id="{BCD63E94-B7C2-3B33-6A10-7DCC3F133065}"/>
+              </a:ext>
+            </a:extLst>
+          </p:cNvPr>
+          <p:cNvSpPr>
+            <a:spLocks noGrp="1"/>
+          </p:cNvSpPr>
+          <p:nvPr>
+            <p:ph type="title"/>
+          </p:nvPr>
+        </p:nvSpPr>
+        <p:spPr/>
+        <p:txBody>
+          <a:bodyPr/>
+          <a:lstStyle/>
+          <a:p>
+            <a:r>
+              <a:rPr lang="ru-RU" dirty="0"/>
+              <a:t>Учитель - ученик</a:t>
+            </a:r>
+            <a:endParaRPr lang="en-US" dirty="0"/>
+          </a:p>
+        </p:txBody>
+      </p:sp>
+      <p:sp>
+        <p:nvSpPr>
+          <p:cNvPr id="4" name="TextBox 3">
+            <a:extLst>
+              <a:ext uri="{FF2B5EF4-FFF2-40B4-BE49-F238E27FC236}">
+                <a16:creationId xmlns:a16="http://schemas.microsoft.com/office/drawing/2014/main" id="{DCEE1758-00C1-A173-766F-2582E06037C7}"/>
+              </a:ext>
+            </a:extLst>
+          </p:cNvPr>
+          <p:cNvSpPr txBox="1"/>
+          <p:nvPr/>
+        </p:nvSpPr>
+        <p:spPr>
+          <a:xfrm>
+            <a:off x="7513" y="1698455"/>
+            <a:ext cx="6098240" cy="4770537"/>
+          </a:xfrm>
+          <a:prstGeom prst="rect">
+            <a:avLst/>
+          </a:prstGeom>
+          <a:noFill/>
+        </p:spPr>
+        <p:txBody>
+          <a:bodyPr wrap="square">
+            <a:spAutoFit/>
+          </a:bodyPr>
+          <a:lstStyle/>
+          <a:p>
+            <a:pPr>
+              <a:buNone/>
+            </a:pPr>
+            <a:r>
+              <a:rPr lang="en-US" sz="1600" b="0" dirty="0">
+                <a:solidFill>
+                  <a:srgbClr val="0000FF"/>
+                </a:solidFill>
+                <a:effectLst/>
+                <a:latin typeface="Consolas" panose="020B0609020204030204" pitchFamily="49" charset="0"/>
+              </a:rPr>
+              <a:t>class</a:t>
+            </a:r>
+            <a:r>
+              <a:rPr lang="en-US" sz="1600" b="0" dirty="0">
+                <a:solidFill>
+                  <a:srgbClr val="000000"/>
+                </a:solidFill>
+                <a:effectLst/>
+                <a:latin typeface="Consolas" panose="020B0609020204030204" pitchFamily="49" charset="0"/>
+              </a:rPr>
+              <a:t> Teacher;</a:t>
+            </a:r>
+          </a:p>
+          <a:p>
+            <a:pPr>
+              <a:buNone/>
+            </a:pPr>
+            <a:endParaRPr lang="en-US" sz="1600" b="0" dirty="0">
+              <a:solidFill>
+                <a:srgbClr val="000000"/>
+              </a:solidFill>
+              <a:effectLst/>
+              <a:latin typeface="Consolas" panose="020B0609020204030204" pitchFamily="49" charset="0"/>
+            </a:endParaRPr>
+          </a:p>
+          <a:p>
+            <a:pPr>
+              <a:buNone/>
+            </a:pPr>
+            <a:r>
+              <a:rPr lang="en-US" sz="1600" b="0" dirty="0">
+                <a:solidFill>
+                  <a:srgbClr val="0000FF"/>
+                </a:solidFill>
+                <a:effectLst/>
+                <a:latin typeface="Consolas" panose="020B0609020204030204" pitchFamily="49" charset="0"/>
+              </a:rPr>
+              <a:t>class</a:t>
+            </a:r>
+            <a:r>
+              <a:rPr lang="en-US" sz="1600" b="0" dirty="0">
+                <a:solidFill>
+                  <a:srgbClr val="000000"/>
+                </a:solidFill>
+                <a:effectLst/>
+                <a:latin typeface="Consolas" panose="020B0609020204030204" pitchFamily="49" charset="0"/>
+              </a:rPr>
+              <a:t> Student {</a:t>
+            </a:r>
+          </a:p>
+          <a:p>
+            <a:pPr>
+              <a:buNone/>
+            </a:pPr>
+            <a:r>
+              <a:rPr lang="en-US" sz="1600" b="0" dirty="0">
+                <a:solidFill>
+                  <a:srgbClr val="0000FF"/>
+                </a:solidFill>
+                <a:effectLst/>
+                <a:latin typeface="Consolas" panose="020B0609020204030204" pitchFamily="49" charset="0"/>
+              </a:rPr>
+              <a:t>public</a:t>
+            </a:r>
+            <a:r>
+              <a:rPr lang="en-US" sz="1600" b="0" dirty="0">
+                <a:solidFill>
+                  <a:srgbClr val="000000"/>
+                </a:solidFill>
+                <a:effectLst/>
+                <a:latin typeface="Consolas" panose="020B0609020204030204" pitchFamily="49" charset="0"/>
+              </a:rPr>
+              <a:t>:</a:t>
+            </a:r>
+          </a:p>
+          <a:p>
+            <a:pPr>
+              <a:buNone/>
+            </a:pPr>
+            <a:r>
+              <a:rPr lang="en-US" sz="1600" b="0" dirty="0">
+                <a:solidFill>
+                  <a:srgbClr val="000000"/>
+                </a:solidFill>
+                <a:effectLst/>
+                <a:latin typeface="Consolas" panose="020B0609020204030204" pitchFamily="49" charset="0"/>
+              </a:rPr>
+              <a:t>    Student(</a:t>
+            </a:r>
+            <a:r>
+              <a:rPr lang="en-US" sz="1600" b="0" dirty="0">
+                <a:solidFill>
+                  <a:srgbClr val="0000FF"/>
+                </a:solidFill>
+                <a:effectLst/>
+                <a:latin typeface="Consolas" panose="020B0609020204030204" pitchFamily="49" charset="0"/>
+              </a:rPr>
+              <a:t>const</a:t>
+            </a:r>
+            <a:r>
+              <a:rPr lang="en-US" sz="1600" b="0" dirty="0">
+                <a:solidFill>
+                  <a:srgbClr val="000000"/>
+                </a:solidFill>
+                <a:effectLst/>
+                <a:latin typeface="Consolas" panose="020B0609020204030204" pitchFamily="49" charset="0"/>
+              </a:rPr>
+              <a:t> std::string&amp; name)</a:t>
+            </a:r>
+          </a:p>
+          <a:p>
+            <a:pPr>
+              <a:buNone/>
+            </a:pPr>
+            <a:r>
+              <a:rPr lang="en-US" sz="1600" dirty="0">
+                <a:solidFill>
+                  <a:srgbClr val="000000"/>
+                </a:solidFill>
+                <a:latin typeface="Consolas" panose="020B0609020204030204" pitchFamily="49" charset="0"/>
+              </a:rPr>
+              <a:t>      </a:t>
+            </a:r>
+            <a:r>
+              <a:rPr lang="en-US" sz="1600" b="0" dirty="0">
+                <a:solidFill>
+                  <a:srgbClr val="000000"/>
+                </a:solidFill>
+                <a:effectLst/>
+                <a:latin typeface="Consolas" panose="020B0609020204030204" pitchFamily="49" charset="0"/>
+              </a:rPr>
+              <a:t>: </a:t>
+            </a:r>
+            <a:r>
+              <a:rPr lang="en-US" sz="1600" b="0" dirty="0" err="1">
+                <a:solidFill>
+                  <a:srgbClr val="000000"/>
+                </a:solidFill>
+                <a:effectLst/>
+                <a:latin typeface="Consolas" panose="020B0609020204030204" pitchFamily="49" charset="0"/>
+              </a:rPr>
+              <a:t>m_name</a:t>
+            </a:r>
+            <a:r>
+              <a:rPr lang="en-US" sz="1600" b="0" dirty="0">
+                <a:solidFill>
+                  <a:srgbClr val="000000"/>
+                </a:solidFill>
+                <a:effectLst/>
+                <a:latin typeface="Consolas" panose="020B0609020204030204" pitchFamily="49" charset="0"/>
+              </a:rPr>
+              <a:t>(name), </a:t>
+            </a:r>
+            <a:r>
+              <a:rPr lang="en-US" sz="1600" b="0" dirty="0" err="1">
+                <a:solidFill>
+                  <a:srgbClr val="000000"/>
+                </a:solidFill>
+                <a:effectLst/>
+                <a:latin typeface="Consolas" panose="020B0609020204030204" pitchFamily="49" charset="0"/>
+              </a:rPr>
+              <a:t>m_teacher</a:t>
+            </a:r>
+            <a:r>
+              <a:rPr lang="en-US" sz="1600" b="0" dirty="0">
+                <a:solidFill>
+                  <a:srgbClr val="000000"/>
+                </a:solidFill>
+                <a:effectLst/>
+                <a:latin typeface="Consolas" panose="020B0609020204030204" pitchFamily="49" charset="0"/>
+              </a:rPr>
+              <a:t>(</a:t>
+            </a:r>
+            <a:r>
+              <a:rPr lang="en-US" sz="1600" b="0" dirty="0" err="1">
+                <a:solidFill>
+                  <a:srgbClr val="0000FF"/>
+                </a:solidFill>
+                <a:effectLst/>
+                <a:latin typeface="Consolas" panose="020B0609020204030204" pitchFamily="49" charset="0"/>
+              </a:rPr>
+              <a:t>nullptr</a:t>
+            </a:r>
+            <a:r>
+              <a:rPr lang="en-US" sz="1600" b="0" dirty="0">
+                <a:solidFill>
+                  <a:srgbClr val="000000"/>
+                </a:solidFill>
+                <a:effectLst/>
+                <a:latin typeface="Consolas" panose="020B0609020204030204" pitchFamily="49" charset="0"/>
+              </a:rPr>
+              <a:t>) {}</a:t>
+            </a:r>
+          </a:p>
+          <a:p>
+            <a:pPr>
+              <a:buNone/>
+            </a:pPr>
+            <a:endParaRPr lang="en-US" sz="1600" b="0" dirty="0">
+              <a:solidFill>
+                <a:srgbClr val="000000"/>
+              </a:solidFill>
+              <a:effectLst/>
+              <a:latin typeface="Consolas" panose="020B0609020204030204" pitchFamily="49" charset="0"/>
+            </a:endParaRPr>
+          </a:p>
+          <a:p>
+            <a:pPr>
+              <a:buNone/>
+            </a:pPr>
+            <a:r>
+              <a:rPr lang="en-US" sz="1600" b="0" dirty="0">
+                <a:solidFill>
+                  <a:srgbClr val="000000"/>
+                </a:solidFill>
+                <a:effectLst/>
+                <a:latin typeface="Consolas" panose="020B0609020204030204" pitchFamily="49" charset="0"/>
+              </a:rPr>
+              <a:t>    </a:t>
+            </a:r>
+            <a:r>
+              <a:rPr lang="en-US" sz="1600" b="0" dirty="0">
+                <a:solidFill>
+                  <a:srgbClr val="0000FF"/>
+                </a:solidFill>
+                <a:effectLst/>
+                <a:latin typeface="Consolas" panose="020B0609020204030204" pitchFamily="49" charset="0"/>
+              </a:rPr>
+              <a:t>void</a:t>
+            </a:r>
+            <a:r>
+              <a:rPr lang="en-US" sz="1600" b="0" dirty="0">
+                <a:solidFill>
+                  <a:srgbClr val="000000"/>
+                </a:solidFill>
+                <a:effectLst/>
+                <a:latin typeface="Consolas" panose="020B0609020204030204" pitchFamily="49" charset="0"/>
+              </a:rPr>
+              <a:t> </a:t>
+            </a:r>
+            <a:r>
+              <a:rPr lang="en-US" sz="1600" b="0" dirty="0" err="1">
+                <a:solidFill>
+                  <a:srgbClr val="000000"/>
+                </a:solidFill>
+                <a:effectLst/>
+                <a:latin typeface="Consolas" panose="020B0609020204030204" pitchFamily="49" charset="0"/>
+              </a:rPr>
+              <a:t>SetTeacher</a:t>
+            </a:r>
+            <a:r>
+              <a:rPr lang="en-US" sz="1600" b="0" dirty="0">
+                <a:solidFill>
+                  <a:srgbClr val="000000"/>
+                </a:solidFill>
+                <a:effectLst/>
+                <a:latin typeface="Consolas" panose="020B0609020204030204" pitchFamily="49" charset="0"/>
+              </a:rPr>
+              <a:t>(Teacher* t) {</a:t>
+            </a:r>
+          </a:p>
+          <a:p>
+            <a:pPr>
+              <a:buNone/>
+            </a:pPr>
+            <a:r>
+              <a:rPr lang="en-US" sz="1600" b="0" dirty="0">
+                <a:solidFill>
+                  <a:srgbClr val="000000"/>
+                </a:solidFill>
+                <a:effectLst/>
+                <a:latin typeface="Consolas" panose="020B0609020204030204" pitchFamily="49" charset="0"/>
+              </a:rPr>
+              <a:t>        </a:t>
+            </a:r>
+            <a:r>
+              <a:rPr lang="en-US" sz="1600" b="0" dirty="0" err="1">
+                <a:solidFill>
+                  <a:srgbClr val="000000"/>
+                </a:solidFill>
+                <a:effectLst/>
+                <a:latin typeface="Consolas" panose="020B0609020204030204" pitchFamily="49" charset="0"/>
+              </a:rPr>
+              <a:t>m_teacher</a:t>
+            </a:r>
+            <a:r>
+              <a:rPr lang="en-US" sz="1600" b="0" dirty="0">
+                <a:solidFill>
+                  <a:srgbClr val="000000"/>
+                </a:solidFill>
+                <a:effectLst/>
+                <a:latin typeface="Consolas" panose="020B0609020204030204" pitchFamily="49" charset="0"/>
+              </a:rPr>
+              <a:t> = t;</a:t>
+            </a:r>
+          </a:p>
+          <a:p>
+            <a:pPr>
+              <a:buNone/>
+            </a:pPr>
+            <a:r>
+              <a:rPr lang="en-US" sz="1600" b="0" dirty="0">
+                <a:solidFill>
+                  <a:srgbClr val="000000"/>
+                </a:solidFill>
+                <a:effectLst/>
+                <a:latin typeface="Consolas" panose="020B0609020204030204" pitchFamily="49" charset="0"/>
+              </a:rPr>
+              <a:t>    }</a:t>
+            </a:r>
+          </a:p>
+          <a:p>
+            <a:pPr>
+              <a:buNone/>
+            </a:pPr>
+            <a:endParaRPr lang="en-US" sz="1600" b="0" dirty="0">
+              <a:solidFill>
+                <a:srgbClr val="000000"/>
+              </a:solidFill>
+              <a:effectLst/>
+              <a:latin typeface="Consolas" panose="020B0609020204030204" pitchFamily="49" charset="0"/>
+            </a:endParaRPr>
+          </a:p>
+          <a:p>
+            <a:pPr>
+              <a:buNone/>
+            </a:pPr>
+            <a:r>
+              <a:rPr lang="en-US" sz="1600" b="0" dirty="0">
+                <a:solidFill>
+                  <a:srgbClr val="000000"/>
+                </a:solidFill>
+                <a:effectLst/>
+                <a:latin typeface="Consolas" panose="020B0609020204030204" pitchFamily="49" charset="0"/>
+              </a:rPr>
+              <a:t>    </a:t>
+            </a:r>
+            <a:r>
+              <a:rPr lang="en-US" sz="1600" b="0" dirty="0">
+                <a:solidFill>
+                  <a:srgbClr val="0000FF"/>
+                </a:solidFill>
+                <a:effectLst/>
+                <a:latin typeface="Consolas" panose="020B0609020204030204" pitchFamily="49" charset="0"/>
+              </a:rPr>
+              <a:t>void</a:t>
+            </a:r>
+            <a:r>
+              <a:rPr lang="en-US" sz="1600" b="0" dirty="0">
+                <a:solidFill>
+                  <a:srgbClr val="000000"/>
+                </a:solidFill>
+                <a:effectLst/>
+                <a:latin typeface="Consolas" panose="020B0609020204030204" pitchFamily="49" charset="0"/>
+              </a:rPr>
+              <a:t> Print() </a:t>
+            </a:r>
+            <a:r>
+              <a:rPr lang="en-US" sz="1600" b="0" dirty="0">
+                <a:solidFill>
+                  <a:srgbClr val="0000FF"/>
+                </a:solidFill>
+                <a:effectLst/>
+                <a:latin typeface="Consolas" panose="020B0609020204030204" pitchFamily="49" charset="0"/>
+              </a:rPr>
+              <a:t>const</a:t>
+            </a:r>
+            <a:r>
+              <a:rPr lang="en-US" sz="1600" b="0" dirty="0">
+                <a:solidFill>
+                  <a:srgbClr val="000000"/>
+                </a:solidFill>
+                <a:effectLst/>
+                <a:latin typeface="Consolas" panose="020B0609020204030204" pitchFamily="49" charset="0"/>
+              </a:rPr>
+              <a:t> {</a:t>
+            </a:r>
+          </a:p>
+          <a:p>
+            <a:pPr>
+              <a:buNone/>
+            </a:pPr>
+            <a:r>
+              <a:rPr lang="en-US" sz="1600" b="0" dirty="0">
+                <a:solidFill>
+                  <a:srgbClr val="000000"/>
+                </a:solidFill>
+                <a:effectLst/>
+                <a:latin typeface="Consolas" panose="020B0609020204030204" pitchFamily="49" charset="0"/>
+              </a:rPr>
+              <a:t>        std::</a:t>
+            </a:r>
+            <a:r>
+              <a:rPr lang="en-US" sz="1600" b="0" dirty="0" err="1">
+                <a:solidFill>
+                  <a:srgbClr val="000000"/>
+                </a:solidFill>
+                <a:effectLst/>
+                <a:latin typeface="Consolas" panose="020B0609020204030204" pitchFamily="49" charset="0"/>
+              </a:rPr>
+              <a:t>cout</a:t>
+            </a:r>
+            <a:r>
+              <a:rPr lang="en-US" sz="1600" b="0" dirty="0">
+                <a:solidFill>
+                  <a:srgbClr val="000000"/>
+                </a:solidFill>
+                <a:effectLst/>
+                <a:latin typeface="Consolas" panose="020B0609020204030204" pitchFamily="49" charset="0"/>
+              </a:rPr>
+              <a:t> &lt;&lt; </a:t>
+            </a:r>
+            <a:r>
+              <a:rPr lang="en-US" sz="1600" b="0" dirty="0">
+                <a:solidFill>
+                  <a:srgbClr val="A31515"/>
+                </a:solidFill>
+                <a:effectLst/>
+                <a:latin typeface="Consolas" panose="020B0609020204030204" pitchFamily="49" charset="0"/>
+              </a:rPr>
+              <a:t>"Student: "</a:t>
+            </a:r>
+            <a:r>
+              <a:rPr lang="en-US" sz="1600" b="0" dirty="0">
+                <a:solidFill>
+                  <a:srgbClr val="000000"/>
+                </a:solidFill>
+                <a:effectLst/>
+                <a:latin typeface="Consolas" panose="020B0609020204030204" pitchFamily="49" charset="0"/>
+              </a:rPr>
+              <a:t> &lt;&lt; name</a:t>
+            </a:r>
+          </a:p>
+          <a:p>
+            <a:pPr>
+              <a:buNone/>
+            </a:pPr>
+            <a:r>
+              <a:rPr lang="en-US" sz="1600" dirty="0">
+                <a:solidFill>
+                  <a:srgbClr val="000000"/>
+                </a:solidFill>
+                <a:latin typeface="Consolas" panose="020B0609020204030204" pitchFamily="49" charset="0"/>
+              </a:rPr>
+              <a:t>                  </a:t>
+            </a:r>
+            <a:r>
+              <a:rPr lang="en-US" sz="1600" b="0" dirty="0">
+                <a:solidFill>
+                  <a:srgbClr val="000000"/>
+                </a:solidFill>
+                <a:effectLst/>
+                <a:latin typeface="Consolas" panose="020B0609020204030204" pitchFamily="49" charset="0"/>
+              </a:rPr>
+              <a:t>&lt;&lt; std::</a:t>
+            </a:r>
+            <a:r>
+              <a:rPr lang="en-US" sz="1600" b="0" dirty="0" err="1">
+                <a:solidFill>
+                  <a:srgbClr val="000000"/>
+                </a:solidFill>
+                <a:effectLst/>
+                <a:latin typeface="Consolas" panose="020B0609020204030204" pitchFamily="49" charset="0"/>
+              </a:rPr>
+              <a:t>endl</a:t>
+            </a:r>
+            <a:r>
+              <a:rPr lang="en-US" sz="1600" b="0" dirty="0">
+                <a:solidFill>
+                  <a:srgbClr val="000000"/>
+                </a:solidFill>
+                <a:effectLst/>
+                <a:latin typeface="Consolas" panose="020B0609020204030204" pitchFamily="49" charset="0"/>
+              </a:rPr>
+              <a:t>;</a:t>
+            </a:r>
+          </a:p>
+          <a:p>
+            <a:pPr>
+              <a:buNone/>
+            </a:pPr>
+            <a:r>
+              <a:rPr lang="en-US" sz="1600" b="0" dirty="0">
+                <a:solidFill>
+                  <a:srgbClr val="000000"/>
+                </a:solidFill>
+                <a:effectLst/>
+                <a:latin typeface="Consolas" panose="020B0609020204030204" pitchFamily="49" charset="0"/>
+              </a:rPr>
+              <a:t>    }</a:t>
+            </a:r>
+          </a:p>
+          <a:p>
+            <a:pPr>
+              <a:buNone/>
+            </a:pPr>
+            <a:r>
+              <a:rPr lang="en-US" sz="1600" b="0" dirty="0">
+                <a:solidFill>
+                  <a:srgbClr val="0000FF"/>
+                </a:solidFill>
+                <a:effectLst/>
+                <a:latin typeface="Consolas" panose="020B0609020204030204" pitchFamily="49" charset="0"/>
+              </a:rPr>
+              <a:t>private</a:t>
+            </a:r>
+            <a:r>
+              <a:rPr lang="en-US" sz="1600" b="0" dirty="0">
+                <a:solidFill>
+                  <a:srgbClr val="000000"/>
+                </a:solidFill>
+                <a:effectLst/>
+                <a:latin typeface="Consolas" panose="020B0609020204030204" pitchFamily="49" charset="0"/>
+              </a:rPr>
+              <a:t>:</a:t>
+            </a:r>
+          </a:p>
+          <a:p>
+            <a:pPr>
+              <a:buNone/>
+            </a:pPr>
+            <a:r>
+              <a:rPr lang="en-US" sz="1600" b="0" dirty="0">
+                <a:solidFill>
+                  <a:srgbClr val="000000"/>
+                </a:solidFill>
+                <a:effectLst/>
+                <a:latin typeface="Consolas" panose="020B0609020204030204" pitchFamily="49" charset="0"/>
+              </a:rPr>
+              <a:t>    std::string </a:t>
+            </a:r>
+            <a:r>
+              <a:rPr lang="en-US" sz="1600" b="0" dirty="0" err="1">
+                <a:solidFill>
+                  <a:srgbClr val="000000"/>
+                </a:solidFill>
+                <a:effectLst/>
+                <a:latin typeface="Consolas" panose="020B0609020204030204" pitchFamily="49" charset="0"/>
+              </a:rPr>
+              <a:t>m_name</a:t>
+            </a:r>
+            <a:r>
+              <a:rPr lang="en-US" sz="1600" b="0" dirty="0">
+                <a:solidFill>
+                  <a:srgbClr val="000000"/>
+                </a:solidFill>
+                <a:effectLst/>
+                <a:latin typeface="Consolas" panose="020B0609020204030204" pitchFamily="49" charset="0"/>
+              </a:rPr>
+              <a:t>;</a:t>
+            </a:r>
+          </a:p>
+          <a:p>
+            <a:pPr>
+              <a:buNone/>
+            </a:pPr>
+            <a:r>
+              <a:rPr lang="en-US" sz="1600" b="0" dirty="0">
+                <a:solidFill>
+                  <a:srgbClr val="000000"/>
+                </a:solidFill>
+                <a:effectLst/>
+                <a:latin typeface="Consolas" panose="020B0609020204030204" pitchFamily="49" charset="0"/>
+              </a:rPr>
+              <a:t>    Teacher* </a:t>
+            </a:r>
+            <a:r>
+              <a:rPr lang="en-US" sz="1600" b="0" dirty="0" err="1">
+                <a:solidFill>
+                  <a:srgbClr val="000000"/>
+                </a:solidFill>
+                <a:effectLst/>
+                <a:latin typeface="Consolas" panose="020B0609020204030204" pitchFamily="49" charset="0"/>
+              </a:rPr>
+              <a:t>m_teacher</a:t>
+            </a:r>
+            <a:r>
+              <a:rPr lang="en-US" sz="1600" b="0" dirty="0">
+                <a:solidFill>
+                  <a:srgbClr val="000000"/>
+                </a:solidFill>
+                <a:effectLst/>
+                <a:latin typeface="Consolas" panose="020B0609020204030204" pitchFamily="49" charset="0"/>
+              </a:rPr>
+              <a:t>; </a:t>
+            </a:r>
+            <a:r>
+              <a:rPr lang="en-US" sz="1600" b="0" dirty="0">
+                <a:solidFill>
+                  <a:srgbClr val="008000"/>
+                </a:solidFill>
+                <a:effectLst/>
+                <a:latin typeface="Consolas" panose="020B0609020204030204" pitchFamily="49" charset="0"/>
+              </a:rPr>
+              <a:t>// </a:t>
+            </a:r>
+            <a:r>
+              <a:rPr lang="ru-RU" sz="1600" b="0" dirty="0">
+                <a:solidFill>
+                  <a:srgbClr val="008000"/>
+                </a:solidFill>
+                <a:effectLst/>
+                <a:latin typeface="Consolas" panose="020B0609020204030204" pitchFamily="49" charset="0"/>
+              </a:rPr>
+              <a:t>ассоциация</a:t>
+            </a:r>
+            <a:endParaRPr lang="ru-RU" sz="1600" b="0" dirty="0">
+              <a:solidFill>
+                <a:srgbClr val="000000"/>
+              </a:solidFill>
+              <a:effectLst/>
+              <a:latin typeface="Consolas" panose="020B0609020204030204" pitchFamily="49" charset="0"/>
+            </a:endParaRPr>
+          </a:p>
+          <a:p>
+            <a:pPr>
+              <a:buNone/>
+            </a:pPr>
+            <a:r>
+              <a:rPr lang="ru-RU" sz="1600" b="0" dirty="0">
+                <a:solidFill>
+                  <a:srgbClr val="000000"/>
+                </a:solidFill>
+                <a:effectLst/>
+                <a:latin typeface="Consolas" panose="020B0609020204030204" pitchFamily="49" charset="0"/>
+              </a:rPr>
+              <a:t>};</a:t>
+            </a:r>
+          </a:p>
+        </p:txBody>
+      </p:sp>
+      <p:sp>
+        <p:nvSpPr>
+          <p:cNvPr id="6" name="TextBox 5">
+            <a:extLst>
+              <a:ext uri="{FF2B5EF4-FFF2-40B4-BE49-F238E27FC236}">
+                <a16:creationId xmlns:a16="http://schemas.microsoft.com/office/drawing/2014/main" id="{804CFDD3-D723-9756-B33B-5C01EFB70F49}"/>
+              </a:ext>
+            </a:extLst>
+          </p:cNvPr>
+          <p:cNvSpPr txBox="1"/>
+          <p:nvPr/>
+        </p:nvSpPr>
+        <p:spPr>
+          <a:xfrm>
+            <a:off x="6060597" y="1690688"/>
+            <a:ext cx="6118410" cy="3416320"/>
+          </a:xfrm>
+          <a:prstGeom prst="rect">
+            <a:avLst/>
+          </a:prstGeom>
+          <a:noFill/>
+        </p:spPr>
+        <p:txBody>
+          <a:bodyPr wrap="square">
+            <a:spAutoFit/>
+          </a:bodyPr>
+          <a:lstStyle/>
+          <a:p>
+            <a:pPr>
+              <a:buNone/>
+            </a:pPr>
+            <a:r>
+              <a:rPr lang="en-US" b="0" dirty="0">
+                <a:solidFill>
+                  <a:srgbClr val="0000FF"/>
+                </a:solidFill>
+                <a:effectLst/>
+                <a:latin typeface="Consolas" panose="020B0609020204030204" pitchFamily="49" charset="0"/>
+              </a:rPr>
+              <a:t>class</a:t>
+            </a:r>
+            <a:r>
+              <a:rPr lang="en-US" b="0" dirty="0">
+                <a:solidFill>
+                  <a:srgbClr val="000000"/>
+                </a:solidFill>
+                <a:effectLst/>
+                <a:latin typeface="Consolas" panose="020B0609020204030204" pitchFamily="49" charset="0"/>
+              </a:rPr>
+              <a:t> Teacher {</a:t>
+            </a:r>
+          </a:p>
+          <a:p>
+            <a:pPr>
+              <a:buNone/>
+            </a:pPr>
+            <a:r>
+              <a:rPr lang="en-US" b="0" dirty="0">
+                <a:solidFill>
+                  <a:srgbClr val="0000FF"/>
+                </a:solidFill>
+                <a:effectLst/>
+                <a:latin typeface="Consolas" panose="020B0609020204030204" pitchFamily="49" charset="0"/>
+              </a:rPr>
+              <a:t>public</a:t>
+            </a:r>
+            <a:r>
+              <a:rPr lang="en-US" b="0" dirty="0">
+                <a:solidFill>
+                  <a:srgbClr val="000000"/>
+                </a:solidFill>
+                <a:effectLst/>
+                <a:latin typeface="Consolas" panose="020B0609020204030204" pitchFamily="49" charset="0"/>
+              </a:rPr>
+              <a:t>:</a:t>
+            </a:r>
+          </a:p>
+          <a:p>
+            <a:pPr>
+              <a:buNone/>
+            </a:pPr>
+            <a:r>
+              <a:rPr lang="en-US" b="0" dirty="0">
+                <a:solidFill>
+                  <a:srgbClr val="000000"/>
+                </a:solidFill>
+                <a:effectLst/>
+                <a:latin typeface="Consolas" panose="020B0609020204030204" pitchFamily="49" charset="0"/>
+              </a:rPr>
+              <a:t>    Teacher(</a:t>
+            </a:r>
+            <a:r>
+              <a:rPr lang="en-US" b="0" dirty="0">
+                <a:solidFill>
+                  <a:srgbClr val="0000FF"/>
+                </a:solidFill>
+                <a:effectLst/>
+                <a:latin typeface="Consolas" panose="020B0609020204030204" pitchFamily="49" charset="0"/>
+              </a:rPr>
+              <a:t>const</a:t>
+            </a:r>
+            <a:r>
+              <a:rPr lang="en-US" b="0" dirty="0">
+                <a:solidFill>
+                  <a:srgbClr val="000000"/>
+                </a:solidFill>
+                <a:effectLst/>
+                <a:latin typeface="Consolas" panose="020B0609020204030204" pitchFamily="49" charset="0"/>
+              </a:rPr>
+              <a:t> std::string&amp; name)</a:t>
+            </a:r>
+          </a:p>
+          <a:p>
+            <a:pPr>
+              <a:buNone/>
+            </a:pPr>
+            <a:r>
+              <a:rPr lang="en-US" dirty="0">
+                <a:solidFill>
+                  <a:srgbClr val="000000"/>
+                </a:solidFill>
+                <a:latin typeface="Consolas" panose="020B0609020204030204" pitchFamily="49" charset="0"/>
+              </a:rPr>
+              <a:t>        </a:t>
+            </a:r>
+            <a:r>
+              <a:rPr lang="en-US" b="0" dirty="0">
+                <a:solidFill>
+                  <a:srgbClr val="000000"/>
+                </a:solidFill>
+                <a:effectLst/>
+                <a:latin typeface="Consolas" panose="020B0609020204030204" pitchFamily="49" charset="0"/>
+              </a:rPr>
+              <a:t>: </a:t>
+            </a:r>
+            <a:r>
+              <a:rPr lang="en-US" b="0" dirty="0" err="1">
+                <a:solidFill>
+                  <a:srgbClr val="000000"/>
+                </a:solidFill>
+                <a:effectLst/>
+                <a:latin typeface="Consolas" panose="020B0609020204030204" pitchFamily="49" charset="0"/>
+              </a:rPr>
+              <a:t>m_name</a:t>
+            </a:r>
+            <a:r>
+              <a:rPr lang="en-US" b="0" dirty="0">
+                <a:solidFill>
+                  <a:srgbClr val="000000"/>
+                </a:solidFill>
+                <a:effectLst/>
+                <a:latin typeface="Consolas" panose="020B0609020204030204" pitchFamily="49" charset="0"/>
+              </a:rPr>
+              <a:t>(name) {}</a:t>
+            </a:r>
+          </a:p>
+          <a:p>
+            <a:pPr>
+              <a:buNone/>
+            </a:pPr>
+            <a:endParaRPr lang="en-US" b="0" dirty="0">
+              <a:solidFill>
+                <a:srgbClr val="000000"/>
+              </a:solidFill>
+              <a:effectLst/>
+              <a:latin typeface="Consolas" panose="020B0609020204030204" pitchFamily="49" charset="0"/>
+            </a:endParaRPr>
+          </a:p>
+          <a:p>
+            <a:pPr>
+              <a:buNone/>
+            </a:pPr>
+            <a:r>
+              <a:rPr lang="en-US" b="0" dirty="0">
+                <a:solidFill>
+                  <a:srgbClr val="000000"/>
+                </a:solidFill>
+                <a:effectLst/>
+                <a:latin typeface="Consolas" panose="020B0609020204030204" pitchFamily="49" charset="0"/>
+              </a:rPr>
+              <a:t>    </a:t>
+            </a:r>
+            <a:r>
+              <a:rPr lang="en-US" b="0" dirty="0">
+                <a:solidFill>
+                  <a:srgbClr val="0000FF"/>
+                </a:solidFill>
+                <a:effectLst/>
+                <a:latin typeface="Consolas" panose="020B0609020204030204" pitchFamily="49" charset="0"/>
+              </a:rPr>
+              <a:t>void</a:t>
+            </a:r>
+            <a:r>
+              <a:rPr lang="en-US" b="0" dirty="0">
+                <a:solidFill>
+                  <a:srgbClr val="000000"/>
+                </a:solidFill>
+                <a:effectLst/>
+                <a:latin typeface="Consolas" panose="020B0609020204030204" pitchFamily="49" charset="0"/>
+              </a:rPr>
+              <a:t> Print() </a:t>
+            </a:r>
+            <a:r>
+              <a:rPr lang="en-US" b="0" dirty="0">
+                <a:solidFill>
+                  <a:srgbClr val="0000FF"/>
+                </a:solidFill>
+                <a:effectLst/>
+                <a:latin typeface="Consolas" panose="020B0609020204030204" pitchFamily="49" charset="0"/>
+              </a:rPr>
+              <a:t>const</a:t>
+            </a:r>
+            <a:r>
+              <a:rPr lang="en-US" b="0" dirty="0">
+                <a:solidFill>
+                  <a:srgbClr val="000000"/>
+                </a:solidFill>
+                <a:effectLst/>
+                <a:latin typeface="Consolas" panose="020B0609020204030204" pitchFamily="49" charset="0"/>
+              </a:rPr>
+              <a:t> {</a:t>
+            </a:r>
+          </a:p>
+          <a:p>
+            <a:pPr>
+              <a:buNone/>
+            </a:pPr>
+            <a:r>
+              <a:rPr lang="en-US" b="0" dirty="0">
+                <a:solidFill>
+                  <a:srgbClr val="000000"/>
+                </a:solidFill>
+                <a:effectLst/>
+                <a:latin typeface="Consolas" panose="020B0609020204030204" pitchFamily="49" charset="0"/>
+              </a:rPr>
+              <a:t>        std::</a:t>
+            </a:r>
+            <a:r>
+              <a:rPr lang="en-US" b="0" dirty="0" err="1">
+                <a:solidFill>
+                  <a:srgbClr val="000000"/>
+                </a:solidFill>
+                <a:effectLst/>
+                <a:latin typeface="Consolas" panose="020B0609020204030204" pitchFamily="49" charset="0"/>
+              </a:rPr>
+              <a:t>cout</a:t>
+            </a:r>
+            <a:r>
+              <a:rPr lang="en-US" b="0" dirty="0">
+                <a:solidFill>
+                  <a:srgbClr val="000000"/>
+                </a:solidFill>
+                <a:effectLst/>
+                <a:latin typeface="Consolas" panose="020B0609020204030204" pitchFamily="49" charset="0"/>
+              </a:rPr>
+              <a:t> &lt;&lt; </a:t>
+            </a:r>
+            <a:r>
+              <a:rPr lang="en-US" b="0" dirty="0">
+                <a:solidFill>
+                  <a:srgbClr val="A31515"/>
+                </a:solidFill>
+                <a:effectLst/>
+                <a:latin typeface="Consolas" panose="020B0609020204030204" pitchFamily="49" charset="0"/>
+              </a:rPr>
+              <a:t>"Teacher: "</a:t>
+            </a:r>
+            <a:r>
+              <a:rPr lang="en-US" b="0" dirty="0">
+                <a:solidFill>
+                  <a:srgbClr val="000000"/>
+                </a:solidFill>
+                <a:effectLst/>
+                <a:latin typeface="Consolas" panose="020B0609020204030204" pitchFamily="49" charset="0"/>
+              </a:rPr>
+              <a:t> &lt;&lt; </a:t>
+            </a:r>
+            <a:r>
+              <a:rPr lang="en-US" b="0" dirty="0" err="1">
+                <a:solidFill>
+                  <a:srgbClr val="000000"/>
+                </a:solidFill>
+                <a:effectLst/>
+                <a:latin typeface="Consolas" panose="020B0609020204030204" pitchFamily="49" charset="0"/>
+              </a:rPr>
+              <a:t>m_name</a:t>
+            </a:r>
+            <a:endParaRPr lang="en-US" dirty="0">
+              <a:solidFill>
+                <a:srgbClr val="000000"/>
+              </a:solidFill>
+              <a:latin typeface="Consolas" panose="020B0609020204030204" pitchFamily="49" charset="0"/>
+            </a:endParaRPr>
+          </a:p>
+          <a:p>
+            <a:pPr>
+              <a:buNone/>
+            </a:pPr>
+            <a:r>
+              <a:rPr lang="en-US" b="0" dirty="0">
+                <a:solidFill>
+                  <a:srgbClr val="000000"/>
+                </a:solidFill>
+                <a:effectLst/>
+                <a:latin typeface="Consolas" panose="020B0609020204030204" pitchFamily="49" charset="0"/>
+              </a:rPr>
+              <a:t>                  &lt;&lt; std::</a:t>
+            </a:r>
+            <a:r>
+              <a:rPr lang="en-US" b="0" dirty="0" err="1">
+                <a:solidFill>
+                  <a:srgbClr val="000000"/>
+                </a:solidFill>
+                <a:effectLst/>
+                <a:latin typeface="Consolas" panose="020B0609020204030204" pitchFamily="49" charset="0"/>
+              </a:rPr>
+              <a:t>endl</a:t>
+            </a:r>
+            <a:r>
+              <a:rPr lang="en-US" b="0" dirty="0">
+                <a:solidFill>
+                  <a:srgbClr val="000000"/>
+                </a:solidFill>
+                <a:effectLst/>
+                <a:latin typeface="Consolas" panose="020B0609020204030204" pitchFamily="49" charset="0"/>
+              </a:rPr>
+              <a:t>;</a:t>
+            </a:r>
+          </a:p>
+          <a:p>
+            <a:pPr>
+              <a:buNone/>
+            </a:pPr>
+            <a:r>
+              <a:rPr lang="en-US" b="0" dirty="0">
+                <a:solidFill>
+                  <a:srgbClr val="000000"/>
+                </a:solidFill>
+                <a:effectLst/>
+                <a:latin typeface="Consolas" panose="020B0609020204030204" pitchFamily="49" charset="0"/>
+              </a:rPr>
+              <a:t>    }</a:t>
+            </a:r>
+          </a:p>
+          <a:p>
+            <a:pPr>
+              <a:buNone/>
+            </a:pPr>
+            <a:r>
+              <a:rPr lang="en-US" b="0" dirty="0">
+                <a:solidFill>
+                  <a:srgbClr val="0000FF"/>
+                </a:solidFill>
+                <a:effectLst/>
+                <a:latin typeface="Consolas" panose="020B0609020204030204" pitchFamily="49" charset="0"/>
+              </a:rPr>
+              <a:t>private</a:t>
+            </a:r>
+            <a:r>
+              <a:rPr lang="en-US" b="0" dirty="0">
+                <a:solidFill>
+                  <a:srgbClr val="000000"/>
+                </a:solidFill>
+                <a:effectLst/>
+                <a:latin typeface="Consolas" panose="020B0609020204030204" pitchFamily="49" charset="0"/>
+              </a:rPr>
+              <a:t>:</a:t>
+            </a:r>
+          </a:p>
+          <a:p>
+            <a:pPr>
+              <a:buNone/>
+            </a:pPr>
+            <a:r>
+              <a:rPr lang="en-US" b="0" dirty="0">
+                <a:solidFill>
+                  <a:srgbClr val="000000"/>
+                </a:solidFill>
+                <a:effectLst/>
+                <a:latin typeface="Consolas" panose="020B0609020204030204" pitchFamily="49" charset="0"/>
+              </a:rPr>
+              <a:t>    std::string </a:t>
+            </a:r>
+            <a:r>
+              <a:rPr lang="en-US" b="0" dirty="0" err="1">
+                <a:solidFill>
+                  <a:srgbClr val="000000"/>
+                </a:solidFill>
+                <a:effectLst/>
+                <a:latin typeface="Consolas" panose="020B0609020204030204" pitchFamily="49" charset="0"/>
+              </a:rPr>
+              <a:t>m_name</a:t>
+            </a:r>
+            <a:r>
+              <a:rPr lang="en-US" b="0" dirty="0">
+                <a:solidFill>
+                  <a:srgbClr val="000000"/>
+                </a:solidFill>
+                <a:effectLst/>
+                <a:latin typeface="Consolas" panose="020B0609020204030204" pitchFamily="49" charset="0"/>
+              </a:rPr>
+              <a:t>;</a:t>
+            </a:r>
+          </a:p>
+          <a:p>
+            <a:pPr>
+              <a:buNone/>
+            </a:pPr>
+            <a:r>
+              <a:rPr lang="en-US" b="0" dirty="0">
+                <a:solidFill>
+                  <a:srgbClr val="000000"/>
+                </a:solidFill>
+                <a:effectLst/>
+                <a:latin typeface="Consolas" panose="020B0609020204030204" pitchFamily="49" charset="0"/>
+              </a:rPr>
+              <a:t>};</a:t>
+            </a:r>
+          </a:p>
+        </p:txBody>
+      </p:sp>
+    </p:spTree>
+    <p:extLst>
+      <p:ext uri="{BB962C8B-B14F-4D97-AF65-F5344CB8AC3E}">
+        <p14:creationId xmlns:p14="http://schemas.microsoft.com/office/powerpoint/2010/main" val="2246737595"/>
+      </p:ext>
+    </p:extLst>
+  </p:cSld>
+  <p:clrMapOvr>
+    <a:masterClrMapping/>
+  </p:clrMapOvr>
+</p:sld>
+</file>
+
+<file path=ppt/slides/slide8.xml><?xml version="1.0" encoding="utf-8"?>
 <p:sld xmlns:a="http://schemas.openxmlformats.org/drawingml/2006/main" xmlns:r="http://schemas.openxmlformats.org/officeDocument/2006/relationships" xmlns:p="http://schemas.openxmlformats.org/presentationml/2006/main">
   <p:cSld>
     <p:spTree>
@@ -15701,6 +18879,9 @@
         </p:txBody>
       </p:sp>
     </p:spTree>
+    <p:custDataLst>
+      <p:tags r:id="rId1"/>
+    </p:custDataLst>
     <p:extLst>
       <p:ext uri="{BB962C8B-B14F-4D97-AF65-F5344CB8AC3E}">
         <p14:creationId xmlns:p14="http://schemas.microsoft.com/office/powerpoint/2010/main" val="2121645404"/>
@@ -15713,7 +18894,7 @@
 </p:sld>
 </file>
 
-<file path=ppt/slides/slide8.xml><?xml version="1.0" encoding="utf-8"?>
+<file path=ppt/slides/slide9.xml><?xml version="1.0" encoding="utf-8"?>
 <p:sld xmlns:a="http://schemas.openxmlformats.org/drawingml/2006/main" xmlns:r="http://schemas.openxmlformats.org/officeDocument/2006/relationships" xmlns:p="http://schemas.openxmlformats.org/presentationml/2006/main">
   <p:cSld>
     <p:spTree>
@@ -15753,8 +18934,13 @@
           <a:p>
             <a:r>
               <a:rPr lang="ru-RU" dirty="0"/>
-              <a:t>Композиция</a:t>
-            </a:r>
+              <a:t>Композиция (</a:t>
+            </a:r>
+            <a:r>
+              <a:rPr lang="en-US" dirty="0"/>
+              <a:t>composition)</a:t>
+            </a:r>
+            <a:endParaRPr lang="ru-RU" dirty="0"/>
           </a:p>
         </p:txBody>
       </p:sp>
@@ -15776,71 +18962,129 @@
         </p:nvSpPr>
         <p:spPr/>
         <p:txBody>
-          <a:bodyPr/>
+          <a:bodyPr>
+            <a:normAutofit fontScale="77500" lnSpcReduction="20000"/>
+          </a:bodyPr>
           <a:lstStyle/>
           <a:p>
             <a:r>
               <a:rPr lang="ru-RU" dirty="0"/>
-              <a:t>Отношение, при котором один объект является </a:t>
-            </a:r>
+              <a:t>Сильная связь: отношение «часть–целое» с владением (</a:t>
+            </a:r>
+            <a:r>
+              <a:rPr lang="ru-RU" dirty="0" err="1"/>
+              <a:t>ownership</a:t>
+            </a:r>
+            <a:r>
+              <a:rPr lang="ru-RU" dirty="0"/>
+              <a:t>)</a:t>
+            </a:r>
+          </a:p>
+          <a:p>
             <a:r>
               <a:rPr lang="ru-RU" b="1" dirty="0"/>
-              <a:t>Частью</a:t>
-            </a:r>
-            <a:r>
-              <a:rPr lang="ru-RU" dirty="0"/>
-              <a:t> другого, составного объекта</a:t>
-            </a:r>
-          </a:p>
-          <a:p>
-            <a:r>
-              <a:rPr lang="ru-RU" dirty="0"/>
-              <a:t>Часть в один момент времени принадлежит только одному составному объекту</a:t>
-            </a:r>
-          </a:p>
-          <a:p>
-            <a:r>
-              <a:rPr lang="ru-RU" dirty="0"/>
-              <a:t>Составной объект управляет своими частями.</a:t>
-            </a:r>
+              <a:t>Ключевые свойства:</a:t>
+            </a:r>
+            <a:endParaRPr lang="ru-RU" dirty="0"/>
           </a:p>
           <a:p>
             <a:pPr lvl="1"/>
             <a:r>
               <a:rPr lang="ru-RU" dirty="0"/>
-              <a:t>Часть удаляется при удалении объекта</a:t>
-            </a:r>
-          </a:p>
-          <a:p>
-            <a:r>
-              <a:rPr lang="ru-RU" dirty="0"/>
-              <a:t>Часть обычно не знает о том, в состав каких объектов она входит</a:t>
-            </a:r>
-          </a:p>
-          <a:p>
-            <a:r>
-              <a:rPr lang="ru-RU" dirty="0"/>
-              <a:t>В </a:t>
-            </a:r>
-            <a:r>
-              <a:rPr lang="en-US" dirty="0"/>
-              <a:t>C++</a:t>
-            </a:r>
-            <a:r>
-              <a:rPr lang="ru-RU" dirty="0"/>
-              <a:t> классы обычно используют композицию</a:t>
+              <a:t>Объект состоит из частей </a:t>
             </a:r>
           </a:p>
           <a:p>
             <a:pPr lvl="1"/>
             <a:r>
               <a:rPr lang="ru-RU" dirty="0"/>
-              <a:t>Один класс выступает в роли поля другого</a:t>
+              <a:t>✅ Есть владение (</a:t>
+            </a:r>
+            <a:r>
+              <a:rPr lang="ru-RU" dirty="0" err="1"/>
+              <a:t>ownership</a:t>
+            </a:r>
+            <a:r>
+              <a:rPr lang="ru-RU" dirty="0"/>
+              <a:t>) </a:t>
+            </a:r>
+          </a:p>
+          <a:p>
+            <a:pPr lvl="1"/>
+            <a:r>
+              <a:rPr lang="ru-RU" dirty="0"/>
+              <a:t>Общий жизненный цикл </a:t>
+            </a:r>
+          </a:p>
+          <a:p>
+            <a:pPr lvl="1"/>
+            <a:r>
+              <a:rPr lang="ru-RU" dirty="0"/>
+              <a:t>Часть принадлежит только одному объекту </a:t>
+            </a:r>
+          </a:p>
+          <a:p>
+            <a:r>
+              <a:rPr lang="ru-RU" b="1" dirty="0"/>
+              <a:t>Жизненный цикл:</a:t>
+            </a:r>
+            <a:endParaRPr lang="ru-RU" dirty="0"/>
+          </a:p>
+          <a:p>
+            <a:pPr lvl="1"/>
+            <a:r>
+              <a:rPr lang="ru-RU" dirty="0"/>
+              <a:t>Создаётся вместе с целым </a:t>
+            </a:r>
+          </a:p>
+          <a:p>
+            <a:pPr lvl="1"/>
+            <a:r>
+              <a:rPr lang="ru-RU" dirty="0"/>
+              <a:t>Удаляется вместе с целым </a:t>
+            </a:r>
+          </a:p>
+          <a:p>
+            <a:r>
+              <a:rPr lang="ru-RU" b="1" dirty="0"/>
+              <a:t>Особенности:</a:t>
+            </a:r>
+            <a:endParaRPr lang="ru-RU" dirty="0"/>
+          </a:p>
+          <a:p>
+            <a:pPr lvl="1"/>
+            <a:r>
+              <a:rPr lang="ru-RU" dirty="0"/>
+              <a:t>Часть обычно не знает о целом </a:t>
+            </a:r>
+          </a:p>
+          <a:p>
+            <a:pPr lvl="1"/>
+            <a:r>
+              <a:rPr lang="ru-RU" dirty="0"/>
+              <a:t>Нельзя «разделить» часть между объектами </a:t>
+            </a:r>
+          </a:p>
+          <a:p>
+            <a:r>
+              <a:rPr lang="ru-RU" b="1" dirty="0"/>
+              <a:t>Реализация в C++:</a:t>
+            </a:r>
+            <a:endParaRPr lang="ru-RU" dirty="0"/>
+          </a:p>
+          <a:p>
+            <a:pPr lvl="1"/>
+            <a:r>
+              <a:rPr lang="ru-RU" dirty="0"/>
+              <a:t>поле класса (по значению) </a:t>
             </a:r>
           </a:p>
         </p:txBody>
       </p:sp>
     </p:spTree>
+    <p:custDataLst>
+      <p:tags r:id="rId1"/>
+    </p:custDataLst>
     <p:extLst>
       <p:ext uri="{BB962C8B-B14F-4D97-AF65-F5344CB8AC3E}">
         <p14:creationId xmlns:p14="http://schemas.microsoft.com/office/powerpoint/2010/main" val="318098086"/>
@@ -15974,33 +19218,15 @@
                                   </p:childTnLst>
                                 </p:cTn>
                               </p:par>
-                            </p:childTnLst>
-                          </p:cTn>
-                        </p:par>
-                      </p:childTnLst>
-                    </p:cTn>
-                  </p:par>
-                  <p:par>
-                    <p:cTn id="13" fill="hold">
-                      <p:stCondLst>
-                        <p:cond delay="indefinite"/>
-                      </p:stCondLst>
-                      <p:childTnLst>
-                        <p:par>
-                          <p:cTn id="14" fill="hold">
-                            <p:stCondLst>
-                              <p:cond delay="0"/>
-                            </p:stCondLst>
-                            <p:childTnLst>
                               <p:par>
-                                <p:cTn id="15" presetID="10" presetClass="entr" presetSubtype="0" fill="hold" grpId="0" nodeType="clickEffect">
+                                <p:cTn id="13" presetID="10" presetClass="entr" presetSubtype="0" fill="hold" grpId="0" nodeType="withEffect">
                                   <p:stCondLst>
                                     <p:cond delay="0"/>
                                   </p:stCondLst>
                                   <p:childTnLst>
                                     <p:set>
                                       <p:cBhvr>
-                                        <p:cTn id="16" dur="1" fill="hold">
+                                        <p:cTn id="14" dur="1" fill="hold">
                                           <p:stCondLst>
                                             <p:cond delay="0"/>
                                           </p:stCondLst>
@@ -16022,7 +19248,7 @@
                                     </p:set>
                                     <p:animEffect transition="in" filter="fade">
                                       <p:cBhvr>
-                                        <p:cTn id="17" dur="500"/>
+                                        <p:cTn id="15" dur="500"/>
                                         <p:tgtEl>
                                           <p:spTgt spid="3">
                                             <p:txEl>
@@ -16036,14 +19262,14 @@
                                 </p:cTn>
                               </p:par>
                               <p:par>
-                                <p:cTn id="18" presetID="10" presetClass="entr" presetSubtype="0" fill="hold" grpId="0" nodeType="withEffect">
+                                <p:cTn id="16" presetID="10" presetClass="entr" presetSubtype="0" fill="hold" grpId="0" nodeType="withEffect">
                                   <p:stCondLst>
                                     <p:cond delay="0"/>
                                   </p:stCondLst>
                                   <p:childTnLst>
                                     <p:set>
                                       <p:cBhvr>
-                                        <p:cTn id="19" dur="1" fill="hold">
+                                        <p:cTn id="17" dur="1" fill="hold">
                                           <p:stCondLst>
                                             <p:cond delay="0"/>
                                           </p:stCondLst>
@@ -16065,7 +19291,7 @@
                                     </p:set>
                                     <p:animEffect transition="in" filter="fade">
                                       <p:cBhvr>
-                                        <p:cTn id="20" dur="500"/>
+                                        <p:cTn id="18" dur="500"/>
                                         <p:tgtEl>
                                           <p:spTgt spid="3">
                                             <p:txEl>
@@ -16078,33 +19304,15 @@
                                   </p:childTnLst>
                                 </p:cTn>
                               </p:par>
-                            </p:childTnLst>
-                          </p:cTn>
-                        </p:par>
-                      </p:childTnLst>
-                    </p:cTn>
-                  </p:par>
-                  <p:par>
-                    <p:cTn id="21" fill="hold">
-                      <p:stCondLst>
-                        <p:cond delay="indefinite"/>
-                      </p:stCondLst>
-                      <p:childTnLst>
-                        <p:par>
-                          <p:cTn id="22" fill="hold">
-                            <p:stCondLst>
-                              <p:cond delay="0"/>
-                            </p:stCondLst>
-                            <p:childTnLst>
                               <p:par>
-                                <p:cTn id="23" presetID="10" presetClass="entr" presetSubtype="0" fill="hold" grpId="0" nodeType="clickEffect">
+                                <p:cTn id="19" presetID="10" presetClass="entr" presetSubtype="0" fill="hold" grpId="0" nodeType="withEffect">
                                   <p:stCondLst>
                                     <p:cond delay="0"/>
                                   </p:stCondLst>
                                   <p:childTnLst>
                                     <p:set>
                                       <p:cBhvr>
-                                        <p:cTn id="24" dur="1" fill="hold">
+                                        <p:cTn id="20" dur="1" fill="hold">
                                           <p:stCondLst>
                                             <p:cond delay="0"/>
                                           </p:stCondLst>
@@ -16126,7 +19334,7 @@
                                     </p:set>
                                     <p:animEffect transition="in" filter="fade">
                                       <p:cBhvr>
-                                        <p:cTn id="25" dur="500"/>
+                                        <p:cTn id="21" dur="500"/>
                                         <p:tgtEl>
                                           <p:spTgt spid="3">
                                             <p:txEl>
@@ -16139,33 +19347,15 @@
                                   </p:childTnLst>
                                 </p:cTn>
                               </p:par>
-                            </p:childTnLst>
-                          </p:cTn>
-                        </p:par>
-                      </p:childTnLst>
-                    </p:cTn>
-                  </p:par>
-                  <p:par>
-                    <p:cTn id="26" fill="hold">
-                      <p:stCondLst>
-                        <p:cond delay="indefinite"/>
-                      </p:stCondLst>
-                      <p:childTnLst>
-                        <p:par>
-                          <p:cTn id="27" fill="hold">
-                            <p:stCondLst>
-                              <p:cond delay="0"/>
-                            </p:stCondLst>
-                            <p:childTnLst>
                               <p:par>
-                                <p:cTn id="28" presetID="10" presetClass="entr" presetSubtype="0" fill="hold" grpId="0" nodeType="clickEffect">
+                                <p:cTn id="22" presetID="10" presetClass="entr" presetSubtype="0" fill="hold" grpId="0" nodeType="withEffect">
                                   <p:stCondLst>
                                     <p:cond delay="0"/>
                                   </p:stCondLst>
                                   <p:childTnLst>
                                     <p:set>
                                       <p:cBhvr>
-                                        <p:cTn id="29" dur="1" fill="hold">
+                                        <p:cTn id="23" dur="1" fill="hold">
                                           <p:stCondLst>
                                             <p:cond delay="0"/>
                                           </p:stCondLst>
@@ -16187,7 +19377,7 @@
                                     </p:set>
                                     <p:animEffect transition="in" filter="fade">
                                       <p:cBhvr>
-                                        <p:cTn id="30" dur="500"/>
+                                        <p:cTn id="24" dur="500"/>
                                         <p:tgtEl>
                                           <p:spTgt spid="3">
                                             <p:txEl>
@@ -16200,15 +19390,33 @@
                                   </p:childTnLst>
                                 </p:cTn>
                               </p:par>
+                            </p:childTnLst>
+                          </p:cTn>
+                        </p:par>
+                      </p:childTnLst>
+                    </p:cTn>
+                  </p:par>
+                  <p:par>
+                    <p:cTn id="25" fill="hold">
+                      <p:stCondLst>
+                        <p:cond delay="indefinite"/>
+                      </p:stCondLst>
+                      <p:childTnLst>
+                        <p:par>
+                          <p:cTn id="26" fill="hold">
+                            <p:stCondLst>
+                              <p:cond delay="0"/>
+                            </p:stCondLst>
+                            <p:childTnLst>
                               <p:par>
-                                <p:cTn id="31" presetID="10" presetClass="entr" presetSubtype="0" fill="hold" grpId="0" nodeType="withEffect">
+                                <p:cTn id="27" presetID="10" presetClass="entr" presetSubtype="0" fill="hold" grpId="0" nodeType="clickEffect">
                                   <p:stCondLst>
                                     <p:cond delay="0"/>
                                   </p:stCondLst>
                                   <p:childTnLst>
                                     <p:set>
                                       <p:cBhvr>
-                                        <p:cTn id="32" dur="1" fill="hold">
+                                        <p:cTn id="28" dur="1" fill="hold">
                                           <p:stCondLst>
                                             <p:cond delay="0"/>
                                           </p:stCondLst>
@@ -16230,11 +19438,348 @@
                                     </p:set>
                                     <p:animEffect transition="in" filter="fade">
                                       <p:cBhvr>
-                                        <p:cTn id="33" dur="500"/>
+                                        <p:cTn id="29" dur="500"/>
                                         <p:tgtEl>
                                           <p:spTgt spid="3">
                                             <p:txEl>
                                               <p:pRg st="6" end="6"/>
+                                            </p:txEl>
+                                          </p:spTgt>
+                                        </p:tgtEl>
+                                      </p:cBhvr>
+                                    </p:animEffect>
+                                  </p:childTnLst>
+                                </p:cTn>
+                              </p:par>
+                              <p:par>
+                                <p:cTn id="30" presetID="10" presetClass="entr" presetSubtype="0" fill="hold" grpId="0" nodeType="withEffect">
+                                  <p:stCondLst>
+                                    <p:cond delay="0"/>
+                                  </p:stCondLst>
+                                  <p:childTnLst>
+                                    <p:set>
+                                      <p:cBhvr>
+                                        <p:cTn id="31" dur="1" fill="hold">
+                                          <p:stCondLst>
+                                            <p:cond delay="0"/>
+                                          </p:stCondLst>
+                                        </p:cTn>
+                                        <p:tgtEl>
+                                          <p:spTgt spid="3">
+                                            <p:txEl>
+                                              <p:pRg st="7" end="7"/>
+                                            </p:txEl>
+                                          </p:spTgt>
+                                        </p:tgtEl>
+                                        <p:attrNameLst>
+                                          <p:attrName>style.visibility</p:attrName>
+                                        </p:attrNameLst>
+                                      </p:cBhvr>
+                                      <p:to>
+                                        <p:strVal val="visible"/>
+                                      </p:to>
+                                    </p:set>
+                                    <p:animEffect transition="in" filter="fade">
+                                      <p:cBhvr>
+                                        <p:cTn id="32" dur="500"/>
+                                        <p:tgtEl>
+                                          <p:spTgt spid="3">
+                                            <p:txEl>
+                                              <p:pRg st="7" end="7"/>
+                                            </p:txEl>
+                                          </p:spTgt>
+                                        </p:tgtEl>
+                                      </p:cBhvr>
+                                    </p:animEffect>
+                                  </p:childTnLst>
+                                </p:cTn>
+                              </p:par>
+                              <p:par>
+                                <p:cTn id="33" presetID="10" presetClass="entr" presetSubtype="0" fill="hold" grpId="0" nodeType="withEffect">
+                                  <p:stCondLst>
+                                    <p:cond delay="0"/>
+                                  </p:stCondLst>
+                                  <p:childTnLst>
+                                    <p:set>
+                                      <p:cBhvr>
+                                        <p:cTn id="34" dur="1" fill="hold">
+                                          <p:stCondLst>
+                                            <p:cond delay="0"/>
+                                          </p:stCondLst>
+                                        </p:cTn>
+                                        <p:tgtEl>
+                                          <p:spTgt spid="3">
+                                            <p:txEl>
+                                              <p:pRg st="8" end="8"/>
+                                            </p:txEl>
+                                          </p:spTgt>
+                                        </p:tgtEl>
+                                        <p:attrNameLst>
+                                          <p:attrName>style.visibility</p:attrName>
+                                        </p:attrNameLst>
+                                      </p:cBhvr>
+                                      <p:to>
+                                        <p:strVal val="visible"/>
+                                      </p:to>
+                                    </p:set>
+                                    <p:animEffect transition="in" filter="fade">
+                                      <p:cBhvr>
+                                        <p:cTn id="35" dur="500"/>
+                                        <p:tgtEl>
+                                          <p:spTgt spid="3">
+                                            <p:txEl>
+                                              <p:pRg st="8" end="8"/>
+                                            </p:txEl>
+                                          </p:spTgt>
+                                        </p:tgtEl>
+                                      </p:cBhvr>
+                                    </p:animEffect>
+                                  </p:childTnLst>
+                                </p:cTn>
+                              </p:par>
+                            </p:childTnLst>
+                          </p:cTn>
+                        </p:par>
+                      </p:childTnLst>
+                    </p:cTn>
+                  </p:par>
+                  <p:par>
+                    <p:cTn id="36" fill="hold">
+                      <p:stCondLst>
+                        <p:cond delay="indefinite"/>
+                      </p:stCondLst>
+                      <p:childTnLst>
+                        <p:par>
+                          <p:cTn id="37" fill="hold">
+                            <p:stCondLst>
+                              <p:cond delay="0"/>
+                            </p:stCondLst>
+                            <p:childTnLst>
+                              <p:par>
+                                <p:cTn id="38" presetID="10" presetClass="entr" presetSubtype="0" fill="hold" grpId="0" nodeType="clickEffect">
+                                  <p:stCondLst>
+                                    <p:cond delay="0"/>
+                                  </p:stCondLst>
+                                  <p:childTnLst>
+                                    <p:set>
+                                      <p:cBhvr>
+                                        <p:cTn id="39" dur="1" fill="hold">
+                                          <p:stCondLst>
+                                            <p:cond delay="0"/>
+                                          </p:stCondLst>
+                                        </p:cTn>
+                                        <p:tgtEl>
+                                          <p:spTgt spid="3">
+                                            <p:txEl>
+                                              <p:pRg st="9" end="9"/>
+                                            </p:txEl>
+                                          </p:spTgt>
+                                        </p:tgtEl>
+                                        <p:attrNameLst>
+                                          <p:attrName>style.visibility</p:attrName>
+                                        </p:attrNameLst>
+                                      </p:cBhvr>
+                                      <p:to>
+                                        <p:strVal val="visible"/>
+                                      </p:to>
+                                    </p:set>
+                                    <p:animEffect transition="in" filter="fade">
+                                      <p:cBhvr>
+                                        <p:cTn id="40" dur="500"/>
+                                        <p:tgtEl>
+                                          <p:spTgt spid="3">
+                                            <p:txEl>
+                                              <p:pRg st="9" end="9"/>
+                                            </p:txEl>
+                                          </p:spTgt>
+                                        </p:tgtEl>
+                                      </p:cBhvr>
+                                    </p:animEffect>
+                                  </p:childTnLst>
+                                </p:cTn>
+                              </p:par>
+                              <p:par>
+                                <p:cTn id="41" presetID="10" presetClass="entr" presetSubtype="0" fill="hold" grpId="0" nodeType="withEffect">
+                                  <p:stCondLst>
+                                    <p:cond delay="0"/>
+                                  </p:stCondLst>
+                                  <p:childTnLst>
+                                    <p:set>
+                                      <p:cBhvr>
+                                        <p:cTn id="42" dur="1" fill="hold">
+                                          <p:stCondLst>
+                                            <p:cond delay="0"/>
+                                          </p:stCondLst>
+                                        </p:cTn>
+                                        <p:tgtEl>
+                                          <p:spTgt spid="3">
+                                            <p:txEl>
+                                              <p:pRg st="10" end="10"/>
+                                            </p:txEl>
+                                          </p:spTgt>
+                                        </p:tgtEl>
+                                        <p:attrNameLst>
+                                          <p:attrName>style.visibility</p:attrName>
+                                        </p:attrNameLst>
+                                      </p:cBhvr>
+                                      <p:to>
+                                        <p:strVal val="visible"/>
+                                      </p:to>
+                                    </p:set>
+                                    <p:animEffect transition="in" filter="fade">
+                                      <p:cBhvr>
+                                        <p:cTn id="43" dur="500"/>
+                                        <p:tgtEl>
+                                          <p:spTgt spid="3">
+                                            <p:txEl>
+                                              <p:pRg st="10" end="10"/>
+                                            </p:txEl>
+                                          </p:spTgt>
+                                        </p:tgtEl>
+                                      </p:cBhvr>
+                                    </p:animEffect>
+                                  </p:childTnLst>
+                                </p:cTn>
+                              </p:par>
+                              <p:par>
+                                <p:cTn id="44" presetID="10" presetClass="entr" presetSubtype="0" fill="hold" grpId="0" nodeType="withEffect">
+                                  <p:stCondLst>
+                                    <p:cond delay="0"/>
+                                  </p:stCondLst>
+                                  <p:childTnLst>
+                                    <p:set>
+                                      <p:cBhvr>
+                                        <p:cTn id="45" dur="1" fill="hold">
+                                          <p:stCondLst>
+                                            <p:cond delay="0"/>
+                                          </p:stCondLst>
+                                        </p:cTn>
+                                        <p:tgtEl>
+                                          <p:spTgt spid="3">
+                                            <p:txEl>
+                                              <p:pRg st="11" end="11"/>
+                                            </p:txEl>
+                                          </p:spTgt>
+                                        </p:tgtEl>
+                                        <p:attrNameLst>
+                                          <p:attrName>style.visibility</p:attrName>
+                                        </p:attrNameLst>
+                                      </p:cBhvr>
+                                      <p:to>
+                                        <p:strVal val="visible"/>
+                                      </p:to>
+                                    </p:set>
+                                    <p:animEffect transition="in" filter="fade">
+                                      <p:cBhvr>
+                                        <p:cTn id="46" dur="500"/>
+                                        <p:tgtEl>
+                                          <p:spTgt spid="3">
+                                            <p:txEl>
+                                              <p:pRg st="11" end="11"/>
+                                            </p:txEl>
+                                          </p:spTgt>
+                                        </p:tgtEl>
+                                      </p:cBhvr>
+                                    </p:animEffect>
+                                  </p:childTnLst>
+                                </p:cTn>
+                              </p:par>
+                            </p:childTnLst>
+                          </p:cTn>
+                        </p:par>
+                      </p:childTnLst>
+                    </p:cTn>
+                  </p:par>
+                  <p:par>
+                    <p:cTn id="47" fill="hold">
+                      <p:stCondLst>
+                        <p:cond delay="indefinite"/>
+                      </p:stCondLst>
+                      <p:childTnLst>
+                        <p:par>
+                          <p:cTn id="48" fill="hold">
+                            <p:stCondLst>
+                              <p:cond delay="0"/>
+                            </p:stCondLst>
+                            <p:childTnLst>
+                              <p:par>
+                                <p:cTn id="49" presetID="10" presetClass="entr" presetSubtype="0" fill="hold" grpId="0" nodeType="clickEffect">
+                                  <p:stCondLst>
+                                    <p:cond delay="0"/>
+                                  </p:stCondLst>
+                                  <p:childTnLst>
+                                    <p:set>
+                                      <p:cBhvr>
+                                        <p:cTn id="50" dur="1" fill="hold">
+                                          <p:stCondLst>
+                                            <p:cond delay="0"/>
+                                          </p:stCondLst>
+                                        </p:cTn>
+                                        <p:tgtEl>
+                                          <p:spTgt spid="3">
+                                            <p:txEl>
+                                              <p:pRg st="12" end="12"/>
+                                            </p:txEl>
+                                          </p:spTgt>
+                                        </p:tgtEl>
+                                        <p:attrNameLst>
+                                          <p:attrName>style.visibility</p:attrName>
+                                        </p:attrNameLst>
+                                      </p:cBhvr>
+                                      <p:to>
+                                        <p:strVal val="visible"/>
+                                      </p:to>
+                                    </p:set>
+                                    <p:animEffect transition="in" filter="fade">
+                                      <p:cBhvr>
+                                        <p:cTn id="51" dur="500"/>
+                                        <p:tgtEl>
+                                          <p:spTgt spid="3">
+                                            <p:txEl>
+                                              <p:pRg st="12" end="12"/>
+                                            </p:txEl>
+                                          </p:spTgt>
+                                        </p:tgtEl>
+                                      </p:cBhvr>
+                                    </p:animEffect>
+                                  </p:childTnLst>
+                                </p:cTn>
+                              </p:par>
+                              <p:par>
+                                <p:cTn id="52" presetID="10" presetClass="entr" presetSubtype="0" fill="hold" grpId="0" nodeType="withEffect">
+                                  <p:stCondLst>
+                                    <p:cond delay="0"/>
+                                  </p:stCondLst>
+                                  <p:childTnLst>
+                                    <p:set>
+                                      <p:cBhvr>
+                                        <p:cTn id="53" dur="1" fill="hold">
+                                          <p:stCondLst>
+                                            <p:cond delay="0"/>
+                                          </p:stCondLst>
+                                        </p:cTn>
+                                        <p:tgtEl>
+                                          <p:spTgt spid="3">
+                                            <p:txEl>
+                                              <p:pRg st="13" end="13"/>
+                                            </p:txEl>
+                                          </p:spTgt>
+                                        </p:tgtEl>
+                                        <p:attrNameLst>
+                                          <p:attrName>style.visibility</p:attrName>
+                                        </p:attrNameLst>
+                                      </p:cBhvr>
+                                      <p:to>
+                                        <p:strVal val="visible"/>
+                                      </p:to>
+                                    </p:set>
+                                    <p:animEffect transition="in" filter="fade">
+                                      <p:cBhvr>
+                                        <p:cTn id="54" dur="500"/>
+                                        <p:tgtEl>
+                                          <p:spTgt spid="3">
+                                            <p:txEl>
+                                              <p:pRg st="13" end="13"/>
                                             </p:txEl>
                                           </p:spTgt>
                                         </p:tgtEl>
@@ -16277,734 +19822,184 @@
 </p:sld>
 </file>
 
-<file path=ppt/slides/slide9.xml><?xml version="1.0" encoding="utf-8"?>
-<p:sld xmlns:a="http://schemas.openxmlformats.org/drawingml/2006/main" xmlns:r="http://schemas.openxmlformats.org/officeDocument/2006/relationships" xmlns:p="http://schemas.openxmlformats.org/presentationml/2006/main">
-  <p:cSld>
-    <p:spTree>
-      <p:nvGrpSpPr>
-        <p:cNvPr id="1" name=""/>
-        <p:cNvGrpSpPr/>
-        <p:nvPr/>
-      </p:nvGrpSpPr>
-      <p:grpSpPr>
-        <a:xfrm>
-          <a:off x="0" y="0"/>
-          <a:ext cx="0" cy="0"/>
-          <a:chOff x="0" y="0"/>
-          <a:chExt cx="0" cy="0"/>
-        </a:xfrm>
-      </p:grpSpPr>
-      <p:sp>
-        <p:nvSpPr>
-          <p:cNvPr id="2" name="Заголовок 1">
-            <a:extLst>
-              <a:ext uri="{FF2B5EF4-FFF2-40B4-BE49-F238E27FC236}">
-                <a16:creationId xmlns:a16="http://schemas.microsoft.com/office/drawing/2014/main" id="{3F7EDF0C-5F6E-4497-A839-4FCA94CDB171}"/>
-              </a:ext>
-            </a:extLst>
-          </p:cNvPr>
-          <p:cNvSpPr>
-            <a:spLocks noGrp="1"/>
-          </p:cNvSpPr>
-          <p:nvPr>
-            <p:ph type="title"/>
-          </p:nvPr>
-        </p:nvSpPr>
-        <p:spPr/>
-        <p:txBody>
-          <a:bodyPr/>
-          <a:lstStyle/>
-          <a:p>
-            <a:r>
-              <a:rPr lang="ru-RU" dirty="0"/>
-              <a:t>Примеры</a:t>
-            </a:r>
-          </a:p>
-        </p:txBody>
-      </p:sp>
-      <p:sp>
-        <p:nvSpPr>
-          <p:cNvPr id="3" name="Объект 2">
-            <a:extLst>
-              <a:ext uri="{FF2B5EF4-FFF2-40B4-BE49-F238E27FC236}">
-                <a16:creationId xmlns:a16="http://schemas.microsoft.com/office/drawing/2014/main" id="{4F76F067-A745-4012-8CF4-6EB40B0AB0D1}"/>
-              </a:ext>
-            </a:extLst>
-          </p:cNvPr>
-          <p:cNvSpPr>
-            <a:spLocks noGrp="1"/>
-          </p:cNvSpPr>
-          <p:nvPr>
-            <p:ph idx="1"/>
-          </p:nvPr>
-        </p:nvSpPr>
-        <p:spPr>
-          <a:xfrm>
-            <a:off x="838200" y="1825625"/>
-            <a:ext cx="6553944" cy="4351338"/>
-          </a:xfrm>
-        </p:spPr>
-        <p:txBody>
-          <a:bodyPr>
-            <a:normAutofit fontScale="92500"/>
-          </a:bodyPr>
-          <a:lstStyle/>
-          <a:p>
-            <a:r>
-              <a:rPr lang="ru-RU" dirty="0"/>
-              <a:t>Точка на плоскости</a:t>
-            </a:r>
-          </a:p>
-          <a:p>
-            <a:pPr lvl="1"/>
-            <a:r>
-              <a:rPr lang="ru-RU" dirty="0"/>
-              <a:t>Пара чисел, задающих координаты точки</a:t>
-            </a:r>
-          </a:p>
-          <a:p>
-            <a:r>
-              <a:rPr lang="ru-RU" dirty="0"/>
-              <a:t>Окружность</a:t>
-            </a:r>
-          </a:p>
-          <a:p>
-            <a:pPr lvl="1"/>
-            <a:r>
-              <a:rPr lang="ru-RU" dirty="0"/>
-              <a:t>Точка (центр) и число (радиус)</a:t>
-            </a:r>
-          </a:p>
-          <a:p>
-            <a:r>
-              <a:rPr lang="ru-RU" dirty="0"/>
-              <a:t>Класс комплексных чисел</a:t>
-            </a:r>
-          </a:p>
-          <a:p>
-            <a:pPr lvl="1"/>
-            <a:r>
-              <a:rPr lang="ru-RU" dirty="0"/>
-              <a:t>Действительная и мнимая часть</a:t>
-            </a:r>
-            <a:endParaRPr lang="en-US" dirty="0"/>
-          </a:p>
-          <a:p>
-            <a:r>
-              <a:rPr lang="ru-RU" dirty="0"/>
-              <a:t>Класс рациональных чисел</a:t>
-            </a:r>
-          </a:p>
-          <a:p>
-            <a:pPr lvl="1"/>
-            <a:r>
-              <a:rPr lang="ru-RU" dirty="0"/>
-              <a:t>Пара целых чисел - числитель и знаменатель</a:t>
-            </a:r>
-          </a:p>
-          <a:p>
-            <a:r>
-              <a:rPr lang="ru-RU" dirty="0"/>
-              <a:t>Многоугольник</a:t>
-            </a:r>
-          </a:p>
-          <a:p>
-            <a:pPr lvl="1"/>
-            <a:r>
-              <a:rPr lang="ru-RU" dirty="0"/>
-              <a:t>Координаты вершин</a:t>
-            </a:r>
-          </a:p>
-        </p:txBody>
-      </p:sp>
-      <p:sp>
-        <p:nvSpPr>
-          <p:cNvPr id="7" name="TextBox 6">
-            <a:extLst>
-              <a:ext uri="{FF2B5EF4-FFF2-40B4-BE49-F238E27FC236}">
-                <a16:creationId xmlns:a16="http://schemas.microsoft.com/office/drawing/2014/main" id="{0104880E-E7E2-4F8C-80D3-DB6BEC83767B}"/>
-              </a:ext>
-            </a:extLst>
-          </p:cNvPr>
-          <p:cNvSpPr txBox="1"/>
-          <p:nvPr/>
-        </p:nvSpPr>
-        <p:spPr>
-          <a:xfrm>
-            <a:off x="7536160" y="548680"/>
-            <a:ext cx="4557119" cy="6186309"/>
-          </a:xfrm>
-          <a:prstGeom prst="rect">
-            <a:avLst/>
-          </a:prstGeom>
-          <a:noFill/>
-        </p:spPr>
-        <p:txBody>
-          <a:bodyPr wrap="square">
-            <a:spAutoFit/>
-          </a:bodyPr>
-          <a:lstStyle/>
-          <a:p>
-            <a:r>
-              <a:rPr lang="en-US" b="0" dirty="0">
-                <a:solidFill>
-                  <a:srgbClr val="0000FF"/>
-                </a:solidFill>
-                <a:effectLst/>
-                <a:latin typeface="Consolas" panose="020B0609020204030204" pitchFamily="49" charset="0"/>
-              </a:rPr>
-              <a:t>struct</a:t>
-            </a:r>
-            <a:r>
-              <a:rPr lang="en-US" b="0" dirty="0">
-                <a:solidFill>
-                  <a:srgbClr val="000000"/>
-                </a:solidFill>
-                <a:effectLst/>
-                <a:latin typeface="Consolas" panose="020B0609020204030204" pitchFamily="49" charset="0"/>
-              </a:rPr>
-              <a:t> Point {</a:t>
-            </a:r>
-          </a:p>
-          <a:p>
-            <a:r>
-              <a:rPr lang="en-US" b="0" dirty="0">
-                <a:solidFill>
-                  <a:srgbClr val="000000"/>
-                </a:solidFill>
-                <a:effectLst/>
-                <a:latin typeface="Consolas" panose="020B0609020204030204" pitchFamily="49" charset="0"/>
-              </a:rPr>
-              <a:t>  </a:t>
-            </a:r>
-            <a:r>
-              <a:rPr lang="en-US" b="0" dirty="0">
-                <a:solidFill>
-                  <a:srgbClr val="0000FF"/>
-                </a:solidFill>
-                <a:effectLst/>
-                <a:latin typeface="Consolas" panose="020B0609020204030204" pitchFamily="49" charset="0"/>
-              </a:rPr>
-              <a:t>double</a:t>
-            </a:r>
-            <a:r>
-              <a:rPr lang="en-US" b="0" dirty="0">
-                <a:solidFill>
-                  <a:srgbClr val="000000"/>
-                </a:solidFill>
-                <a:effectLst/>
-                <a:latin typeface="Consolas" panose="020B0609020204030204" pitchFamily="49" charset="0"/>
-              </a:rPr>
-              <a:t> x, y;</a:t>
-            </a:r>
-          </a:p>
-          <a:p>
-            <a:r>
-              <a:rPr lang="en-US" b="0" dirty="0">
-                <a:solidFill>
-                  <a:srgbClr val="000000"/>
-                </a:solidFill>
-                <a:effectLst/>
-                <a:latin typeface="Consolas" panose="020B0609020204030204" pitchFamily="49" charset="0"/>
-              </a:rPr>
-              <a:t>};</a:t>
-            </a:r>
-          </a:p>
-          <a:p>
-            <a:br>
-              <a:rPr lang="en-US" b="0" dirty="0">
-                <a:solidFill>
-                  <a:srgbClr val="000000"/>
-                </a:solidFill>
-                <a:effectLst/>
-                <a:latin typeface="Consolas" panose="020B0609020204030204" pitchFamily="49" charset="0"/>
-              </a:rPr>
-            </a:br>
-            <a:r>
-              <a:rPr lang="en-US" b="0" dirty="0">
-                <a:solidFill>
-                  <a:srgbClr val="0000FF"/>
-                </a:solidFill>
-                <a:effectLst/>
-                <a:latin typeface="Consolas" panose="020B0609020204030204" pitchFamily="49" charset="0"/>
-              </a:rPr>
-              <a:t>class</a:t>
-            </a:r>
-            <a:r>
-              <a:rPr lang="en-US" b="0" dirty="0">
-                <a:solidFill>
-                  <a:srgbClr val="000000"/>
-                </a:solidFill>
-                <a:effectLst/>
-                <a:latin typeface="Consolas" panose="020B0609020204030204" pitchFamily="49" charset="0"/>
-              </a:rPr>
-              <a:t> Circle {</a:t>
-            </a:r>
-          </a:p>
-          <a:p>
-            <a:r>
-              <a:rPr lang="en-US" b="0" dirty="0">
-                <a:solidFill>
-                  <a:srgbClr val="000000"/>
-                </a:solidFill>
-                <a:effectLst/>
-                <a:latin typeface="Consolas" panose="020B0609020204030204" pitchFamily="49" charset="0"/>
-              </a:rPr>
-              <a:t>  Point </a:t>
-            </a:r>
-            <a:r>
-              <a:rPr lang="en-US" b="0" dirty="0" err="1">
-                <a:solidFill>
-                  <a:srgbClr val="000000"/>
-                </a:solidFill>
-                <a:effectLst/>
-                <a:latin typeface="Consolas" panose="020B0609020204030204" pitchFamily="49" charset="0"/>
-              </a:rPr>
-              <a:t>m_center</a:t>
-            </a:r>
-            <a:r>
-              <a:rPr lang="en-US" b="0" dirty="0">
-                <a:solidFill>
-                  <a:srgbClr val="000000"/>
-                </a:solidFill>
-                <a:effectLst/>
-                <a:latin typeface="Consolas" panose="020B0609020204030204" pitchFamily="49" charset="0"/>
-              </a:rPr>
-              <a:t>;</a:t>
-            </a:r>
-          </a:p>
-          <a:p>
-            <a:r>
-              <a:rPr lang="en-US" b="0" dirty="0">
-                <a:solidFill>
-                  <a:srgbClr val="000000"/>
-                </a:solidFill>
-                <a:effectLst/>
-                <a:latin typeface="Consolas" panose="020B0609020204030204" pitchFamily="49" charset="0"/>
-              </a:rPr>
-              <a:t>  </a:t>
-            </a:r>
-            <a:r>
-              <a:rPr lang="en-US" b="0" dirty="0">
-                <a:solidFill>
-                  <a:srgbClr val="0000FF"/>
-                </a:solidFill>
-                <a:effectLst/>
-                <a:latin typeface="Consolas" panose="020B0609020204030204" pitchFamily="49" charset="0"/>
-              </a:rPr>
-              <a:t>double</a:t>
-            </a:r>
-            <a:r>
-              <a:rPr lang="en-US" b="0" dirty="0">
-                <a:solidFill>
-                  <a:srgbClr val="000000"/>
-                </a:solidFill>
-                <a:effectLst/>
-                <a:latin typeface="Consolas" panose="020B0609020204030204" pitchFamily="49" charset="0"/>
-              </a:rPr>
-              <a:t> </a:t>
-            </a:r>
-            <a:r>
-              <a:rPr lang="en-US" b="0" dirty="0" err="1">
-                <a:solidFill>
-                  <a:srgbClr val="000000"/>
-                </a:solidFill>
-                <a:effectLst/>
-                <a:latin typeface="Consolas" panose="020B0609020204030204" pitchFamily="49" charset="0"/>
-              </a:rPr>
-              <a:t>m_radius</a:t>
-            </a:r>
-            <a:r>
-              <a:rPr lang="en-US" b="0" dirty="0">
-                <a:solidFill>
-                  <a:srgbClr val="000000"/>
-                </a:solidFill>
-                <a:effectLst/>
-                <a:latin typeface="Consolas" panose="020B0609020204030204" pitchFamily="49" charset="0"/>
-              </a:rPr>
-              <a:t>;</a:t>
-            </a:r>
-          </a:p>
-          <a:p>
-            <a:r>
-              <a:rPr lang="en-US" b="0" dirty="0">
-                <a:solidFill>
-                  <a:srgbClr val="000000"/>
-                </a:solidFill>
-                <a:effectLst/>
-                <a:latin typeface="Consolas" panose="020B0609020204030204" pitchFamily="49" charset="0"/>
-              </a:rPr>
-              <a:t>};</a:t>
-            </a:r>
-          </a:p>
-          <a:p>
-            <a:br>
-              <a:rPr lang="en-US" b="0" dirty="0">
-                <a:solidFill>
-                  <a:srgbClr val="000000"/>
-                </a:solidFill>
-                <a:effectLst/>
-                <a:latin typeface="Consolas" panose="020B0609020204030204" pitchFamily="49" charset="0"/>
-              </a:rPr>
-            </a:br>
-            <a:r>
-              <a:rPr lang="en-US" b="0" dirty="0">
-                <a:solidFill>
-                  <a:srgbClr val="0000FF"/>
-                </a:solidFill>
-                <a:effectLst/>
-                <a:latin typeface="Consolas" panose="020B0609020204030204" pitchFamily="49" charset="0"/>
-              </a:rPr>
-              <a:t>struct</a:t>
-            </a:r>
-            <a:r>
-              <a:rPr lang="en-US" b="0" dirty="0">
-                <a:solidFill>
-                  <a:srgbClr val="000000"/>
-                </a:solidFill>
-                <a:effectLst/>
-                <a:latin typeface="Consolas" panose="020B0609020204030204" pitchFamily="49" charset="0"/>
-              </a:rPr>
-              <a:t> Complex {</a:t>
-            </a:r>
-          </a:p>
-          <a:p>
-            <a:r>
-              <a:rPr lang="en-US" b="0" dirty="0">
-                <a:solidFill>
-                  <a:srgbClr val="000000"/>
-                </a:solidFill>
-                <a:effectLst/>
-                <a:latin typeface="Consolas" panose="020B0609020204030204" pitchFamily="49" charset="0"/>
-              </a:rPr>
-              <a:t>  </a:t>
-            </a:r>
-            <a:r>
-              <a:rPr lang="en-US" b="0" dirty="0">
-                <a:solidFill>
-                  <a:srgbClr val="0000FF"/>
-                </a:solidFill>
-                <a:effectLst/>
-                <a:latin typeface="Consolas" panose="020B0609020204030204" pitchFamily="49" charset="0"/>
-              </a:rPr>
-              <a:t>double</a:t>
-            </a:r>
-            <a:r>
-              <a:rPr lang="en-US" b="0" dirty="0">
-                <a:solidFill>
-                  <a:srgbClr val="000000"/>
-                </a:solidFill>
-                <a:effectLst/>
-                <a:latin typeface="Consolas" panose="020B0609020204030204" pitchFamily="49" charset="0"/>
-              </a:rPr>
-              <a:t> real;</a:t>
-            </a:r>
-          </a:p>
-          <a:p>
-            <a:r>
-              <a:rPr lang="en-US" b="0" dirty="0">
-                <a:solidFill>
-                  <a:srgbClr val="000000"/>
-                </a:solidFill>
-                <a:effectLst/>
-                <a:latin typeface="Consolas" panose="020B0609020204030204" pitchFamily="49" charset="0"/>
-              </a:rPr>
-              <a:t>  </a:t>
-            </a:r>
-            <a:r>
-              <a:rPr lang="en-US" b="0" dirty="0">
-                <a:solidFill>
-                  <a:srgbClr val="0000FF"/>
-                </a:solidFill>
-                <a:effectLst/>
-                <a:latin typeface="Consolas" panose="020B0609020204030204" pitchFamily="49" charset="0"/>
-              </a:rPr>
-              <a:t>double</a:t>
-            </a:r>
-            <a:r>
-              <a:rPr lang="en-US" b="0" dirty="0">
-                <a:solidFill>
-                  <a:srgbClr val="000000"/>
-                </a:solidFill>
-                <a:effectLst/>
-                <a:latin typeface="Consolas" panose="020B0609020204030204" pitchFamily="49" charset="0"/>
-              </a:rPr>
-              <a:t> </a:t>
-            </a:r>
-            <a:r>
-              <a:rPr lang="en-US" b="0" dirty="0" err="1">
-                <a:solidFill>
-                  <a:srgbClr val="000000"/>
-                </a:solidFill>
-                <a:effectLst/>
-                <a:latin typeface="Consolas" panose="020B0609020204030204" pitchFamily="49" charset="0"/>
-              </a:rPr>
-              <a:t>im</a:t>
-            </a:r>
-            <a:r>
-              <a:rPr lang="en-US" b="0" dirty="0">
-                <a:solidFill>
-                  <a:srgbClr val="000000"/>
-                </a:solidFill>
-                <a:effectLst/>
-                <a:latin typeface="Consolas" panose="020B0609020204030204" pitchFamily="49" charset="0"/>
-              </a:rPr>
-              <a:t>;</a:t>
-            </a:r>
-          </a:p>
-          <a:p>
-            <a:r>
-              <a:rPr lang="en-US" b="0" dirty="0">
-                <a:solidFill>
-                  <a:srgbClr val="000000"/>
-                </a:solidFill>
-                <a:effectLst/>
-                <a:latin typeface="Consolas" panose="020B0609020204030204" pitchFamily="49" charset="0"/>
-              </a:rPr>
-              <a:t>};</a:t>
-            </a:r>
-          </a:p>
-          <a:p>
-            <a:br>
-              <a:rPr lang="en-US" b="0" dirty="0">
-                <a:solidFill>
-                  <a:srgbClr val="000000"/>
-                </a:solidFill>
-                <a:effectLst/>
-                <a:latin typeface="Consolas" panose="020B0609020204030204" pitchFamily="49" charset="0"/>
-              </a:rPr>
-            </a:br>
-            <a:r>
-              <a:rPr lang="en-US" b="0" dirty="0">
-                <a:solidFill>
-                  <a:srgbClr val="0000FF"/>
-                </a:solidFill>
-                <a:effectLst/>
-                <a:latin typeface="Consolas" panose="020B0609020204030204" pitchFamily="49" charset="0"/>
-              </a:rPr>
-              <a:t>class</a:t>
-            </a:r>
-            <a:r>
-              <a:rPr lang="en-US" b="0" dirty="0">
-                <a:solidFill>
-                  <a:srgbClr val="000000"/>
-                </a:solidFill>
-                <a:effectLst/>
-                <a:latin typeface="Consolas" panose="020B0609020204030204" pitchFamily="49" charset="0"/>
-              </a:rPr>
-              <a:t> Rational {</a:t>
-            </a:r>
-          </a:p>
-          <a:p>
-            <a:r>
-              <a:rPr lang="en-US" b="0" dirty="0">
-                <a:solidFill>
-                  <a:srgbClr val="000000"/>
-                </a:solidFill>
-                <a:effectLst/>
-                <a:latin typeface="Consolas" panose="020B0609020204030204" pitchFamily="49" charset="0"/>
-              </a:rPr>
-              <a:t>  </a:t>
-            </a:r>
-            <a:r>
-              <a:rPr lang="en-US" b="0" dirty="0">
-                <a:solidFill>
-                  <a:srgbClr val="0000FF"/>
-                </a:solidFill>
-                <a:effectLst/>
-                <a:latin typeface="Consolas" panose="020B0609020204030204" pitchFamily="49" charset="0"/>
-              </a:rPr>
-              <a:t>int</a:t>
-            </a:r>
-            <a:r>
-              <a:rPr lang="en-US" b="0" dirty="0">
-                <a:solidFill>
-                  <a:srgbClr val="000000"/>
-                </a:solidFill>
-                <a:effectLst/>
-                <a:latin typeface="Consolas" panose="020B0609020204030204" pitchFamily="49" charset="0"/>
-              </a:rPr>
-              <a:t> </a:t>
-            </a:r>
-            <a:r>
-              <a:rPr lang="en-US" b="0" dirty="0" err="1">
-                <a:solidFill>
-                  <a:srgbClr val="000000"/>
-                </a:solidFill>
-                <a:effectLst/>
-                <a:latin typeface="Consolas" panose="020B0609020204030204" pitchFamily="49" charset="0"/>
-              </a:rPr>
-              <a:t>m_numerator</a:t>
-            </a:r>
-            <a:r>
-              <a:rPr lang="en-US" b="0" dirty="0">
-                <a:solidFill>
-                  <a:srgbClr val="000000"/>
-                </a:solidFill>
-                <a:effectLst/>
-                <a:latin typeface="Consolas" panose="020B0609020204030204" pitchFamily="49" charset="0"/>
-              </a:rPr>
-              <a:t>;</a:t>
-            </a:r>
-          </a:p>
-          <a:p>
-            <a:r>
-              <a:rPr lang="en-US" b="0" dirty="0">
-                <a:solidFill>
-                  <a:srgbClr val="000000"/>
-                </a:solidFill>
-                <a:effectLst/>
-                <a:latin typeface="Consolas" panose="020B0609020204030204" pitchFamily="49" charset="0"/>
-              </a:rPr>
-              <a:t>  </a:t>
-            </a:r>
-            <a:r>
-              <a:rPr lang="en-US" b="0" dirty="0">
-                <a:solidFill>
-                  <a:srgbClr val="0000FF"/>
-                </a:solidFill>
-                <a:effectLst/>
-                <a:latin typeface="Consolas" panose="020B0609020204030204" pitchFamily="49" charset="0"/>
-              </a:rPr>
-              <a:t>int</a:t>
-            </a:r>
-            <a:r>
-              <a:rPr lang="en-US" b="0" dirty="0">
-                <a:solidFill>
-                  <a:srgbClr val="000000"/>
-                </a:solidFill>
-                <a:effectLst/>
-                <a:latin typeface="Consolas" panose="020B0609020204030204" pitchFamily="49" charset="0"/>
-              </a:rPr>
-              <a:t> </a:t>
-            </a:r>
-            <a:r>
-              <a:rPr lang="en-US" b="0" dirty="0" err="1">
-                <a:solidFill>
-                  <a:srgbClr val="000000"/>
-                </a:solidFill>
-                <a:effectLst/>
-                <a:latin typeface="Consolas" panose="020B0609020204030204" pitchFamily="49" charset="0"/>
-              </a:rPr>
-              <a:t>m_denominator</a:t>
-            </a:r>
-            <a:r>
-              <a:rPr lang="en-US" b="0" dirty="0">
-                <a:solidFill>
-                  <a:srgbClr val="000000"/>
-                </a:solidFill>
-                <a:effectLst/>
-                <a:latin typeface="Consolas" panose="020B0609020204030204" pitchFamily="49" charset="0"/>
-              </a:rPr>
-              <a:t>;</a:t>
-            </a:r>
-          </a:p>
-          <a:p>
-            <a:r>
-              <a:rPr lang="en-US" b="0" dirty="0">
-                <a:solidFill>
-                  <a:srgbClr val="000000"/>
-                </a:solidFill>
-                <a:effectLst/>
-                <a:latin typeface="Consolas" panose="020B0609020204030204" pitchFamily="49" charset="0"/>
-              </a:rPr>
-              <a:t>};</a:t>
-            </a:r>
-          </a:p>
-          <a:p>
-            <a:br>
-              <a:rPr lang="en-US" b="0" dirty="0">
-                <a:solidFill>
-                  <a:srgbClr val="000000"/>
-                </a:solidFill>
-                <a:effectLst/>
-                <a:latin typeface="Consolas" panose="020B0609020204030204" pitchFamily="49" charset="0"/>
-              </a:rPr>
-            </a:br>
-            <a:r>
-              <a:rPr lang="en-US" b="0" dirty="0">
-                <a:solidFill>
-                  <a:srgbClr val="0000FF"/>
-                </a:solidFill>
-                <a:effectLst/>
-                <a:latin typeface="Consolas" panose="020B0609020204030204" pitchFamily="49" charset="0"/>
-              </a:rPr>
-              <a:t>class</a:t>
-            </a:r>
-            <a:r>
-              <a:rPr lang="en-US" b="0" dirty="0">
-                <a:solidFill>
-                  <a:srgbClr val="000000"/>
-                </a:solidFill>
-                <a:effectLst/>
-                <a:latin typeface="Consolas" panose="020B0609020204030204" pitchFamily="49" charset="0"/>
-              </a:rPr>
-              <a:t> Polygon {</a:t>
-            </a:r>
-          </a:p>
-          <a:p>
-            <a:r>
-              <a:rPr lang="en-US" b="0" dirty="0">
-                <a:solidFill>
-                  <a:srgbClr val="000000"/>
-                </a:solidFill>
-                <a:effectLst/>
-                <a:latin typeface="Consolas" panose="020B0609020204030204" pitchFamily="49" charset="0"/>
-              </a:rPr>
-              <a:t>  std::vector&lt;Point&gt; </a:t>
-            </a:r>
-            <a:r>
-              <a:rPr lang="en-US" b="0" dirty="0" err="1">
-                <a:solidFill>
-                  <a:srgbClr val="000000"/>
-                </a:solidFill>
-                <a:effectLst/>
-                <a:latin typeface="Consolas" panose="020B0609020204030204" pitchFamily="49" charset="0"/>
-              </a:rPr>
-              <a:t>m_vertices</a:t>
-            </a:r>
-            <a:r>
-              <a:rPr lang="en-US" b="0" dirty="0">
-                <a:solidFill>
-                  <a:srgbClr val="000000"/>
-                </a:solidFill>
-                <a:effectLst/>
-                <a:latin typeface="Consolas" panose="020B0609020204030204" pitchFamily="49" charset="0"/>
-              </a:rPr>
-              <a:t>;</a:t>
-            </a:r>
-          </a:p>
-          <a:p>
-            <a:r>
-              <a:rPr lang="en-US" b="0" dirty="0">
-                <a:solidFill>
-                  <a:srgbClr val="000000"/>
-                </a:solidFill>
-                <a:effectLst/>
-                <a:latin typeface="Consolas" panose="020B0609020204030204" pitchFamily="49" charset="0"/>
-              </a:rPr>
-              <a:t>};</a:t>
-            </a:r>
-          </a:p>
-        </p:txBody>
-      </p:sp>
-    </p:spTree>
-    <p:extLst>
-      <p:ext uri="{BB962C8B-B14F-4D97-AF65-F5344CB8AC3E}">
-        <p14:creationId xmlns:p14="http://schemas.microsoft.com/office/powerpoint/2010/main" val="3886857560"/>
-      </p:ext>
-    </p:extLst>
-  </p:cSld>
-  <p:clrMapOvr>
-    <a:masterClrMapping/>
-  </p:clrMapOvr>
-</p:sld>
-</file>
-
 <file path=ppt/tags/tag1.xml><?xml version="1.0" encoding="utf-8"?>
 <p:tagLst xmlns:a="http://schemas.openxmlformats.org/drawingml/2006/main" xmlns:r="http://schemas.openxmlformats.org/officeDocument/2006/relationships" xmlns:p="http://schemas.openxmlformats.org/presentationml/2006/main">
   <p:tag name="ISPRING_RESOURCE_PATHS_HASH_2" val="a7197b217475d3226aebdae81613cffabc9f2799"/>
   <p:tag name="ISPRING_RESOURCE_PATHS_HASH_PRESENTER" val="ba372758fdf4f0c1ea3984f80cf9416459824ea"/>
+</p:tagLst>
+</file>
+
+<file path=ppt/tags/tag10.xml><?xml version="1.0" encoding="utf-8"?>
+<p:tagLst xmlns:a="http://schemas.openxmlformats.org/drawingml/2006/main" xmlns:r="http://schemas.openxmlformats.org/officeDocument/2006/relationships" xmlns:p="http://schemas.openxmlformats.org/presentationml/2006/main">
+  <p:tag name="GENSWF_SLIDE_UID" val="{9A9032B0-4C20-47B8-B244-2F5A415CD059}:356"/>
+</p:tagLst>
+</file>
+
+<file path=ppt/tags/tag11.xml><?xml version="1.0" encoding="utf-8"?>
+<p:tagLst xmlns:a="http://schemas.openxmlformats.org/drawingml/2006/main" xmlns:r="http://schemas.openxmlformats.org/officeDocument/2006/relationships" xmlns:p="http://schemas.openxmlformats.org/presentationml/2006/main">
+  <p:tag name="GENSWF_SLIDE_UID" val="{5E443E5D-520C-4F61-8353-C9017603A5A8}:357"/>
+</p:tagLst>
+</file>
+
+<file path=ppt/tags/tag12.xml><?xml version="1.0" encoding="utf-8"?>
+<p:tagLst xmlns:a="http://schemas.openxmlformats.org/drawingml/2006/main" xmlns:r="http://schemas.openxmlformats.org/officeDocument/2006/relationships" xmlns:p="http://schemas.openxmlformats.org/presentationml/2006/main">
+  <p:tag name="GENSWF_SLIDE_UID" val="{B455F6FA-6578-4145-ADF1-733352071034}:358"/>
+</p:tagLst>
+</file>
+
+<file path=ppt/tags/tag13.xml><?xml version="1.0" encoding="utf-8"?>
+<p:tagLst xmlns:a="http://schemas.openxmlformats.org/drawingml/2006/main" xmlns:r="http://schemas.openxmlformats.org/officeDocument/2006/relationships" xmlns:p="http://schemas.openxmlformats.org/presentationml/2006/main">
+  <p:tag name="GENSWF_SLIDE_UID" val="{B2CC5A91-8563-43D0-95A8-B0A467F712B0}:359"/>
+</p:tagLst>
+</file>
+
+<file path=ppt/tags/tag14.xml><?xml version="1.0" encoding="utf-8"?>
+<p:tagLst xmlns:a="http://schemas.openxmlformats.org/drawingml/2006/main" xmlns:r="http://schemas.openxmlformats.org/officeDocument/2006/relationships" xmlns:p="http://schemas.openxmlformats.org/presentationml/2006/main">
+  <p:tag name="GENSWF_SLIDE_UID" val="{590A9B20-5CB4-4604-9399-69D5B2411D90}:360"/>
+</p:tagLst>
+</file>
+
+<file path=ppt/tags/tag15.xml><?xml version="1.0" encoding="utf-8"?>
+<p:tagLst xmlns:a="http://schemas.openxmlformats.org/drawingml/2006/main" xmlns:r="http://schemas.openxmlformats.org/officeDocument/2006/relationships" xmlns:p="http://schemas.openxmlformats.org/presentationml/2006/main">
+  <p:tag name="GENSWF_SLIDE_UID" val="{306F0067-97BF-486A-B043-E41C1A09968D}:361"/>
+</p:tagLst>
+</file>
+
+<file path=ppt/tags/tag16.xml><?xml version="1.0" encoding="utf-8"?>
+<p:tagLst xmlns:a="http://schemas.openxmlformats.org/drawingml/2006/main" xmlns:r="http://schemas.openxmlformats.org/officeDocument/2006/relationships" xmlns:p="http://schemas.openxmlformats.org/presentationml/2006/main">
+  <p:tag name="GENSWF_SLIDE_UID" val="{63AD3A78-8DD4-4CFB-A054-175DD9210187}:362"/>
+</p:tagLst>
+</file>
+
+<file path=ppt/tags/tag17.xml><?xml version="1.0" encoding="utf-8"?>
+<p:tagLst xmlns:a="http://schemas.openxmlformats.org/drawingml/2006/main" xmlns:r="http://schemas.openxmlformats.org/officeDocument/2006/relationships" xmlns:p="http://schemas.openxmlformats.org/presentationml/2006/main">
+  <p:tag name="GENSWF_SLIDE_UID" val="{69F67075-8FD3-4A8C-AE9E-DAAE27F579FB}:364"/>
+</p:tagLst>
+</file>
+
+<file path=ppt/tags/tag18.xml><?xml version="1.0" encoding="utf-8"?>
+<p:tagLst xmlns:a="http://schemas.openxmlformats.org/drawingml/2006/main" xmlns:r="http://schemas.openxmlformats.org/officeDocument/2006/relationships" xmlns:p="http://schemas.openxmlformats.org/presentationml/2006/main">
+  <p:tag name="GENSWF_SLIDE_UID" val="{4BFEF5C3-3595-423B-B8F4-C288618318DF}:379"/>
+</p:tagLst>
+</file>
+
+<file path=ppt/tags/tag19.xml><?xml version="1.0" encoding="utf-8"?>
+<p:tagLst xmlns:a="http://schemas.openxmlformats.org/drawingml/2006/main" xmlns:r="http://schemas.openxmlformats.org/officeDocument/2006/relationships" xmlns:p="http://schemas.openxmlformats.org/presentationml/2006/main">
+  <p:tag name="GENSWF_SLIDE_UID" val="{7E3DE7AD-ACD2-44CE-A2A3-353F75305CC3}:365"/>
+</p:tagLst>
+</file>
+
+<file path=ppt/tags/tag2.xml><?xml version="1.0" encoding="utf-8"?>
+<p:tagLst xmlns:a="http://schemas.openxmlformats.org/drawingml/2006/main" xmlns:r="http://schemas.openxmlformats.org/officeDocument/2006/relationships" xmlns:p="http://schemas.openxmlformats.org/presentationml/2006/main">
+  <p:tag name="GENSWF_SLIDE_UID" val="{8AE8C027-5672-438F-A221-C53C2998B666}:377"/>
+</p:tagLst>
+</file>
+
+<file path=ppt/tags/tag20.xml><?xml version="1.0" encoding="utf-8"?>
+<p:tagLst xmlns:a="http://schemas.openxmlformats.org/drawingml/2006/main" xmlns:r="http://schemas.openxmlformats.org/officeDocument/2006/relationships" xmlns:p="http://schemas.openxmlformats.org/presentationml/2006/main">
+  <p:tag name="GENSWF_SLIDE_UID" val="{B80A0980-A4F9-4ED2-86D7-AE24588D1AB3}:366"/>
+</p:tagLst>
+</file>
+
+<file path=ppt/tags/tag21.xml><?xml version="1.0" encoding="utf-8"?>
+<p:tagLst xmlns:a="http://schemas.openxmlformats.org/drawingml/2006/main" xmlns:r="http://schemas.openxmlformats.org/officeDocument/2006/relationships" xmlns:p="http://schemas.openxmlformats.org/presentationml/2006/main">
+  <p:tag name="GENSWF_SLIDE_UID" val="{1A9CC48F-9429-46C9-BFE3-EB1F8DA2C05C}:367"/>
+</p:tagLst>
+</file>
+
+<file path=ppt/tags/tag22.xml><?xml version="1.0" encoding="utf-8"?>
+<p:tagLst xmlns:a="http://schemas.openxmlformats.org/drawingml/2006/main" xmlns:r="http://schemas.openxmlformats.org/officeDocument/2006/relationships" xmlns:p="http://schemas.openxmlformats.org/presentationml/2006/main">
+  <p:tag name="GENSWF_SLIDE_UID" val="{8FBFF52C-2E9B-48BC-A5F5-BC83089361DE}:368"/>
+</p:tagLst>
+</file>
+
+<file path=ppt/tags/tag23.xml><?xml version="1.0" encoding="utf-8"?>
+<p:tagLst xmlns:a="http://schemas.openxmlformats.org/drawingml/2006/main" xmlns:r="http://schemas.openxmlformats.org/officeDocument/2006/relationships" xmlns:p="http://schemas.openxmlformats.org/presentationml/2006/main">
+  <p:tag name="GENSWF_SLIDE_UID" val="{8D39E5C6-A92B-46DB-8545-146859354541}:369"/>
+</p:tagLst>
+</file>
+
+<file path=ppt/tags/tag24.xml><?xml version="1.0" encoding="utf-8"?>
+<p:tagLst xmlns:a="http://schemas.openxmlformats.org/drawingml/2006/main" xmlns:r="http://schemas.openxmlformats.org/officeDocument/2006/relationships" xmlns:p="http://schemas.openxmlformats.org/presentationml/2006/main">
+  <p:tag name="GENSWF_SLIDE_UID" val="{6652AD58-7993-40E2-8A88-DB3832737447}:370"/>
+</p:tagLst>
+</file>
+
+<file path=ppt/tags/tag25.xml><?xml version="1.0" encoding="utf-8"?>
+<p:tagLst xmlns:a="http://schemas.openxmlformats.org/drawingml/2006/main" xmlns:r="http://schemas.openxmlformats.org/officeDocument/2006/relationships" xmlns:p="http://schemas.openxmlformats.org/presentationml/2006/main">
+  <p:tag name="GENSWF_SLIDE_UID" val="{3E7A3CB8-FB8A-49CE-876A-49C706513AFA}:371"/>
+</p:tagLst>
+</file>
+
+<file path=ppt/tags/tag26.xml><?xml version="1.0" encoding="utf-8"?>
+<p:tagLst xmlns:a="http://schemas.openxmlformats.org/drawingml/2006/main" xmlns:r="http://schemas.openxmlformats.org/officeDocument/2006/relationships" xmlns:p="http://schemas.openxmlformats.org/presentationml/2006/main">
+  <p:tag name="GENSWF_SLIDE_UID" val="{9A4FA2D8-3D13-4F4C-A798-BEA73055FEDD}:372"/>
+</p:tagLst>
+</file>
+
+<file path=ppt/tags/tag27.xml><?xml version="1.0" encoding="utf-8"?>
+<p:tagLst xmlns:a="http://schemas.openxmlformats.org/drawingml/2006/main" xmlns:r="http://schemas.openxmlformats.org/officeDocument/2006/relationships" xmlns:p="http://schemas.openxmlformats.org/presentationml/2006/main">
+  <p:tag name="GENSWF_SLIDE_UID" val="{6A199E6A-AD46-49E7-9207-5BD84D9904D7}:373"/>
+</p:tagLst>
+</file>
+
+<file path=ppt/tags/tag28.xml><?xml version="1.0" encoding="utf-8"?>
+<p:tagLst xmlns:a="http://schemas.openxmlformats.org/drawingml/2006/main" xmlns:r="http://schemas.openxmlformats.org/officeDocument/2006/relationships" xmlns:p="http://schemas.openxmlformats.org/presentationml/2006/main">
+  <p:tag name="GENSWF_SLIDE_UID" val="{A10EB570-F99D-4F3B-B0CD-5291267A24AB}:383"/>
+</p:tagLst>
+</file>
+
+<file path=ppt/tags/tag29.xml><?xml version="1.0" encoding="utf-8"?>
+<p:tagLst xmlns:a="http://schemas.openxmlformats.org/drawingml/2006/main" xmlns:r="http://schemas.openxmlformats.org/officeDocument/2006/relationships" xmlns:p="http://schemas.openxmlformats.org/presentationml/2006/main">
+  <p:tag name="GENSWF_SLIDE_UID" val="{57CEDABF-3CA7-40EB-8455-AB6E0D05A70E}:374"/>
+</p:tagLst>
+</file>
+
+<file path=ppt/tags/tag3.xml><?xml version="1.0" encoding="utf-8"?>
+<p:tagLst xmlns:a="http://schemas.openxmlformats.org/drawingml/2006/main" xmlns:r="http://schemas.openxmlformats.org/officeDocument/2006/relationships" xmlns:p="http://schemas.openxmlformats.org/presentationml/2006/main">
+  <p:tag name="GENSWF_SLIDE_UID" val="{A5E643E8-E92A-4495-9435-1CAABE02F86E}:378"/>
+</p:tagLst>
+</file>
+
+<file path=ppt/tags/tag30.xml><?xml version="1.0" encoding="utf-8"?>
+<p:tagLst xmlns:a="http://schemas.openxmlformats.org/drawingml/2006/main" xmlns:r="http://schemas.openxmlformats.org/officeDocument/2006/relationships" xmlns:p="http://schemas.openxmlformats.org/presentationml/2006/main">
+  <p:tag name="GENSWF_SLIDE_UID" val="{C5C70B1C-332C-4172-8101-BE895C88E17F}:375"/>
+</p:tagLst>
+</file>
+
+<file path=ppt/tags/tag4.xml><?xml version="1.0" encoding="utf-8"?>
+<p:tagLst xmlns:a="http://schemas.openxmlformats.org/drawingml/2006/main" xmlns:r="http://schemas.openxmlformats.org/officeDocument/2006/relationships" xmlns:p="http://schemas.openxmlformats.org/presentationml/2006/main">
+  <p:tag name="GENSWF_SLIDE_UID" val="{C891076B-ADE4-40DE-A0CB-AB09F0869115}:353"/>
+</p:tagLst>
+</file>
+
+<file path=ppt/tags/tag5.xml><?xml version="1.0" encoding="utf-8"?>
+<p:tagLst xmlns:a="http://schemas.openxmlformats.org/drawingml/2006/main" xmlns:r="http://schemas.openxmlformats.org/officeDocument/2006/relationships" xmlns:p="http://schemas.openxmlformats.org/presentationml/2006/main">
+  <p:tag name="GENSWF_SLIDE_UID" val="{C70CA8DD-767F-490C-9C9B-FF5D0E767093}:380"/>
+</p:tagLst>
+</file>
+
+<file path=ppt/tags/tag6.xml><?xml version="1.0" encoding="utf-8"?>
+<p:tagLst xmlns:a="http://schemas.openxmlformats.org/drawingml/2006/main" xmlns:r="http://schemas.openxmlformats.org/officeDocument/2006/relationships" xmlns:p="http://schemas.openxmlformats.org/presentationml/2006/main">
+  <p:tag name="GENSWF_SLIDE_UID" val="{7927C31A-8D67-4634-A415-E7466DACA2CE}:381"/>
+</p:tagLst>
+</file>
+
+<file path=ppt/tags/tag7.xml><?xml version="1.0" encoding="utf-8"?>
+<p:tagLst xmlns:a="http://schemas.openxmlformats.org/drawingml/2006/main" xmlns:r="http://schemas.openxmlformats.org/officeDocument/2006/relationships" xmlns:p="http://schemas.openxmlformats.org/presentationml/2006/main">
+  <p:tag name="GENSWF_SLIDE_UID" val="{06E37FE0-D772-47AC-AB10-75650C53D3D9}:382"/>
+</p:tagLst>
+</file>
+
+<file path=ppt/tags/tag8.xml><?xml version="1.0" encoding="utf-8"?>
+<p:tagLst xmlns:a="http://schemas.openxmlformats.org/drawingml/2006/main" xmlns:r="http://schemas.openxmlformats.org/officeDocument/2006/relationships" xmlns:p="http://schemas.openxmlformats.org/presentationml/2006/main">
+  <p:tag name="GENSWF_SLIDE_UID" val="{437079CB-7251-4BAE-9755-2B15959250F7}:355"/>
+</p:tagLst>
+</file>
+
+<file path=ppt/tags/tag9.xml><?xml version="1.0" encoding="utf-8"?>
+<p:tagLst xmlns:a="http://schemas.openxmlformats.org/drawingml/2006/main" xmlns:r="http://schemas.openxmlformats.org/officeDocument/2006/relationships" xmlns:p="http://schemas.openxmlformats.org/presentationml/2006/main">
+  <p:tag name="GENSWF_SLIDE_UID" val="{6FF087D3-7077-47B6-871A-E5442FFF20EF}:354"/>
 </p:tagLst>
 </file>
 
